--- a/se/file/se.pptx
+++ b/se/file/se.pptx
@@ -8,6 +8,8 @@
     <p:sldId id="256" r:id="rId2"/>
     <p:sldId id="257" r:id="rId3"/>
     <p:sldId id="258" r:id="rId4"/>
+    <p:sldId id="259" r:id="rId5"/>
+    <p:sldId id="260" r:id="rId6"/>
   </p:sldIdLst>
   <p:sldSz cx="12192000" cy="6858000"/>
   <p:notesSz cx="6858000" cy="9144000"/>
@@ -106,6 +108,11 @@
       </a:defRPr>
     </a:lvl9pPr>
   </p:defaultTextStyle>
+  <p:extLst>
+    <p:ext uri="{EFAFB233-063F-42B5-8137-9DF3F51BA10A}">
+      <p15:sldGuideLst xmlns:p15="http://schemas.microsoft.com/office/powerpoint/2012/main"/>
+    </p:ext>
+  </p:extLst>
 </p:presentation>
 </file>
 
@@ -256,7 +263,7 @@
           <a:p>
             <a:fld id="{84617D17-380A-4B40-92EC-38E177F94207}" type="datetimeFigureOut">
               <a:rPr lang="zh-CN" altLang="en-US" smtClean="0"/>
-              <a:t>2026/4/6</a:t>
+              <a:t>2026/4/8</a:t>
             </a:fld>
             <a:endParaRPr lang="zh-CN" altLang="en-US"/>
           </a:p>
@@ -454,7 +461,7 @@
           <a:p>
             <a:fld id="{84617D17-380A-4B40-92EC-38E177F94207}" type="datetimeFigureOut">
               <a:rPr lang="zh-CN" altLang="en-US" smtClean="0"/>
-              <a:t>2026/4/6</a:t>
+              <a:t>2026/4/8</a:t>
             </a:fld>
             <a:endParaRPr lang="zh-CN" altLang="en-US"/>
           </a:p>
@@ -662,7 +669,7 @@
           <a:p>
             <a:fld id="{84617D17-380A-4B40-92EC-38E177F94207}" type="datetimeFigureOut">
               <a:rPr lang="zh-CN" altLang="en-US" smtClean="0"/>
-              <a:t>2026/4/6</a:t>
+              <a:t>2026/4/8</a:t>
             </a:fld>
             <a:endParaRPr lang="zh-CN" altLang="en-US"/>
           </a:p>
@@ -860,7 +867,7 @@
           <a:p>
             <a:fld id="{84617D17-380A-4B40-92EC-38E177F94207}" type="datetimeFigureOut">
               <a:rPr lang="zh-CN" altLang="en-US" smtClean="0"/>
-              <a:t>2026/4/6</a:t>
+              <a:t>2026/4/8</a:t>
             </a:fld>
             <a:endParaRPr lang="zh-CN" altLang="en-US"/>
           </a:p>
@@ -1135,7 +1142,7 @@
           <a:p>
             <a:fld id="{84617D17-380A-4B40-92EC-38E177F94207}" type="datetimeFigureOut">
               <a:rPr lang="zh-CN" altLang="en-US" smtClean="0"/>
-              <a:t>2026/4/6</a:t>
+              <a:t>2026/4/8</a:t>
             </a:fld>
             <a:endParaRPr lang="zh-CN" altLang="en-US"/>
           </a:p>
@@ -1400,7 +1407,7 @@
           <a:p>
             <a:fld id="{84617D17-380A-4B40-92EC-38E177F94207}" type="datetimeFigureOut">
               <a:rPr lang="zh-CN" altLang="en-US" smtClean="0"/>
-              <a:t>2026/4/6</a:t>
+              <a:t>2026/4/8</a:t>
             </a:fld>
             <a:endParaRPr lang="zh-CN" altLang="en-US"/>
           </a:p>
@@ -1812,7 +1819,7 @@
           <a:p>
             <a:fld id="{84617D17-380A-4B40-92EC-38E177F94207}" type="datetimeFigureOut">
               <a:rPr lang="zh-CN" altLang="en-US" smtClean="0"/>
-              <a:t>2026/4/6</a:t>
+              <a:t>2026/4/8</a:t>
             </a:fld>
             <a:endParaRPr lang="zh-CN" altLang="en-US"/>
           </a:p>
@@ -1953,7 +1960,7 @@
           <a:p>
             <a:fld id="{84617D17-380A-4B40-92EC-38E177F94207}" type="datetimeFigureOut">
               <a:rPr lang="zh-CN" altLang="en-US" smtClean="0"/>
-              <a:t>2026/4/6</a:t>
+              <a:t>2026/4/8</a:t>
             </a:fld>
             <a:endParaRPr lang="zh-CN" altLang="en-US"/>
           </a:p>
@@ -2066,7 +2073,7 @@
           <a:p>
             <a:fld id="{84617D17-380A-4B40-92EC-38E177F94207}" type="datetimeFigureOut">
               <a:rPr lang="zh-CN" altLang="en-US" smtClean="0"/>
-              <a:t>2026/4/6</a:t>
+              <a:t>2026/4/8</a:t>
             </a:fld>
             <a:endParaRPr lang="zh-CN" altLang="en-US"/>
           </a:p>
@@ -2377,7 +2384,7 @@
           <a:p>
             <a:fld id="{84617D17-380A-4B40-92EC-38E177F94207}" type="datetimeFigureOut">
               <a:rPr lang="zh-CN" altLang="en-US" smtClean="0"/>
-              <a:t>2026/4/6</a:t>
+              <a:t>2026/4/8</a:t>
             </a:fld>
             <a:endParaRPr lang="zh-CN" altLang="en-US"/>
           </a:p>
@@ -2665,7 +2672,7 @@
           <a:p>
             <a:fld id="{84617D17-380A-4B40-92EC-38E177F94207}" type="datetimeFigureOut">
               <a:rPr lang="zh-CN" altLang="en-US" smtClean="0"/>
-              <a:t>2026/4/6</a:t>
+              <a:t>2026/4/8</a:t>
             </a:fld>
             <a:endParaRPr lang="zh-CN" altLang="en-US"/>
           </a:p>
@@ -2906,7 +2913,7 @@
           <a:p>
             <a:fld id="{84617D17-380A-4B40-92EC-38E177F94207}" type="datetimeFigureOut">
               <a:rPr lang="zh-CN" altLang="en-US" smtClean="0"/>
-              <a:t>2026/4/6</a:t>
+              <a:t>2026/4/8</a:t>
             </a:fld>
             <a:endParaRPr lang="zh-CN" altLang="en-US"/>
           </a:p>
@@ -7626,6 +7633,1291 @@
 </p:sld>
 </file>
 
+<file path=ppt/slides/slide4.xml><?xml version="1.0" encoding="utf-8"?>
+<p:sld xmlns:a="http://schemas.openxmlformats.org/drawingml/2006/main" xmlns:r="http://schemas.openxmlformats.org/officeDocument/2006/relationships" xmlns:p="http://schemas.openxmlformats.org/presentationml/2006/main">
+  <p:cSld>
+    <p:spTree>
+      <p:nvGrpSpPr>
+        <p:cNvPr id="1" name=""/>
+        <p:cNvGrpSpPr/>
+        <p:nvPr/>
+      </p:nvGrpSpPr>
+      <p:grpSpPr>
+        <a:xfrm>
+          <a:off x="0" y="0"/>
+          <a:ext cx="0" cy="0"/>
+          <a:chOff x="0" y="0"/>
+          <a:chExt cx="0" cy="0"/>
+        </a:xfrm>
+      </p:grpSpPr>
+      <p:sp>
+        <p:nvSpPr>
+          <p:cNvPr id="2" name="矩形: 圆角 1">
+            <a:extLst>
+              <a:ext uri="{FF2B5EF4-FFF2-40B4-BE49-F238E27FC236}">
+                <a16:creationId xmlns:a16="http://schemas.microsoft.com/office/drawing/2014/main" id="{DA8BF606-F579-0A6D-68FF-A909E292481D}"/>
+              </a:ext>
+            </a:extLst>
+          </p:cNvPr>
+          <p:cNvSpPr/>
+          <p:nvPr/>
+        </p:nvSpPr>
+        <p:spPr>
+          <a:xfrm>
+            <a:off x="2133599" y="3003176"/>
+            <a:ext cx="1080000" cy="432000"/>
+          </a:xfrm>
+          <a:prstGeom prst="roundRect">
+            <a:avLst>
+              <a:gd name="adj" fmla="val 50000"/>
+            </a:avLst>
+          </a:prstGeom>
+          <a:noFill/>
+          <a:ln>
+            <a:solidFill>
+              <a:schemeClr val="tx1"/>
+            </a:solidFill>
+          </a:ln>
+        </p:spPr>
+        <p:style>
+          <a:lnRef idx="2">
+            <a:schemeClr val="accent1">
+              <a:shade val="15000"/>
+            </a:schemeClr>
+          </a:lnRef>
+          <a:fillRef idx="1">
+            <a:schemeClr val="accent1"/>
+          </a:fillRef>
+          <a:effectRef idx="0">
+            <a:schemeClr val="accent1"/>
+          </a:effectRef>
+          <a:fontRef idx="minor">
+            <a:schemeClr val="lt1"/>
+          </a:fontRef>
+        </p:style>
+        <p:txBody>
+          <a:bodyPr rtlCol="0" anchor="ctr"/>
+          <a:lstStyle/>
+          <a:p>
+            <a:pPr algn="ctr"/>
+            <a:r>
+              <a:rPr lang="en-US" altLang="zh-CN" sz="1400" dirty="0">
+                <a:solidFill>
+                  <a:sysClr val="windowText" lastClr="000000"/>
+                </a:solidFill>
+              </a:rPr>
+              <a:t>Input</a:t>
+            </a:r>
+            <a:endParaRPr lang="zh-CN" altLang="en-US" sz="1400" dirty="0">
+              <a:solidFill>
+                <a:sysClr val="windowText" lastClr="000000"/>
+              </a:solidFill>
+            </a:endParaRPr>
+          </a:p>
+        </p:txBody>
+      </p:sp>
+      <p:sp>
+        <p:nvSpPr>
+          <p:cNvPr id="3" name="矩形: 圆角 2">
+            <a:extLst>
+              <a:ext uri="{FF2B5EF4-FFF2-40B4-BE49-F238E27FC236}">
+                <a16:creationId xmlns:a16="http://schemas.microsoft.com/office/drawing/2014/main" id="{0E358D40-46EA-C5F4-1FCC-80FB04B92037}"/>
+              </a:ext>
+            </a:extLst>
+          </p:cNvPr>
+          <p:cNvSpPr/>
+          <p:nvPr/>
+        </p:nvSpPr>
+        <p:spPr>
+          <a:xfrm>
+            <a:off x="5576046" y="3003176"/>
+            <a:ext cx="1080000" cy="432000"/>
+          </a:xfrm>
+          <a:prstGeom prst="roundRect">
+            <a:avLst>
+              <a:gd name="adj" fmla="val 50000"/>
+            </a:avLst>
+          </a:prstGeom>
+          <a:noFill/>
+          <a:ln>
+            <a:solidFill>
+              <a:schemeClr val="tx1"/>
+            </a:solidFill>
+          </a:ln>
+        </p:spPr>
+        <p:style>
+          <a:lnRef idx="2">
+            <a:schemeClr val="accent1">
+              <a:shade val="15000"/>
+            </a:schemeClr>
+          </a:lnRef>
+          <a:fillRef idx="1">
+            <a:schemeClr val="accent1"/>
+          </a:fillRef>
+          <a:effectRef idx="0">
+            <a:schemeClr val="accent1"/>
+          </a:effectRef>
+          <a:fontRef idx="minor">
+            <a:schemeClr val="lt1"/>
+          </a:fontRef>
+        </p:style>
+        <p:txBody>
+          <a:bodyPr rtlCol="0" anchor="ctr"/>
+          <a:lstStyle/>
+          <a:p>
+            <a:pPr algn="ctr"/>
+            <a:r>
+              <a:rPr lang="en-US" altLang="zh-CN" sz="1400" dirty="0">
+                <a:solidFill>
+                  <a:sysClr val="windowText" lastClr="000000"/>
+                </a:solidFill>
+              </a:rPr>
+              <a:t>Output</a:t>
+            </a:r>
+            <a:endParaRPr lang="zh-CN" altLang="en-US" sz="1400" dirty="0">
+              <a:solidFill>
+                <a:sysClr val="windowText" lastClr="000000"/>
+              </a:solidFill>
+            </a:endParaRPr>
+          </a:p>
+        </p:txBody>
+      </p:sp>
+      <p:sp>
+        <p:nvSpPr>
+          <p:cNvPr id="4" name="矩形 3">
+            <a:extLst>
+              <a:ext uri="{FF2B5EF4-FFF2-40B4-BE49-F238E27FC236}">
+                <a16:creationId xmlns:a16="http://schemas.microsoft.com/office/drawing/2014/main" id="{E594FB9D-EEA8-53F6-580D-CC4ACBEA67D9}"/>
+              </a:ext>
+            </a:extLst>
+          </p:cNvPr>
+          <p:cNvSpPr/>
+          <p:nvPr/>
+        </p:nvSpPr>
+        <p:spPr>
+          <a:xfrm>
+            <a:off x="3854823" y="3003176"/>
+            <a:ext cx="1080000" cy="432000"/>
+          </a:xfrm>
+          <a:prstGeom prst="rect">
+            <a:avLst/>
+          </a:prstGeom>
+          <a:noFill/>
+          <a:ln>
+            <a:solidFill>
+              <a:schemeClr val="tx1"/>
+            </a:solidFill>
+          </a:ln>
+        </p:spPr>
+        <p:style>
+          <a:lnRef idx="2">
+            <a:schemeClr val="accent1">
+              <a:shade val="15000"/>
+            </a:schemeClr>
+          </a:lnRef>
+          <a:fillRef idx="1">
+            <a:schemeClr val="accent1"/>
+          </a:fillRef>
+          <a:effectRef idx="0">
+            <a:schemeClr val="accent1"/>
+          </a:effectRef>
+          <a:fontRef idx="minor">
+            <a:schemeClr val="lt1"/>
+          </a:fontRef>
+        </p:style>
+        <p:txBody>
+          <a:bodyPr rtlCol="0" anchor="ctr"/>
+          <a:lstStyle/>
+          <a:p>
+            <a:pPr algn="ctr"/>
+            <a:r>
+              <a:rPr lang="en-US" altLang="zh-CN" sz="1400" dirty="0">
+                <a:solidFill>
+                  <a:sysClr val="windowText" lastClr="000000"/>
+                </a:solidFill>
+              </a:rPr>
+              <a:t>Process</a:t>
+            </a:r>
+            <a:endParaRPr lang="zh-CN" altLang="en-US" sz="1400" dirty="0">
+              <a:solidFill>
+                <a:sysClr val="windowText" lastClr="000000"/>
+              </a:solidFill>
+            </a:endParaRPr>
+          </a:p>
+        </p:txBody>
+      </p:sp>
+      <p:cxnSp>
+        <p:nvCxnSpPr>
+          <p:cNvPr id="5" name="直接箭头连接符 4">
+            <a:extLst>
+              <a:ext uri="{FF2B5EF4-FFF2-40B4-BE49-F238E27FC236}">
+                <a16:creationId xmlns:a16="http://schemas.microsoft.com/office/drawing/2014/main" id="{F88A4AAB-03B8-9BFB-918B-3CEBD77F0C8C}"/>
+              </a:ext>
+            </a:extLst>
+          </p:cNvPr>
+          <p:cNvCxnSpPr>
+            <a:stCxn id="2" idx="3"/>
+            <a:endCxn id="4" idx="1"/>
+          </p:cNvCxnSpPr>
+          <p:nvPr/>
+        </p:nvCxnSpPr>
+        <p:spPr>
+          <a:xfrm>
+            <a:off x="3213599" y="3219176"/>
+            <a:ext cx="641224" cy="0"/>
+          </a:xfrm>
+          <a:prstGeom prst="straightConnector1">
+            <a:avLst/>
+          </a:prstGeom>
+          <a:ln>
+            <a:solidFill>
+              <a:schemeClr val="tx1"/>
+            </a:solidFill>
+            <a:tailEnd type="triangle"/>
+          </a:ln>
+        </p:spPr>
+        <p:style>
+          <a:lnRef idx="1">
+            <a:schemeClr val="accent1"/>
+          </a:lnRef>
+          <a:fillRef idx="0">
+            <a:schemeClr val="accent1"/>
+          </a:fillRef>
+          <a:effectRef idx="0">
+            <a:schemeClr val="accent1"/>
+          </a:effectRef>
+          <a:fontRef idx="minor">
+            <a:schemeClr val="tx1"/>
+          </a:fontRef>
+        </p:style>
+      </p:cxnSp>
+      <p:cxnSp>
+        <p:nvCxnSpPr>
+          <p:cNvPr id="6" name="直接箭头连接符 5">
+            <a:extLst>
+              <a:ext uri="{FF2B5EF4-FFF2-40B4-BE49-F238E27FC236}">
+                <a16:creationId xmlns:a16="http://schemas.microsoft.com/office/drawing/2014/main" id="{D5B200D8-BFBA-96C0-80DE-1ABAE0C24557}"/>
+              </a:ext>
+            </a:extLst>
+          </p:cNvPr>
+          <p:cNvCxnSpPr>
+            <a:stCxn id="4" idx="3"/>
+            <a:endCxn id="3" idx="1"/>
+          </p:cNvCxnSpPr>
+          <p:nvPr/>
+        </p:nvCxnSpPr>
+        <p:spPr>
+          <a:xfrm>
+            <a:off x="4934823" y="3219176"/>
+            <a:ext cx="641223" cy="0"/>
+          </a:xfrm>
+          <a:prstGeom prst="straightConnector1">
+            <a:avLst/>
+          </a:prstGeom>
+          <a:ln>
+            <a:solidFill>
+              <a:schemeClr val="tx1"/>
+            </a:solidFill>
+            <a:tailEnd type="triangle"/>
+          </a:ln>
+        </p:spPr>
+        <p:style>
+          <a:lnRef idx="1">
+            <a:schemeClr val="accent1"/>
+          </a:lnRef>
+          <a:fillRef idx="0">
+            <a:schemeClr val="accent1"/>
+          </a:fillRef>
+          <a:effectRef idx="0">
+            <a:schemeClr val="accent1"/>
+          </a:effectRef>
+          <a:fontRef idx="minor">
+            <a:schemeClr val="tx1"/>
+          </a:fontRef>
+        </p:style>
+      </p:cxnSp>
+      <p:sp>
+        <p:nvSpPr>
+          <p:cNvPr id="7" name="矩形 6">
+            <a:extLst>
+              <a:ext uri="{FF2B5EF4-FFF2-40B4-BE49-F238E27FC236}">
+                <a16:creationId xmlns:a16="http://schemas.microsoft.com/office/drawing/2014/main" id="{5A96AA1C-0430-3E3E-02A1-3A8DDFBF5DA1}"/>
+              </a:ext>
+            </a:extLst>
+          </p:cNvPr>
+          <p:cNvSpPr/>
+          <p:nvPr/>
+        </p:nvSpPr>
+        <p:spPr>
+          <a:xfrm>
+            <a:off x="3854823" y="3003176"/>
+            <a:ext cx="72000" cy="432000"/>
+          </a:xfrm>
+          <a:prstGeom prst="rect">
+            <a:avLst/>
+          </a:prstGeom>
+          <a:noFill/>
+          <a:ln>
+            <a:solidFill>
+              <a:schemeClr val="tx1"/>
+            </a:solidFill>
+          </a:ln>
+        </p:spPr>
+        <p:style>
+          <a:lnRef idx="2">
+            <a:schemeClr val="accent1">
+              <a:shade val="15000"/>
+            </a:schemeClr>
+          </a:lnRef>
+          <a:fillRef idx="1">
+            <a:schemeClr val="accent1"/>
+          </a:fillRef>
+          <a:effectRef idx="0">
+            <a:schemeClr val="accent1"/>
+          </a:effectRef>
+          <a:fontRef idx="minor">
+            <a:schemeClr val="lt1"/>
+          </a:fontRef>
+        </p:style>
+        <p:txBody>
+          <a:bodyPr rtlCol="0" anchor="ctr"/>
+          <a:lstStyle/>
+          <a:p>
+            <a:pPr algn="ctr"/>
+            <a:endParaRPr lang="zh-CN" altLang="en-US" sz="1400" dirty="0">
+              <a:solidFill>
+                <a:sysClr val="windowText" lastClr="000000"/>
+              </a:solidFill>
+            </a:endParaRPr>
+          </a:p>
+        </p:txBody>
+      </p:sp>
+      <p:sp>
+        <p:nvSpPr>
+          <p:cNvPr id="8" name="矩形 7">
+            <a:extLst>
+              <a:ext uri="{FF2B5EF4-FFF2-40B4-BE49-F238E27FC236}">
+                <a16:creationId xmlns:a16="http://schemas.microsoft.com/office/drawing/2014/main" id="{4CE26EF7-8561-98C7-12FA-46F082357087}"/>
+              </a:ext>
+            </a:extLst>
+          </p:cNvPr>
+          <p:cNvSpPr/>
+          <p:nvPr/>
+        </p:nvSpPr>
+        <p:spPr>
+          <a:xfrm>
+            <a:off x="4862823" y="3003176"/>
+            <a:ext cx="72000" cy="432000"/>
+          </a:xfrm>
+          <a:prstGeom prst="rect">
+            <a:avLst/>
+          </a:prstGeom>
+          <a:noFill/>
+          <a:ln>
+            <a:solidFill>
+              <a:schemeClr val="tx1"/>
+            </a:solidFill>
+          </a:ln>
+        </p:spPr>
+        <p:style>
+          <a:lnRef idx="2">
+            <a:schemeClr val="accent1">
+              <a:shade val="15000"/>
+            </a:schemeClr>
+          </a:lnRef>
+          <a:fillRef idx="1">
+            <a:schemeClr val="accent1"/>
+          </a:fillRef>
+          <a:effectRef idx="0">
+            <a:schemeClr val="accent1"/>
+          </a:effectRef>
+          <a:fontRef idx="minor">
+            <a:schemeClr val="lt1"/>
+          </a:fontRef>
+        </p:style>
+        <p:txBody>
+          <a:bodyPr rtlCol="0" anchor="ctr"/>
+          <a:lstStyle/>
+          <a:p>
+            <a:pPr algn="ctr"/>
+            <a:endParaRPr lang="zh-CN" altLang="en-US" sz="1400" dirty="0">
+              <a:solidFill>
+                <a:sysClr val="windowText" lastClr="000000"/>
+              </a:solidFill>
+            </a:endParaRPr>
+          </a:p>
+        </p:txBody>
+      </p:sp>
+    </p:spTree>
+    <p:extLst>
+      <p:ext uri="{BB962C8B-B14F-4D97-AF65-F5344CB8AC3E}">
+        <p14:creationId xmlns:p14="http://schemas.microsoft.com/office/powerpoint/2010/main" val="2102171465"/>
+      </p:ext>
+    </p:extLst>
+  </p:cSld>
+  <p:clrMapOvr>
+    <a:masterClrMapping/>
+  </p:clrMapOvr>
+</p:sld>
+</file>
+
+<file path=ppt/slides/slide5.xml><?xml version="1.0" encoding="utf-8"?>
+<p:sld xmlns:a="http://schemas.openxmlformats.org/drawingml/2006/main" xmlns:r="http://schemas.openxmlformats.org/officeDocument/2006/relationships" xmlns:p="http://schemas.openxmlformats.org/presentationml/2006/main">
+  <p:cSld>
+    <p:spTree>
+      <p:nvGrpSpPr>
+        <p:cNvPr id="1" name=""/>
+        <p:cNvGrpSpPr/>
+        <p:nvPr/>
+      </p:nvGrpSpPr>
+      <p:grpSpPr>
+        <a:xfrm>
+          <a:off x="0" y="0"/>
+          <a:ext cx="0" cy="0"/>
+          <a:chOff x="0" y="0"/>
+          <a:chExt cx="0" cy="0"/>
+        </a:xfrm>
+      </p:grpSpPr>
+      <p:sp>
+        <p:nvSpPr>
+          <p:cNvPr id="2" name="矩形 1">
+            <a:extLst>
+              <a:ext uri="{FF2B5EF4-FFF2-40B4-BE49-F238E27FC236}">
+                <a16:creationId xmlns:a16="http://schemas.microsoft.com/office/drawing/2014/main" id="{A1E753DC-5683-05C5-EE08-C36DD3570936}"/>
+              </a:ext>
+            </a:extLst>
+          </p:cNvPr>
+          <p:cNvSpPr/>
+          <p:nvPr/>
+        </p:nvSpPr>
+        <p:spPr>
+          <a:xfrm>
+            <a:off x="3521035" y="2565026"/>
+            <a:ext cx="1440000" cy="432000"/>
+          </a:xfrm>
+          <a:prstGeom prst="rect">
+            <a:avLst/>
+          </a:prstGeom>
+          <a:noFill/>
+          <a:ln>
+            <a:solidFill>
+              <a:schemeClr val="tx1"/>
+            </a:solidFill>
+          </a:ln>
+        </p:spPr>
+        <p:style>
+          <a:lnRef idx="2">
+            <a:schemeClr val="accent1">
+              <a:shade val="15000"/>
+            </a:schemeClr>
+          </a:lnRef>
+          <a:fillRef idx="1">
+            <a:schemeClr val="accent1"/>
+          </a:fillRef>
+          <a:effectRef idx="0">
+            <a:schemeClr val="accent1"/>
+          </a:effectRef>
+          <a:fontRef idx="minor">
+            <a:schemeClr val="lt1"/>
+          </a:fontRef>
+        </p:style>
+        <p:txBody>
+          <a:bodyPr rtlCol="0" anchor="ctr"/>
+          <a:lstStyle/>
+          <a:p>
+            <a:pPr algn="ctr"/>
+            <a:r>
+              <a:rPr lang="en-US" altLang="zh-CN" sz="1400" dirty="0">
+                <a:solidFill>
+                  <a:sysClr val="windowText" lastClr="000000"/>
+                </a:solidFill>
+              </a:rPr>
+              <a:t>Main module</a:t>
+            </a:r>
+            <a:endParaRPr lang="zh-CN" altLang="en-US" sz="1400" dirty="0">
+              <a:solidFill>
+                <a:sysClr val="windowText" lastClr="000000"/>
+              </a:solidFill>
+            </a:endParaRPr>
+          </a:p>
+        </p:txBody>
+      </p:sp>
+      <p:sp>
+        <p:nvSpPr>
+          <p:cNvPr id="3" name="矩形 2">
+            <a:extLst>
+              <a:ext uri="{FF2B5EF4-FFF2-40B4-BE49-F238E27FC236}">
+                <a16:creationId xmlns:a16="http://schemas.microsoft.com/office/drawing/2014/main" id="{DA54C39A-6BE6-F3DD-DF1D-F72CBB88C157}"/>
+              </a:ext>
+            </a:extLst>
+          </p:cNvPr>
+          <p:cNvSpPr/>
+          <p:nvPr/>
+        </p:nvSpPr>
+        <p:spPr>
+          <a:xfrm>
+            <a:off x="1879848" y="3341300"/>
+            <a:ext cx="1080000" cy="432000"/>
+          </a:xfrm>
+          <a:prstGeom prst="rect">
+            <a:avLst/>
+          </a:prstGeom>
+          <a:noFill/>
+          <a:ln>
+            <a:solidFill>
+              <a:schemeClr val="tx1"/>
+            </a:solidFill>
+          </a:ln>
+        </p:spPr>
+        <p:style>
+          <a:lnRef idx="2">
+            <a:schemeClr val="accent1">
+              <a:shade val="15000"/>
+            </a:schemeClr>
+          </a:lnRef>
+          <a:fillRef idx="1">
+            <a:schemeClr val="accent1"/>
+          </a:fillRef>
+          <a:effectRef idx="0">
+            <a:schemeClr val="accent1"/>
+          </a:effectRef>
+          <a:fontRef idx="minor">
+            <a:schemeClr val="lt1"/>
+          </a:fontRef>
+        </p:style>
+        <p:txBody>
+          <a:bodyPr rtlCol="0" anchor="ctr"/>
+          <a:lstStyle/>
+          <a:p>
+            <a:pPr algn="ctr"/>
+            <a:r>
+              <a:rPr lang="en-US" altLang="zh-CN" sz="1400" dirty="0">
+                <a:solidFill>
+                  <a:sysClr val="windowText" lastClr="000000"/>
+                </a:solidFill>
+              </a:rPr>
+              <a:t>Module 1</a:t>
+            </a:r>
+            <a:endParaRPr lang="zh-CN" altLang="en-US" sz="1400" dirty="0">
+              <a:solidFill>
+                <a:sysClr val="windowText" lastClr="000000"/>
+              </a:solidFill>
+            </a:endParaRPr>
+          </a:p>
+        </p:txBody>
+      </p:sp>
+      <p:sp>
+        <p:nvSpPr>
+          <p:cNvPr id="4" name="矩形 3">
+            <a:extLst>
+              <a:ext uri="{FF2B5EF4-FFF2-40B4-BE49-F238E27FC236}">
+                <a16:creationId xmlns:a16="http://schemas.microsoft.com/office/drawing/2014/main" id="{3BE34B77-8650-9404-32C9-1D6BEE1C861C}"/>
+              </a:ext>
+            </a:extLst>
+          </p:cNvPr>
+          <p:cNvSpPr/>
+          <p:nvPr/>
+        </p:nvSpPr>
+        <p:spPr>
+          <a:xfrm>
+            <a:off x="5522223" y="3341300"/>
+            <a:ext cx="1080000" cy="432000"/>
+          </a:xfrm>
+          <a:prstGeom prst="rect">
+            <a:avLst/>
+          </a:prstGeom>
+          <a:noFill/>
+          <a:ln>
+            <a:solidFill>
+              <a:schemeClr val="tx1"/>
+            </a:solidFill>
+          </a:ln>
+        </p:spPr>
+        <p:style>
+          <a:lnRef idx="2">
+            <a:schemeClr val="accent1">
+              <a:shade val="15000"/>
+            </a:schemeClr>
+          </a:lnRef>
+          <a:fillRef idx="1">
+            <a:schemeClr val="accent1"/>
+          </a:fillRef>
+          <a:effectRef idx="0">
+            <a:schemeClr val="accent1"/>
+          </a:effectRef>
+          <a:fontRef idx="minor">
+            <a:schemeClr val="lt1"/>
+          </a:fontRef>
+        </p:style>
+        <p:txBody>
+          <a:bodyPr rtlCol="0" anchor="ctr"/>
+          <a:lstStyle/>
+          <a:p>
+            <a:pPr algn="ctr"/>
+            <a:r>
+              <a:rPr lang="en-US" altLang="zh-CN" sz="1400" dirty="0">
+                <a:solidFill>
+                  <a:sysClr val="windowText" lastClr="000000"/>
+                </a:solidFill>
+              </a:rPr>
+              <a:t>Module 2</a:t>
+            </a:r>
+            <a:endParaRPr lang="zh-CN" altLang="en-US" sz="1400" dirty="0">
+              <a:solidFill>
+                <a:sysClr val="windowText" lastClr="000000"/>
+              </a:solidFill>
+            </a:endParaRPr>
+          </a:p>
+        </p:txBody>
+      </p:sp>
+      <p:sp>
+        <p:nvSpPr>
+          <p:cNvPr id="5" name="矩形 4">
+            <a:extLst>
+              <a:ext uri="{FF2B5EF4-FFF2-40B4-BE49-F238E27FC236}">
+                <a16:creationId xmlns:a16="http://schemas.microsoft.com/office/drawing/2014/main" id="{03ADFC04-8633-B10C-81E4-816338DD2FB5}"/>
+              </a:ext>
+            </a:extLst>
+          </p:cNvPr>
+          <p:cNvSpPr/>
+          <p:nvPr/>
+        </p:nvSpPr>
+        <p:spPr>
+          <a:xfrm>
+            <a:off x="530598" y="4117575"/>
+            <a:ext cx="1080000" cy="432000"/>
+          </a:xfrm>
+          <a:prstGeom prst="rect">
+            <a:avLst/>
+          </a:prstGeom>
+          <a:noFill/>
+          <a:ln>
+            <a:solidFill>
+              <a:schemeClr val="tx1"/>
+            </a:solidFill>
+          </a:ln>
+        </p:spPr>
+        <p:style>
+          <a:lnRef idx="2">
+            <a:schemeClr val="accent1">
+              <a:shade val="15000"/>
+            </a:schemeClr>
+          </a:lnRef>
+          <a:fillRef idx="1">
+            <a:schemeClr val="accent1"/>
+          </a:fillRef>
+          <a:effectRef idx="0">
+            <a:schemeClr val="accent1"/>
+          </a:effectRef>
+          <a:fontRef idx="minor">
+            <a:schemeClr val="lt1"/>
+          </a:fontRef>
+        </p:style>
+        <p:txBody>
+          <a:bodyPr rtlCol="0" anchor="ctr"/>
+          <a:lstStyle/>
+          <a:p>
+            <a:pPr algn="ctr"/>
+            <a:r>
+              <a:rPr lang="en-US" altLang="zh-CN" sz="1400" dirty="0">
+                <a:solidFill>
+                  <a:sysClr val="windowText" lastClr="000000"/>
+                </a:solidFill>
+              </a:rPr>
+              <a:t>Module 1.1</a:t>
+            </a:r>
+            <a:endParaRPr lang="zh-CN" altLang="en-US" sz="1400" dirty="0">
+              <a:solidFill>
+                <a:sysClr val="windowText" lastClr="000000"/>
+              </a:solidFill>
+            </a:endParaRPr>
+          </a:p>
+        </p:txBody>
+      </p:sp>
+      <p:sp>
+        <p:nvSpPr>
+          <p:cNvPr id="7" name="矩形 6">
+            <a:extLst>
+              <a:ext uri="{FF2B5EF4-FFF2-40B4-BE49-F238E27FC236}">
+                <a16:creationId xmlns:a16="http://schemas.microsoft.com/office/drawing/2014/main" id="{58A8E6BB-57D2-AF92-1278-5BF1AF8407AD}"/>
+              </a:ext>
+            </a:extLst>
+          </p:cNvPr>
+          <p:cNvSpPr/>
+          <p:nvPr/>
+        </p:nvSpPr>
+        <p:spPr>
+          <a:xfrm>
+            <a:off x="1879848" y="4117575"/>
+            <a:ext cx="1080000" cy="432000"/>
+          </a:xfrm>
+          <a:prstGeom prst="rect">
+            <a:avLst/>
+          </a:prstGeom>
+          <a:noFill/>
+          <a:ln>
+            <a:solidFill>
+              <a:schemeClr val="tx1"/>
+            </a:solidFill>
+          </a:ln>
+        </p:spPr>
+        <p:style>
+          <a:lnRef idx="2">
+            <a:schemeClr val="accent1">
+              <a:shade val="15000"/>
+            </a:schemeClr>
+          </a:lnRef>
+          <a:fillRef idx="1">
+            <a:schemeClr val="accent1"/>
+          </a:fillRef>
+          <a:effectRef idx="0">
+            <a:schemeClr val="accent1"/>
+          </a:effectRef>
+          <a:fontRef idx="minor">
+            <a:schemeClr val="lt1"/>
+          </a:fontRef>
+        </p:style>
+        <p:txBody>
+          <a:bodyPr rtlCol="0" anchor="ctr"/>
+          <a:lstStyle/>
+          <a:p>
+            <a:pPr algn="ctr"/>
+            <a:r>
+              <a:rPr lang="en-US" altLang="zh-CN" sz="1400" dirty="0">
+                <a:solidFill>
+                  <a:sysClr val="windowText" lastClr="000000"/>
+                </a:solidFill>
+              </a:rPr>
+              <a:t>Module 1.2</a:t>
+            </a:r>
+            <a:endParaRPr lang="zh-CN" altLang="en-US" sz="1400" dirty="0">
+              <a:solidFill>
+                <a:sysClr val="windowText" lastClr="000000"/>
+              </a:solidFill>
+            </a:endParaRPr>
+          </a:p>
+        </p:txBody>
+      </p:sp>
+      <p:sp>
+        <p:nvSpPr>
+          <p:cNvPr id="8" name="矩形 7">
+            <a:extLst>
+              <a:ext uri="{FF2B5EF4-FFF2-40B4-BE49-F238E27FC236}">
+                <a16:creationId xmlns:a16="http://schemas.microsoft.com/office/drawing/2014/main" id="{921DC9CA-5EB0-4872-8667-D1BC7E605B45}"/>
+              </a:ext>
+            </a:extLst>
+          </p:cNvPr>
+          <p:cNvSpPr/>
+          <p:nvPr/>
+        </p:nvSpPr>
+        <p:spPr>
+          <a:xfrm>
+            <a:off x="3229098" y="4117575"/>
+            <a:ext cx="1080000" cy="432000"/>
+          </a:xfrm>
+          <a:prstGeom prst="rect">
+            <a:avLst/>
+          </a:prstGeom>
+          <a:noFill/>
+          <a:ln>
+            <a:solidFill>
+              <a:schemeClr val="tx1"/>
+            </a:solidFill>
+          </a:ln>
+        </p:spPr>
+        <p:style>
+          <a:lnRef idx="2">
+            <a:schemeClr val="accent1">
+              <a:shade val="15000"/>
+            </a:schemeClr>
+          </a:lnRef>
+          <a:fillRef idx="1">
+            <a:schemeClr val="accent1"/>
+          </a:fillRef>
+          <a:effectRef idx="0">
+            <a:schemeClr val="accent1"/>
+          </a:effectRef>
+          <a:fontRef idx="minor">
+            <a:schemeClr val="lt1"/>
+          </a:fontRef>
+        </p:style>
+        <p:txBody>
+          <a:bodyPr rtlCol="0" anchor="ctr"/>
+          <a:lstStyle/>
+          <a:p>
+            <a:pPr algn="ctr"/>
+            <a:r>
+              <a:rPr lang="en-US" altLang="zh-CN" sz="1400" dirty="0">
+                <a:solidFill>
+                  <a:sysClr val="windowText" lastClr="000000"/>
+                </a:solidFill>
+              </a:rPr>
+              <a:t>Module 1.3</a:t>
+            </a:r>
+            <a:endParaRPr lang="zh-CN" altLang="en-US" sz="1400" dirty="0">
+              <a:solidFill>
+                <a:sysClr val="windowText" lastClr="000000"/>
+              </a:solidFill>
+            </a:endParaRPr>
+          </a:p>
+        </p:txBody>
+      </p:sp>
+      <p:sp>
+        <p:nvSpPr>
+          <p:cNvPr id="9" name="矩形 8">
+            <a:extLst>
+              <a:ext uri="{FF2B5EF4-FFF2-40B4-BE49-F238E27FC236}">
+                <a16:creationId xmlns:a16="http://schemas.microsoft.com/office/drawing/2014/main" id="{E9540928-FE03-6B32-1052-EFB9DEABCC2A}"/>
+              </a:ext>
+            </a:extLst>
+          </p:cNvPr>
+          <p:cNvSpPr/>
+          <p:nvPr/>
+        </p:nvSpPr>
+        <p:spPr>
+          <a:xfrm>
+            <a:off x="4847598" y="4117575"/>
+            <a:ext cx="1080000" cy="432000"/>
+          </a:xfrm>
+          <a:prstGeom prst="rect">
+            <a:avLst/>
+          </a:prstGeom>
+          <a:noFill/>
+          <a:ln>
+            <a:solidFill>
+              <a:schemeClr val="tx1"/>
+            </a:solidFill>
+          </a:ln>
+        </p:spPr>
+        <p:style>
+          <a:lnRef idx="2">
+            <a:schemeClr val="accent1">
+              <a:shade val="15000"/>
+            </a:schemeClr>
+          </a:lnRef>
+          <a:fillRef idx="1">
+            <a:schemeClr val="accent1"/>
+          </a:fillRef>
+          <a:effectRef idx="0">
+            <a:schemeClr val="accent1"/>
+          </a:effectRef>
+          <a:fontRef idx="minor">
+            <a:schemeClr val="lt1"/>
+          </a:fontRef>
+        </p:style>
+        <p:txBody>
+          <a:bodyPr rtlCol="0" anchor="ctr"/>
+          <a:lstStyle/>
+          <a:p>
+            <a:pPr algn="ctr"/>
+            <a:r>
+              <a:rPr lang="en-US" altLang="zh-CN" sz="1400" dirty="0">
+                <a:solidFill>
+                  <a:sysClr val="windowText" lastClr="000000"/>
+                </a:solidFill>
+              </a:rPr>
+              <a:t>Module 2.1</a:t>
+            </a:r>
+            <a:endParaRPr lang="zh-CN" altLang="en-US" sz="1400" dirty="0">
+              <a:solidFill>
+                <a:sysClr val="windowText" lastClr="000000"/>
+              </a:solidFill>
+            </a:endParaRPr>
+          </a:p>
+        </p:txBody>
+      </p:sp>
+      <p:sp>
+        <p:nvSpPr>
+          <p:cNvPr id="10" name="矩形 9">
+            <a:extLst>
+              <a:ext uri="{FF2B5EF4-FFF2-40B4-BE49-F238E27FC236}">
+                <a16:creationId xmlns:a16="http://schemas.microsoft.com/office/drawing/2014/main" id="{608DB6A5-97B7-B99D-FB2E-3954DA82F487}"/>
+              </a:ext>
+            </a:extLst>
+          </p:cNvPr>
+          <p:cNvSpPr/>
+          <p:nvPr/>
+        </p:nvSpPr>
+        <p:spPr>
+          <a:xfrm>
+            <a:off x="6196848" y="4117575"/>
+            <a:ext cx="1080000" cy="432000"/>
+          </a:xfrm>
+          <a:prstGeom prst="rect">
+            <a:avLst/>
+          </a:prstGeom>
+          <a:noFill/>
+          <a:ln>
+            <a:solidFill>
+              <a:schemeClr val="tx1"/>
+            </a:solidFill>
+          </a:ln>
+        </p:spPr>
+        <p:style>
+          <a:lnRef idx="2">
+            <a:schemeClr val="accent1">
+              <a:shade val="15000"/>
+            </a:schemeClr>
+          </a:lnRef>
+          <a:fillRef idx="1">
+            <a:schemeClr val="accent1"/>
+          </a:fillRef>
+          <a:effectRef idx="0">
+            <a:schemeClr val="accent1"/>
+          </a:effectRef>
+          <a:fontRef idx="minor">
+            <a:schemeClr val="lt1"/>
+          </a:fontRef>
+        </p:style>
+        <p:txBody>
+          <a:bodyPr rtlCol="0" anchor="ctr"/>
+          <a:lstStyle/>
+          <a:p>
+            <a:pPr algn="ctr"/>
+            <a:r>
+              <a:rPr lang="en-US" altLang="zh-CN" sz="1400" dirty="0">
+                <a:solidFill>
+                  <a:sysClr val="windowText" lastClr="000000"/>
+                </a:solidFill>
+              </a:rPr>
+              <a:t>Module 2.2</a:t>
+            </a:r>
+            <a:endParaRPr lang="zh-CN" altLang="en-US" sz="1400" dirty="0">
+              <a:solidFill>
+                <a:sysClr val="windowText" lastClr="000000"/>
+              </a:solidFill>
+            </a:endParaRPr>
+          </a:p>
+        </p:txBody>
+      </p:sp>
+      <p:cxnSp>
+        <p:nvCxnSpPr>
+          <p:cNvPr id="14" name="连接符: 肘形 13">
+            <a:extLst>
+              <a:ext uri="{FF2B5EF4-FFF2-40B4-BE49-F238E27FC236}">
+                <a16:creationId xmlns:a16="http://schemas.microsoft.com/office/drawing/2014/main" id="{0CDCE40E-2479-C8FC-2559-0E9F296C5DBA}"/>
+              </a:ext>
+            </a:extLst>
+          </p:cNvPr>
+          <p:cNvCxnSpPr>
+            <a:stCxn id="2" idx="2"/>
+            <a:endCxn id="4" idx="0"/>
+          </p:cNvCxnSpPr>
+          <p:nvPr/>
+        </p:nvCxnSpPr>
+        <p:spPr>
+          <a:xfrm rot="16200000" flipH="1">
+            <a:off x="4979492" y="2258569"/>
+            <a:ext cx="344274" cy="1821188"/>
+          </a:xfrm>
+          <a:prstGeom prst="bentConnector3">
+            <a:avLst/>
+          </a:prstGeom>
+          <a:ln>
+            <a:solidFill>
+              <a:schemeClr val="tx1"/>
+            </a:solidFill>
+            <a:tailEnd type="triangle"/>
+          </a:ln>
+        </p:spPr>
+        <p:style>
+          <a:lnRef idx="1">
+            <a:schemeClr val="accent1"/>
+          </a:lnRef>
+          <a:fillRef idx="0">
+            <a:schemeClr val="accent1"/>
+          </a:fillRef>
+          <a:effectRef idx="0">
+            <a:schemeClr val="accent1"/>
+          </a:effectRef>
+          <a:fontRef idx="minor">
+            <a:schemeClr val="tx1"/>
+          </a:fontRef>
+        </p:style>
+      </p:cxnSp>
+      <p:cxnSp>
+        <p:nvCxnSpPr>
+          <p:cNvPr id="16" name="连接符: 肘形 15">
+            <a:extLst>
+              <a:ext uri="{FF2B5EF4-FFF2-40B4-BE49-F238E27FC236}">
+                <a16:creationId xmlns:a16="http://schemas.microsoft.com/office/drawing/2014/main" id="{8AB29A40-5C77-3063-EB56-E1E066259552}"/>
+              </a:ext>
+            </a:extLst>
+          </p:cNvPr>
+          <p:cNvCxnSpPr>
+            <a:stCxn id="2" idx="2"/>
+            <a:endCxn id="3" idx="0"/>
+          </p:cNvCxnSpPr>
+          <p:nvPr/>
+        </p:nvCxnSpPr>
+        <p:spPr>
+          <a:xfrm rot="5400000">
+            <a:off x="3158305" y="2258570"/>
+            <a:ext cx="344274" cy="1821187"/>
+          </a:xfrm>
+          <a:prstGeom prst="bentConnector3">
+            <a:avLst/>
+          </a:prstGeom>
+          <a:ln>
+            <a:solidFill>
+              <a:schemeClr val="tx1"/>
+            </a:solidFill>
+            <a:tailEnd type="triangle"/>
+          </a:ln>
+        </p:spPr>
+        <p:style>
+          <a:lnRef idx="1">
+            <a:schemeClr val="accent1"/>
+          </a:lnRef>
+          <a:fillRef idx="0">
+            <a:schemeClr val="accent1"/>
+          </a:fillRef>
+          <a:effectRef idx="0">
+            <a:schemeClr val="accent1"/>
+          </a:effectRef>
+          <a:fontRef idx="minor">
+            <a:schemeClr val="tx1"/>
+          </a:fontRef>
+        </p:style>
+      </p:cxnSp>
+      <p:cxnSp>
+        <p:nvCxnSpPr>
+          <p:cNvPr id="18" name="连接符: 肘形 17">
+            <a:extLst>
+              <a:ext uri="{FF2B5EF4-FFF2-40B4-BE49-F238E27FC236}">
+                <a16:creationId xmlns:a16="http://schemas.microsoft.com/office/drawing/2014/main" id="{C390A62B-1364-D47D-5D76-9A208D9318FD}"/>
+              </a:ext>
+            </a:extLst>
+          </p:cNvPr>
+          <p:cNvCxnSpPr>
+            <a:stCxn id="3" idx="2"/>
+            <a:endCxn id="5" idx="0"/>
+          </p:cNvCxnSpPr>
+          <p:nvPr/>
+        </p:nvCxnSpPr>
+        <p:spPr>
+          <a:xfrm rot="5400000">
+            <a:off x="1573086" y="3270812"/>
+            <a:ext cx="344275" cy="1349250"/>
+          </a:xfrm>
+          <a:prstGeom prst="bentConnector3">
+            <a:avLst/>
+          </a:prstGeom>
+          <a:ln>
+            <a:solidFill>
+              <a:schemeClr val="tx1"/>
+            </a:solidFill>
+            <a:tailEnd type="triangle"/>
+          </a:ln>
+        </p:spPr>
+        <p:style>
+          <a:lnRef idx="1">
+            <a:schemeClr val="accent1"/>
+          </a:lnRef>
+          <a:fillRef idx="0">
+            <a:schemeClr val="accent1"/>
+          </a:fillRef>
+          <a:effectRef idx="0">
+            <a:schemeClr val="accent1"/>
+          </a:effectRef>
+          <a:fontRef idx="minor">
+            <a:schemeClr val="tx1"/>
+          </a:fontRef>
+        </p:style>
+      </p:cxnSp>
+      <p:cxnSp>
+        <p:nvCxnSpPr>
+          <p:cNvPr id="20" name="连接符: 肘形 19">
+            <a:extLst>
+              <a:ext uri="{FF2B5EF4-FFF2-40B4-BE49-F238E27FC236}">
+                <a16:creationId xmlns:a16="http://schemas.microsoft.com/office/drawing/2014/main" id="{2BDB116A-86D7-A00E-0B7E-41E399F5D5F3}"/>
+              </a:ext>
+            </a:extLst>
+          </p:cNvPr>
+          <p:cNvCxnSpPr>
+            <a:stCxn id="3" idx="2"/>
+            <a:endCxn id="8" idx="0"/>
+          </p:cNvCxnSpPr>
+          <p:nvPr/>
+        </p:nvCxnSpPr>
+        <p:spPr>
+          <a:xfrm rot="16200000" flipH="1">
+            <a:off x="2922336" y="3270812"/>
+            <a:ext cx="344275" cy="1349250"/>
+          </a:xfrm>
+          <a:prstGeom prst="bentConnector3">
+            <a:avLst/>
+          </a:prstGeom>
+          <a:ln>
+            <a:solidFill>
+              <a:schemeClr val="tx1"/>
+            </a:solidFill>
+            <a:tailEnd type="triangle"/>
+          </a:ln>
+        </p:spPr>
+        <p:style>
+          <a:lnRef idx="1">
+            <a:schemeClr val="accent1"/>
+          </a:lnRef>
+          <a:fillRef idx="0">
+            <a:schemeClr val="accent1"/>
+          </a:fillRef>
+          <a:effectRef idx="0">
+            <a:schemeClr val="accent1"/>
+          </a:effectRef>
+          <a:fontRef idx="minor">
+            <a:schemeClr val="tx1"/>
+          </a:fontRef>
+        </p:style>
+      </p:cxnSp>
+      <p:cxnSp>
+        <p:nvCxnSpPr>
+          <p:cNvPr id="22" name="连接符: 肘形 21">
+            <a:extLst>
+              <a:ext uri="{FF2B5EF4-FFF2-40B4-BE49-F238E27FC236}">
+                <a16:creationId xmlns:a16="http://schemas.microsoft.com/office/drawing/2014/main" id="{3D0AB01D-6974-1901-2D3A-426B34ECAE34}"/>
+              </a:ext>
+            </a:extLst>
+          </p:cNvPr>
+          <p:cNvCxnSpPr>
+            <a:stCxn id="4" idx="2"/>
+            <a:endCxn id="9" idx="0"/>
+          </p:cNvCxnSpPr>
+          <p:nvPr/>
+        </p:nvCxnSpPr>
+        <p:spPr>
+          <a:xfrm rot="5400000">
+            <a:off x="5552774" y="3608125"/>
+            <a:ext cx="344275" cy="674625"/>
+          </a:xfrm>
+          <a:prstGeom prst="bentConnector3">
+            <a:avLst/>
+          </a:prstGeom>
+          <a:ln>
+            <a:solidFill>
+              <a:schemeClr val="tx1"/>
+            </a:solidFill>
+            <a:tailEnd type="triangle"/>
+          </a:ln>
+        </p:spPr>
+        <p:style>
+          <a:lnRef idx="1">
+            <a:schemeClr val="accent1"/>
+          </a:lnRef>
+          <a:fillRef idx="0">
+            <a:schemeClr val="accent1"/>
+          </a:fillRef>
+          <a:effectRef idx="0">
+            <a:schemeClr val="accent1"/>
+          </a:effectRef>
+          <a:fontRef idx="minor">
+            <a:schemeClr val="tx1"/>
+          </a:fontRef>
+        </p:style>
+      </p:cxnSp>
+      <p:cxnSp>
+        <p:nvCxnSpPr>
+          <p:cNvPr id="24" name="连接符: 肘形 23">
+            <a:extLst>
+              <a:ext uri="{FF2B5EF4-FFF2-40B4-BE49-F238E27FC236}">
+                <a16:creationId xmlns:a16="http://schemas.microsoft.com/office/drawing/2014/main" id="{7ED87473-3C70-4968-1832-ED4BA7BB9776}"/>
+              </a:ext>
+            </a:extLst>
+          </p:cNvPr>
+          <p:cNvCxnSpPr>
+            <a:stCxn id="4" idx="2"/>
+            <a:endCxn id="10" idx="0"/>
+          </p:cNvCxnSpPr>
+          <p:nvPr/>
+        </p:nvCxnSpPr>
+        <p:spPr>
+          <a:xfrm rot="16200000" flipH="1">
+            <a:off x="6227398" y="3608124"/>
+            <a:ext cx="344275" cy="674625"/>
+          </a:xfrm>
+          <a:prstGeom prst="bentConnector3">
+            <a:avLst/>
+          </a:prstGeom>
+          <a:ln>
+            <a:solidFill>
+              <a:schemeClr val="tx1"/>
+            </a:solidFill>
+            <a:tailEnd type="triangle"/>
+          </a:ln>
+        </p:spPr>
+        <p:style>
+          <a:lnRef idx="1">
+            <a:schemeClr val="accent1"/>
+          </a:lnRef>
+          <a:fillRef idx="0">
+            <a:schemeClr val="accent1"/>
+          </a:fillRef>
+          <a:effectRef idx="0">
+            <a:schemeClr val="accent1"/>
+          </a:effectRef>
+          <a:fontRef idx="minor">
+            <a:schemeClr val="tx1"/>
+          </a:fontRef>
+        </p:style>
+      </p:cxnSp>
+      <p:cxnSp>
+        <p:nvCxnSpPr>
+          <p:cNvPr id="26" name="直接箭头连接符 25">
+            <a:extLst>
+              <a:ext uri="{FF2B5EF4-FFF2-40B4-BE49-F238E27FC236}">
+                <a16:creationId xmlns:a16="http://schemas.microsoft.com/office/drawing/2014/main" id="{CFDF2220-54BF-82AD-3F44-1CF9E64021E2}"/>
+              </a:ext>
+            </a:extLst>
+          </p:cNvPr>
+          <p:cNvCxnSpPr>
+            <a:stCxn id="3" idx="2"/>
+            <a:endCxn id="7" idx="0"/>
+          </p:cNvCxnSpPr>
+          <p:nvPr/>
+        </p:nvCxnSpPr>
+        <p:spPr>
+          <a:xfrm>
+            <a:off x="2419848" y="3773300"/>
+            <a:ext cx="0" cy="344275"/>
+          </a:xfrm>
+          <a:prstGeom prst="straightConnector1">
+            <a:avLst/>
+          </a:prstGeom>
+          <a:ln>
+            <a:solidFill>
+              <a:schemeClr val="tx1"/>
+            </a:solidFill>
+            <a:tailEnd type="triangle"/>
+          </a:ln>
+        </p:spPr>
+        <p:style>
+          <a:lnRef idx="1">
+            <a:schemeClr val="accent1"/>
+          </a:lnRef>
+          <a:fillRef idx="0">
+            <a:schemeClr val="accent1"/>
+          </a:fillRef>
+          <a:effectRef idx="0">
+            <a:schemeClr val="accent1"/>
+          </a:effectRef>
+          <a:fontRef idx="minor">
+            <a:schemeClr val="tx1"/>
+          </a:fontRef>
+        </p:style>
+      </p:cxnSp>
+    </p:spTree>
+    <p:extLst>
+      <p:ext uri="{BB962C8B-B14F-4D97-AF65-F5344CB8AC3E}">
+        <p14:creationId xmlns:p14="http://schemas.microsoft.com/office/powerpoint/2010/main" val="636320580"/>
+      </p:ext>
+    </p:extLst>
+  </p:cSld>
+  <p:clrMapOvr>
+    <a:masterClrMapping/>
+  </p:clrMapOvr>
+</p:sld>
+</file>
+
 <file path=ppt/theme/theme1.xml><?xml version="1.0" encoding="utf-8"?>
 <a:theme xmlns:a="http://schemas.openxmlformats.org/drawingml/2006/main" name="Office 主题​​">
   <a:themeElements>

--- a/se/file/se.pptx
+++ b/se/file/se.pptx
@@ -10,6 +10,8 @@
     <p:sldId id="258" r:id="rId4"/>
     <p:sldId id="259" r:id="rId5"/>
     <p:sldId id="260" r:id="rId6"/>
+    <p:sldId id="261" r:id="rId7"/>
+    <p:sldId id="262" r:id="rId8"/>
   </p:sldIdLst>
   <p:sldSz cx="12192000" cy="6858000"/>
   <p:notesSz cx="6858000" cy="9144000"/>
@@ -263,7 +265,7 @@
           <a:p>
             <a:fld id="{84617D17-380A-4B40-92EC-38E177F94207}" type="datetimeFigureOut">
               <a:rPr lang="zh-CN" altLang="en-US" smtClean="0"/>
-              <a:t>2026/4/8</a:t>
+              <a:t>2026/4/9</a:t>
             </a:fld>
             <a:endParaRPr lang="zh-CN" altLang="en-US"/>
           </a:p>
@@ -461,7 +463,7 @@
           <a:p>
             <a:fld id="{84617D17-380A-4B40-92EC-38E177F94207}" type="datetimeFigureOut">
               <a:rPr lang="zh-CN" altLang="en-US" smtClean="0"/>
-              <a:t>2026/4/8</a:t>
+              <a:t>2026/4/9</a:t>
             </a:fld>
             <a:endParaRPr lang="zh-CN" altLang="en-US"/>
           </a:p>
@@ -669,7 +671,7 @@
           <a:p>
             <a:fld id="{84617D17-380A-4B40-92EC-38E177F94207}" type="datetimeFigureOut">
               <a:rPr lang="zh-CN" altLang="en-US" smtClean="0"/>
-              <a:t>2026/4/8</a:t>
+              <a:t>2026/4/9</a:t>
             </a:fld>
             <a:endParaRPr lang="zh-CN" altLang="en-US"/>
           </a:p>
@@ -867,7 +869,7 @@
           <a:p>
             <a:fld id="{84617D17-380A-4B40-92EC-38E177F94207}" type="datetimeFigureOut">
               <a:rPr lang="zh-CN" altLang="en-US" smtClean="0"/>
-              <a:t>2026/4/8</a:t>
+              <a:t>2026/4/9</a:t>
             </a:fld>
             <a:endParaRPr lang="zh-CN" altLang="en-US"/>
           </a:p>
@@ -1142,7 +1144,7 @@
           <a:p>
             <a:fld id="{84617D17-380A-4B40-92EC-38E177F94207}" type="datetimeFigureOut">
               <a:rPr lang="zh-CN" altLang="en-US" smtClean="0"/>
-              <a:t>2026/4/8</a:t>
+              <a:t>2026/4/9</a:t>
             </a:fld>
             <a:endParaRPr lang="zh-CN" altLang="en-US"/>
           </a:p>
@@ -1407,7 +1409,7 @@
           <a:p>
             <a:fld id="{84617D17-380A-4B40-92EC-38E177F94207}" type="datetimeFigureOut">
               <a:rPr lang="zh-CN" altLang="en-US" smtClean="0"/>
-              <a:t>2026/4/8</a:t>
+              <a:t>2026/4/9</a:t>
             </a:fld>
             <a:endParaRPr lang="zh-CN" altLang="en-US"/>
           </a:p>
@@ -1819,7 +1821,7 @@
           <a:p>
             <a:fld id="{84617D17-380A-4B40-92EC-38E177F94207}" type="datetimeFigureOut">
               <a:rPr lang="zh-CN" altLang="en-US" smtClean="0"/>
-              <a:t>2026/4/8</a:t>
+              <a:t>2026/4/9</a:t>
             </a:fld>
             <a:endParaRPr lang="zh-CN" altLang="en-US"/>
           </a:p>
@@ -1960,7 +1962,7 @@
           <a:p>
             <a:fld id="{84617D17-380A-4B40-92EC-38E177F94207}" type="datetimeFigureOut">
               <a:rPr lang="zh-CN" altLang="en-US" smtClean="0"/>
-              <a:t>2026/4/8</a:t>
+              <a:t>2026/4/9</a:t>
             </a:fld>
             <a:endParaRPr lang="zh-CN" altLang="en-US"/>
           </a:p>
@@ -2073,7 +2075,7 @@
           <a:p>
             <a:fld id="{84617D17-380A-4B40-92EC-38E177F94207}" type="datetimeFigureOut">
               <a:rPr lang="zh-CN" altLang="en-US" smtClean="0"/>
-              <a:t>2026/4/8</a:t>
+              <a:t>2026/4/9</a:t>
             </a:fld>
             <a:endParaRPr lang="zh-CN" altLang="en-US"/>
           </a:p>
@@ -2384,7 +2386,7 @@
           <a:p>
             <a:fld id="{84617D17-380A-4B40-92EC-38E177F94207}" type="datetimeFigureOut">
               <a:rPr lang="zh-CN" altLang="en-US" smtClean="0"/>
-              <a:t>2026/4/8</a:t>
+              <a:t>2026/4/9</a:t>
             </a:fld>
             <a:endParaRPr lang="zh-CN" altLang="en-US"/>
           </a:p>
@@ -2672,7 +2674,7 @@
           <a:p>
             <a:fld id="{84617D17-380A-4B40-92EC-38E177F94207}" type="datetimeFigureOut">
               <a:rPr lang="zh-CN" altLang="en-US" smtClean="0"/>
-              <a:t>2026/4/8</a:t>
+              <a:t>2026/4/9</a:t>
             </a:fld>
             <a:endParaRPr lang="zh-CN" altLang="en-US"/>
           </a:p>
@@ -2913,7 +2915,7 @@
           <a:p>
             <a:fld id="{84617D17-380A-4B40-92EC-38E177F94207}" type="datetimeFigureOut">
               <a:rPr lang="zh-CN" altLang="en-US" smtClean="0"/>
-              <a:t>2026/4/8</a:t>
+              <a:t>2026/4/9</a:t>
             </a:fld>
             <a:endParaRPr lang="zh-CN" altLang="en-US"/>
           </a:p>
@@ -8092,7 +8094,7 @@
         </p:nvSpPr>
         <p:spPr>
           <a:xfrm>
-            <a:off x="3521035" y="2565026"/>
+            <a:off x="5502235" y="2152650"/>
             <a:ext cx="1440000" cy="432000"/>
           </a:xfrm>
           <a:prstGeom prst="rect">
@@ -8156,7 +8158,7 @@
         </p:nvSpPr>
         <p:spPr>
           <a:xfrm>
-            <a:off x="1879848" y="3341300"/>
+            <a:off x="3861048" y="2928924"/>
             <a:ext cx="1080000" cy="432000"/>
           </a:xfrm>
           <a:prstGeom prst="rect">
@@ -8220,7 +8222,7 @@
         </p:nvSpPr>
         <p:spPr>
           <a:xfrm>
-            <a:off x="5522223" y="3341300"/>
+            <a:off x="7503423" y="2928924"/>
             <a:ext cx="1080000" cy="432000"/>
           </a:xfrm>
           <a:prstGeom prst="rect">
@@ -8284,7 +8286,7 @@
         </p:nvSpPr>
         <p:spPr>
           <a:xfrm>
-            <a:off x="530598" y="4117575"/>
+            <a:off x="2511798" y="3705199"/>
             <a:ext cx="1080000" cy="432000"/>
           </a:xfrm>
           <a:prstGeom prst="rect">
@@ -8348,7 +8350,7 @@
         </p:nvSpPr>
         <p:spPr>
           <a:xfrm>
-            <a:off x="1879848" y="4117575"/>
+            <a:off x="3861048" y="3705199"/>
             <a:ext cx="1080000" cy="432000"/>
           </a:xfrm>
           <a:prstGeom prst="rect">
@@ -8412,7 +8414,7 @@
         </p:nvSpPr>
         <p:spPr>
           <a:xfrm>
-            <a:off x="3229098" y="4117575"/>
+            <a:off x="5210298" y="3705199"/>
             <a:ext cx="1080000" cy="432000"/>
           </a:xfrm>
           <a:prstGeom prst="rect">
@@ -8476,7 +8478,7 @@
         </p:nvSpPr>
         <p:spPr>
           <a:xfrm>
-            <a:off x="4847598" y="4117575"/>
+            <a:off x="6828798" y="3705199"/>
             <a:ext cx="1080000" cy="432000"/>
           </a:xfrm>
           <a:prstGeom prst="rect">
@@ -8540,7 +8542,7 @@
         </p:nvSpPr>
         <p:spPr>
           <a:xfrm>
-            <a:off x="6196848" y="4117575"/>
+            <a:off x="8178048" y="3705199"/>
             <a:ext cx="1080000" cy="432000"/>
           </a:xfrm>
           <a:prstGeom prst="rect">
@@ -8607,7 +8609,7 @@
         </p:nvCxnSpPr>
         <p:spPr>
           <a:xfrm rot="16200000" flipH="1">
-            <a:off x="4979492" y="2258569"/>
+            <a:off x="6960692" y="1846193"/>
             <a:ext cx="344274" cy="1821188"/>
           </a:xfrm>
           <a:prstGeom prst="bentConnector3">
@@ -8652,7 +8654,7 @@
         </p:nvCxnSpPr>
         <p:spPr>
           <a:xfrm rot="5400000">
-            <a:off x="3158305" y="2258570"/>
+            <a:off x="5139505" y="1846194"/>
             <a:ext cx="344274" cy="1821187"/>
           </a:xfrm>
           <a:prstGeom prst="bentConnector3">
@@ -8697,7 +8699,7 @@
         </p:nvCxnSpPr>
         <p:spPr>
           <a:xfrm rot="5400000">
-            <a:off x="1573086" y="3270812"/>
+            <a:off x="3554286" y="2858436"/>
             <a:ext cx="344275" cy="1349250"/>
           </a:xfrm>
           <a:prstGeom prst="bentConnector3">
@@ -8742,7 +8744,7 @@
         </p:nvCxnSpPr>
         <p:spPr>
           <a:xfrm rot="16200000" flipH="1">
-            <a:off x="2922336" y="3270812"/>
+            <a:off x="4903536" y="2858436"/>
             <a:ext cx="344275" cy="1349250"/>
           </a:xfrm>
           <a:prstGeom prst="bentConnector3">
@@ -8787,7 +8789,7 @@
         </p:nvCxnSpPr>
         <p:spPr>
           <a:xfrm rot="5400000">
-            <a:off x="5552774" y="3608125"/>
+            <a:off x="7533974" y="3195749"/>
             <a:ext cx="344275" cy="674625"/>
           </a:xfrm>
           <a:prstGeom prst="bentConnector3">
@@ -8832,7 +8834,7 @@
         </p:nvCxnSpPr>
         <p:spPr>
           <a:xfrm rot="16200000" flipH="1">
-            <a:off x="6227398" y="3608124"/>
+            <a:off x="8208598" y="3195748"/>
             <a:ext cx="344275" cy="674625"/>
           </a:xfrm>
           <a:prstGeom prst="bentConnector3">
@@ -8877,7 +8879,7 @@
         </p:nvCxnSpPr>
         <p:spPr>
           <a:xfrm>
-            <a:off x="2419848" y="3773300"/>
+            <a:off x="4401048" y="3360924"/>
             <a:ext cx="0" cy="344275"/>
           </a:xfrm>
           <a:prstGeom prst="straightConnector1">
@@ -8909,6 +8911,1452 @@
     <p:extLst>
       <p:ext uri="{BB962C8B-B14F-4D97-AF65-F5344CB8AC3E}">
         <p14:creationId xmlns:p14="http://schemas.microsoft.com/office/powerpoint/2010/main" val="636320580"/>
+      </p:ext>
+    </p:extLst>
+  </p:cSld>
+  <p:clrMapOvr>
+    <a:masterClrMapping/>
+  </p:clrMapOvr>
+</p:sld>
+</file>
+
+<file path=ppt/slides/slide6.xml><?xml version="1.0" encoding="utf-8"?>
+<p:sld xmlns:a="http://schemas.openxmlformats.org/drawingml/2006/main" xmlns:r="http://schemas.openxmlformats.org/officeDocument/2006/relationships" xmlns:p="http://schemas.openxmlformats.org/presentationml/2006/main">
+  <p:cSld>
+    <p:spTree>
+      <p:nvGrpSpPr>
+        <p:cNvPr id="1" name=""/>
+        <p:cNvGrpSpPr/>
+        <p:nvPr/>
+      </p:nvGrpSpPr>
+      <p:grpSpPr>
+        <a:xfrm>
+          <a:off x="0" y="0"/>
+          <a:ext cx="0" cy="0"/>
+          <a:chOff x="0" y="0"/>
+          <a:chExt cx="0" cy="0"/>
+        </a:xfrm>
+      </p:grpSpPr>
+      <p:sp>
+        <p:nvSpPr>
+          <p:cNvPr id="16" name="矩形 15">
+            <a:extLst>
+              <a:ext uri="{FF2B5EF4-FFF2-40B4-BE49-F238E27FC236}">
+                <a16:creationId xmlns:a16="http://schemas.microsoft.com/office/drawing/2014/main" id="{FA27CA55-8B56-5F69-55B4-7EA8F4A86BA0}"/>
+              </a:ext>
+            </a:extLst>
+          </p:cNvPr>
+          <p:cNvSpPr/>
+          <p:nvPr/>
+        </p:nvSpPr>
+        <p:spPr>
+          <a:xfrm>
+            <a:off x="2906628" y="3456055"/>
+            <a:ext cx="1440000" cy="432000"/>
+          </a:xfrm>
+          <a:prstGeom prst="rect">
+            <a:avLst/>
+          </a:prstGeom>
+          <a:noFill/>
+          <a:ln>
+            <a:solidFill>
+              <a:schemeClr val="tx1"/>
+            </a:solidFill>
+          </a:ln>
+        </p:spPr>
+        <p:style>
+          <a:lnRef idx="2">
+            <a:schemeClr val="accent1">
+              <a:shade val="15000"/>
+            </a:schemeClr>
+          </a:lnRef>
+          <a:fillRef idx="1">
+            <a:schemeClr val="accent1"/>
+          </a:fillRef>
+          <a:effectRef idx="0">
+            <a:schemeClr val="accent1"/>
+          </a:effectRef>
+          <a:fontRef idx="minor">
+            <a:schemeClr val="lt1"/>
+          </a:fontRef>
+        </p:style>
+        <p:txBody>
+          <a:bodyPr rtlCol="0" anchor="ctr"/>
+          <a:lstStyle/>
+          <a:p>
+            <a:pPr algn="ctr"/>
+            <a:r>
+              <a:rPr lang="en-US" altLang="zh-CN" sz="1400" dirty="0">
+                <a:solidFill>
+                  <a:schemeClr val="tx1"/>
+                </a:solidFill>
+              </a:rPr>
+              <a:t>Control Module</a:t>
+            </a:r>
+            <a:endParaRPr lang="zh-CN" altLang="en-US" sz="1400" dirty="0">
+              <a:solidFill>
+                <a:schemeClr val="tx1"/>
+              </a:solidFill>
+            </a:endParaRPr>
+          </a:p>
+        </p:txBody>
+      </p:sp>
+      <p:sp>
+        <p:nvSpPr>
+          <p:cNvPr id="17" name="矩形 16">
+            <a:extLst>
+              <a:ext uri="{FF2B5EF4-FFF2-40B4-BE49-F238E27FC236}">
+                <a16:creationId xmlns:a16="http://schemas.microsoft.com/office/drawing/2014/main" id="{E92CB8F7-52B8-85D7-52CC-848707F59D80}"/>
+              </a:ext>
+            </a:extLst>
+          </p:cNvPr>
+          <p:cNvSpPr/>
+          <p:nvPr/>
+        </p:nvSpPr>
+        <p:spPr>
+          <a:xfrm>
+            <a:off x="4537467" y="4584922"/>
+            <a:ext cx="1440000" cy="432000"/>
+          </a:xfrm>
+          <a:prstGeom prst="rect">
+            <a:avLst/>
+          </a:prstGeom>
+          <a:noFill/>
+          <a:ln>
+            <a:solidFill>
+              <a:schemeClr val="tx1"/>
+            </a:solidFill>
+          </a:ln>
+        </p:spPr>
+        <p:style>
+          <a:lnRef idx="2">
+            <a:schemeClr val="accent1">
+              <a:shade val="15000"/>
+            </a:schemeClr>
+          </a:lnRef>
+          <a:fillRef idx="1">
+            <a:schemeClr val="accent1"/>
+          </a:fillRef>
+          <a:effectRef idx="0">
+            <a:schemeClr val="accent1"/>
+          </a:effectRef>
+          <a:fontRef idx="minor">
+            <a:schemeClr val="lt1"/>
+          </a:fontRef>
+        </p:style>
+        <p:txBody>
+          <a:bodyPr rtlCol="0" anchor="ctr"/>
+          <a:lstStyle/>
+          <a:p>
+            <a:pPr algn="ctr"/>
+            <a:r>
+              <a:rPr lang="en-US" altLang="zh-CN" sz="1400" dirty="0">
+                <a:solidFill>
+                  <a:schemeClr val="tx1"/>
+                </a:solidFill>
+              </a:rPr>
+              <a:t>Sub Module</a:t>
+            </a:r>
+            <a:endParaRPr lang="zh-CN" altLang="en-US" sz="1400" dirty="0">
+              <a:solidFill>
+                <a:schemeClr val="tx1"/>
+              </a:solidFill>
+            </a:endParaRPr>
+          </a:p>
+        </p:txBody>
+      </p:sp>
+      <p:sp>
+        <p:nvSpPr>
+          <p:cNvPr id="18" name="矩形 17">
+            <a:extLst>
+              <a:ext uri="{FF2B5EF4-FFF2-40B4-BE49-F238E27FC236}">
+                <a16:creationId xmlns:a16="http://schemas.microsoft.com/office/drawing/2014/main" id="{F2D81ACF-BD28-1586-58A9-CA31DB985238}"/>
+              </a:ext>
+            </a:extLst>
+          </p:cNvPr>
+          <p:cNvSpPr/>
+          <p:nvPr/>
+        </p:nvSpPr>
+        <p:spPr>
+          <a:xfrm>
+            <a:off x="1275789" y="4584922"/>
+            <a:ext cx="1440000" cy="432000"/>
+          </a:xfrm>
+          <a:prstGeom prst="rect">
+            <a:avLst/>
+          </a:prstGeom>
+          <a:noFill/>
+          <a:ln>
+            <a:solidFill>
+              <a:schemeClr val="tx1"/>
+            </a:solidFill>
+          </a:ln>
+        </p:spPr>
+        <p:style>
+          <a:lnRef idx="2">
+            <a:schemeClr val="accent1">
+              <a:shade val="15000"/>
+            </a:schemeClr>
+          </a:lnRef>
+          <a:fillRef idx="1">
+            <a:schemeClr val="accent1"/>
+          </a:fillRef>
+          <a:effectRef idx="0">
+            <a:schemeClr val="accent1"/>
+          </a:effectRef>
+          <a:fontRef idx="minor">
+            <a:schemeClr val="lt1"/>
+          </a:fontRef>
+        </p:style>
+        <p:txBody>
+          <a:bodyPr rtlCol="0" anchor="ctr"/>
+          <a:lstStyle/>
+          <a:p>
+            <a:pPr algn="ctr"/>
+            <a:r>
+              <a:rPr lang="en-US" altLang="zh-CN" sz="1400" dirty="0">
+                <a:solidFill>
+                  <a:schemeClr val="tx1"/>
+                </a:solidFill>
+              </a:rPr>
+              <a:t>Sub Module</a:t>
+            </a:r>
+            <a:endParaRPr lang="zh-CN" altLang="en-US" sz="1400" dirty="0">
+              <a:solidFill>
+                <a:schemeClr val="tx1"/>
+              </a:solidFill>
+            </a:endParaRPr>
+          </a:p>
+        </p:txBody>
+      </p:sp>
+      <p:sp>
+        <p:nvSpPr>
+          <p:cNvPr id="24" name="矩形 23">
+            <a:extLst>
+              <a:ext uri="{FF2B5EF4-FFF2-40B4-BE49-F238E27FC236}">
+                <a16:creationId xmlns:a16="http://schemas.microsoft.com/office/drawing/2014/main" id="{F1F824BA-CDDA-19CB-C9D7-7C417F1D9C42}"/>
+              </a:ext>
+            </a:extLst>
+          </p:cNvPr>
+          <p:cNvSpPr/>
+          <p:nvPr/>
+        </p:nvSpPr>
+        <p:spPr>
+          <a:xfrm>
+            <a:off x="8565374" y="3429000"/>
+            <a:ext cx="1440000" cy="432000"/>
+          </a:xfrm>
+          <a:prstGeom prst="rect">
+            <a:avLst/>
+          </a:prstGeom>
+          <a:noFill/>
+          <a:ln>
+            <a:solidFill>
+              <a:schemeClr val="tx1"/>
+            </a:solidFill>
+          </a:ln>
+        </p:spPr>
+        <p:style>
+          <a:lnRef idx="2">
+            <a:schemeClr val="accent1">
+              <a:shade val="15000"/>
+            </a:schemeClr>
+          </a:lnRef>
+          <a:fillRef idx="1">
+            <a:schemeClr val="accent1"/>
+          </a:fillRef>
+          <a:effectRef idx="0">
+            <a:schemeClr val="accent1"/>
+          </a:effectRef>
+          <a:fontRef idx="minor">
+            <a:schemeClr val="lt1"/>
+          </a:fontRef>
+        </p:style>
+        <p:txBody>
+          <a:bodyPr rtlCol="0" anchor="ctr"/>
+          <a:lstStyle/>
+          <a:p>
+            <a:pPr algn="ctr"/>
+            <a:r>
+              <a:rPr lang="en-US" altLang="zh-CN" sz="1400" dirty="0">
+                <a:solidFill>
+                  <a:schemeClr val="tx1"/>
+                </a:solidFill>
+              </a:rPr>
+              <a:t>Control Module</a:t>
+            </a:r>
+            <a:endParaRPr lang="zh-CN" altLang="en-US" sz="1400" dirty="0">
+              <a:solidFill>
+                <a:schemeClr val="tx1"/>
+              </a:solidFill>
+            </a:endParaRPr>
+          </a:p>
+        </p:txBody>
+      </p:sp>
+      <p:sp>
+        <p:nvSpPr>
+          <p:cNvPr id="25" name="矩形 24">
+            <a:extLst>
+              <a:ext uri="{FF2B5EF4-FFF2-40B4-BE49-F238E27FC236}">
+                <a16:creationId xmlns:a16="http://schemas.microsoft.com/office/drawing/2014/main" id="{B18FEB46-C820-76CB-FF90-BE6D2A46F7BD}"/>
+              </a:ext>
+            </a:extLst>
+          </p:cNvPr>
+          <p:cNvSpPr/>
+          <p:nvPr/>
+        </p:nvSpPr>
+        <p:spPr>
+          <a:xfrm>
+            <a:off x="10196213" y="4557867"/>
+            <a:ext cx="1440000" cy="432000"/>
+          </a:xfrm>
+          <a:prstGeom prst="rect">
+            <a:avLst/>
+          </a:prstGeom>
+          <a:noFill/>
+          <a:ln>
+            <a:solidFill>
+              <a:schemeClr val="tx1"/>
+            </a:solidFill>
+          </a:ln>
+        </p:spPr>
+        <p:style>
+          <a:lnRef idx="2">
+            <a:schemeClr val="accent1">
+              <a:shade val="15000"/>
+            </a:schemeClr>
+          </a:lnRef>
+          <a:fillRef idx="1">
+            <a:schemeClr val="accent1"/>
+          </a:fillRef>
+          <a:effectRef idx="0">
+            <a:schemeClr val="accent1"/>
+          </a:effectRef>
+          <a:fontRef idx="minor">
+            <a:schemeClr val="lt1"/>
+          </a:fontRef>
+        </p:style>
+        <p:txBody>
+          <a:bodyPr rtlCol="0" anchor="ctr"/>
+          <a:lstStyle/>
+          <a:p>
+            <a:pPr algn="ctr"/>
+            <a:r>
+              <a:rPr lang="en-US" altLang="zh-CN" sz="1400" dirty="0">
+                <a:solidFill>
+                  <a:schemeClr val="tx1"/>
+                </a:solidFill>
+              </a:rPr>
+              <a:t>Sub Module</a:t>
+            </a:r>
+            <a:endParaRPr lang="zh-CN" altLang="en-US" sz="1400" dirty="0">
+              <a:solidFill>
+                <a:schemeClr val="tx1"/>
+              </a:solidFill>
+            </a:endParaRPr>
+          </a:p>
+        </p:txBody>
+      </p:sp>
+      <p:sp>
+        <p:nvSpPr>
+          <p:cNvPr id="26" name="矩形 25">
+            <a:extLst>
+              <a:ext uri="{FF2B5EF4-FFF2-40B4-BE49-F238E27FC236}">
+                <a16:creationId xmlns:a16="http://schemas.microsoft.com/office/drawing/2014/main" id="{973EB21F-9189-A50A-5CE6-0F2EACA892DB}"/>
+              </a:ext>
+            </a:extLst>
+          </p:cNvPr>
+          <p:cNvSpPr/>
+          <p:nvPr/>
+        </p:nvSpPr>
+        <p:spPr>
+          <a:xfrm>
+            <a:off x="6934535" y="4557867"/>
+            <a:ext cx="1440000" cy="432000"/>
+          </a:xfrm>
+          <a:prstGeom prst="rect">
+            <a:avLst/>
+          </a:prstGeom>
+          <a:noFill/>
+          <a:ln>
+            <a:solidFill>
+              <a:schemeClr val="tx1"/>
+            </a:solidFill>
+          </a:ln>
+        </p:spPr>
+        <p:style>
+          <a:lnRef idx="2">
+            <a:schemeClr val="accent1">
+              <a:shade val="15000"/>
+            </a:schemeClr>
+          </a:lnRef>
+          <a:fillRef idx="1">
+            <a:schemeClr val="accent1"/>
+          </a:fillRef>
+          <a:effectRef idx="0">
+            <a:schemeClr val="accent1"/>
+          </a:effectRef>
+          <a:fontRef idx="minor">
+            <a:schemeClr val="lt1"/>
+          </a:fontRef>
+        </p:style>
+        <p:txBody>
+          <a:bodyPr rtlCol="0" anchor="ctr"/>
+          <a:lstStyle/>
+          <a:p>
+            <a:pPr algn="ctr"/>
+            <a:r>
+              <a:rPr lang="en-US" altLang="zh-CN" sz="1400" dirty="0">
+                <a:solidFill>
+                  <a:schemeClr val="tx1"/>
+                </a:solidFill>
+              </a:rPr>
+              <a:t>Sub Module</a:t>
+            </a:r>
+            <a:endParaRPr lang="zh-CN" altLang="en-US" sz="1400" dirty="0">
+              <a:solidFill>
+                <a:schemeClr val="tx1"/>
+              </a:solidFill>
+            </a:endParaRPr>
+          </a:p>
+        </p:txBody>
+      </p:sp>
+      <p:sp>
+        <p:nvSpPr>
+          <p:cNvPr id="27" name="流程图: 决策 26">
+            <a:extLst>
+              <a:ext uri="{FF2B5EF4-FFF2-40B4-BE49-F238E27FC236}">
+                <a16:creationId xmlns:a16="http://schemas.microsoft.com/office/drawing/2014/main" id="{0A2CE3E8-B460-6B2E-A0BB-FE08E4602E7B}"/>
+              </a:ext>
+            </a:extLst>
+          </p:cNvPr>
+          <p:cNvSpPr/>
+          <p:nvPr/>
+        </p:nvSpPr>
+        <p:spPr>
+          <a:xfrm>
+            <a:off x="9069374" y="3887763"/>
+            <a:ext cx="432000" cy="216000"/>
+          </a:xfrm>
+          <a:prstGeom prst="flowChartDecision">
+            <a:avLst/>
+          </a:prstGeom>
+          <a:noFill/>
+          <a:ln>
+            <a:solidFill>
+              <a:schemeClr val="tx1"/>
+            </a:solidFill>
+          </a:ln>
+        </p:spPr>
+        <p:style>
+          <a:lnRef idx="2">
+            <a:schemeClr val="accent1">
+              <a:shade val="15000"/>
+            </a:schemeClr>
+          </a:lnRef>
+          <a:fillRef idx="1">
+            <a:schemeClr val="accent1"/>
+          </a:fillRef>
+          <a:effectRef idx="0">
+            <a:schemeClr val="accent1"/>
+          </a:effectRef>
+          <a:fontRef idx="minor">
+            <a:schemeClr val="lt1"/>
+          </a:fontRef>
+        </p:style>
+        <p:txBody>
+          <a:bodyPr rtlCol="0" anchor="ctr"/>
+          <a:lstStyle/>
+          <a:p>
+            <a:pPr algn="ctr"/>
+            <a:endParaRPr lang="zh-CN" altLang="en-US" sz="1400" dirty="0">
+              <a:solidFill>
+                <a:schemeClr val="tx1"/>
+              </a:solidFill>
+            </a:endParaRPr>
+          </a:p>
+        </p:txBody>
+      </p:sp>
+      <p:sp>
+        <p:nvSpPr>
+          <p:cNvPr id="30" name="矩形 29">
+            <a:extLst>
+              <a:ext uri="{FF2B5EF4-FFF2-40B4-BE49-F238E27FC236}">
+                <a16:creationId xmlns:a16="http://schemas.microsoft.com/office/drawing/2014/main" id="{4EFCD2E7-779F-EB61-B430-F4C3272ED2A4}"/>
+              </a:ext>
+            </a:extLst>
+          </p:cNvPr>
+          <p:cNvSpPr/>
+          <p:nvPr/>
+        </p:nvSpPr>
+        <p:spPr>
+          <a:xfrm>
+            <a:off x="2906628" y="4584922"/>
+            <a:ext cx="1440000" cy="432000"/>
+          </a:xfrm>
+          <a:prstGeom prst="rect">
+            <a:avLst/>
+          </a:prstGeom>
+          <a:noFill/>
+          <a:ln>
+            <a:solidFill>
+              <a:schemeClr val="tx1"/>
+            </a:solidFill>
+          </a:ln>
+        </p:spPr>
+        <p:style>
+          <a:lnRef idx="2">
+            <a:schemeClr val="accent1">
+              <a:shade val="15000"/>
+            </a:schemeClr>
+          </a:lnRef>
+          <a:fillRef idx="1">
+            <a:schemeClr val="accent1"/>
+          </a:fillRef>
+          <a:effectRef idx="0">
+            <a:schemeClr val="accent1"/>
+          </a:effectRef>
+          <a:fontRef idx="minor">
+            <a:schemeClr val="lt1"/>
+          </a:fontRef>
+        </p:style>
+        <p:txBody>
+          <a:bodyPr rtlCol="0" anchor="ctr"/>
+          <a:lstStyle/>
+          <a:p>
+            <a:pPr algn="ctr"/>
+            <a:r>
+              <a:rPr lang="en-US" altLang="zh-CN" sz="1400" dirty="0">
+                <a:solidFill>
+                  <a:schemeClr val="tx1"/>
+                </a:solidFill>
+              </a:rPr>
+              <a:t>Sub Module</a:t>
+            </a:r>
+            <a:endParaRPr lang="zh-CN" altLang="en-US" sz="1400" dirty="0">
+              <a:solidFill>
+                <a:schemeClr val="tx1"/>
+              </a:solidFill>
+            </a:endParaRPr>
+          </a:p>
+        </p:txBody>
+      </p:sp>
+      <p:cxnSp>
+        <p:nvCxnSpPr>
+          <p:cNvPr id="32" name="直接箭头连接符 31">
+            <a:extLst>
+              <a:ext uri="{FF2B5EF4-FFF2-40B4-BE49-F238E27FC236}">
+                <a16:creationId xmlns:a16="http://schemas.microsoft.com/office/drawing/2014/main" id="{ABF154E1-C8A3-FA01-CD49-CF32D2684143}"/>
+              </a:ext>
+            </a:extLst>
+          </p:cNvPr>
+          <p:cNvCxnSpPr>
+            <a:stCxn id="16" idx="2"/>
+            <a:endCxn id="18" idx="0"/>
+          </p:cNvCxnSpPr>
+          <p:nvPr/>
+        </p:nvCxnSpPr>
+        <p:spPr>
+          <a:xfrm flipH="1">
+            <a:off x="1995789" y="3888055"/>
+            <a:ext cx="1630839" cy="696867"/>
+          </a:xfrm>
+          <a:prstGeom prst="straightConnector1">
+            <a:avLst/>
+          </a:prstGeom>
+          <a:ln>
+            <a:solidFill>
+              <a:schemeClr val="tx1"/>
+            </a:solidFill>
+            <a:tailEnd type="triangle"/>
+          </a:ln>
+        </p:spPr>
+        <p:style>
+          <a:lnRef idx="1">
+            <a:schemeClr val="accent1"/>
+          </a:lnRef>
+          <a:fillRef idx="0">
+            <a:schemeClr val="accent1"/>
+          </a:fillRef>
+          <a:effectRef idx="0">
+            <a:schemeClr val="accent1"/>
+          </a:effectRef>
+          <a:fontRef idx="minor">
+            <a:schemeClr val="tx1"/>
+          </a:fontRef>
+        </p:style>
+      </p:cxnSp>
+      <p:cxnSp>
+        <p:nvCxnSpPr>
+          <p:cNvPr id="34" name="直接箭头连接符 33">
+            <a:extLst>
+              <a:ext uri="{FF2B5EF4-FFF2-40B4-BE49-F238E27FC236}">
+                <a16:creationId xmlns:a16="http://schemas.microsoft.com/office/drawing/2014/main" id="{48D97161-CA4C-D5B6-307E-86675437B787}"/>
+              </a:ext>
+            </a:extLst>
+          </p:cNvPr>
+          <p:cNvCxnSpPr>
+            <a:stCxn id="16" idx="2"/>
+            <a:endCxn id="17" idx="0"/>
+          </p:cNvCxnSpPr>
+          <p:nvPr/>
+        </p:nvCxnSpPr>
+        <p:spPr>
+          <a:xfrm>
+            <a:off x="3626628" y="3888055"/>
+            <a:ext cx="1630839" cy="696867"/>
+          </a:xfrm>
+          <a:prstGeom prst="straightConnector1">
+            <a:avLst/>
+          </a:prstGeom>
+          <a:ln>
+            <a:solidFill>
+              <a:schemeClr val="tx1"/>
+            </a:solidFill>
+            <a:tailEnd type="triangle"/>
+          </a:ln>
+        </p:spPr>
+        <p:style>
+          <a:lnRef idx="1">
+            <a:schemeClr val="accent1"/>
+          </a:lnRef>
+          <a:fillRef idx="0">
+            <a:schemeClr val="accent1"/>
+          </a:fillRef>
+          <a:effectRef idx="0">
+            <a:schemeClr val="accent1"/>
+          </a:effectRef>
+          <a:fontRef idx="minor">
+            <a:schemeClr val="tx1"/>
+          </a:fontRef>
+        </p:style>
+      </p:cxnSp>
+      <p:cxnSp>
+        <p:nvCxnSpPr>
+          <p:cNvPr id="36" name="直接箭头连接符 35">
+            <a:extLst>
+              <a:ext uri="{FF2B5EF4-FFF2-40B4-BE49-F238E27FC236}">
+                <a16:creationId xmlns:a16="http://schemas.microsoft.com/office/drawing/2014/main" id="{DCBCE32C-388C-CD60-C311-C63BFA03F312}"/>
+              </a:ext>
+            </a:extLst>
+          </p:cNvPr>
+          <p:cNvCxnSpPr>
+            <a:stCxn id="16" idx="2"/>
+            <a:endCxn id="30" idx="0"/>
+          </p:cNvCxnSpPr>
+          <p:nvPr/>
+        </p:nvCxnSpPr>
+        <p:spPr>
+          <a:xfrm>
+            <a:off x="3626628" y="3888055"/>
+            <a:ext cx="0" cy="696867"/>
+          </a:xfrm>
+          <a:prstGeom prst="straightConnector1">
+            <a:avLst/>
+          </a:prstGeom>
+          <a:ln>
+            <a:solidFill>
+              <a:schemeClr val="tx1"/>
+            </a:solidFill>
+            <a:tailEnd type="triangle"/>
+          </a:ln>
+        </p:spPr>
+        <p:style>
+          <a:lnRef idx="1">
+            <a:schemeClr val="accent1"/>
+          </a:lnRef>
+          <a:fillRef idx="0">
+            <a:schemeClr val="accent1"/>
+          </a:fillRef>
+          <a:effectRef idx="0">
+            <a:schemeClr val="accent1"/>
+          </a:effectRef>
+          <a:fontRef idx="minor">
+            <a:schemeClr val="tx1"/>
+          </a:fontRef>
+        </p:style>
+      </p:cxnSp>
+      <p:sp>
+        <p:nvSpPr>
+          <p:cNvPr id="37" name="箭头: 手杖形 36">
+            <a:extLst>
+              <a:ext uri="{FF2B5EF4-FFF2-40B4-BE49-F238E27FC236}">
+                <a16:creationId xmlns:a16="http://schemas.microsoft.com/office/drawing/2014/main" id="{6EB2C494-9ED9-60AE-F82A-1A27DF2272E6}"/>
+              </a:ext>
+            </a:extLst>
+          </p:cNvPr>
+          <p:cNvSpPr/>
+          <p:nvPr/>
+        </p:nvSpPr>
+        <p:spPr>
+          <a:xfrm rot="10800000">
+            <a:off x="3313279" y="3895174"/>
+            <a:ext cx="360000" cy="288000"/>
+          </a:xfrm>
+          <a:prstGeom prst="uturnArrow">
+            <a:avLst/>
+          </a:prstGeom>
+          <a:solidFill>
+            <a:schemeClr val="tx1"/>
+          </a:solidFill>
+          <a:ln>
+            <a:solidFill>
+              <a:schemeClr val="tx1"/>
+            </a:solidFill>
+          </a:ln>
+        </p:spPr>
+        <p:style>
+          <a:lnRef idx="2">
+            <a:schemeClr val="accent1">
+              <a:shade val="15000"/>
+            </a:schemeClr>
+          </a:lnRef>
+          <a:fillRef idx="1">
+            <a:schemeClr val="accent1"/>
+          </a:fillRef>
+          <a:effectRef idx="0">
+            <a:schemeClr val="accent1"/>
+          </a:effectRef>
+          <a:fontRef idx="minor">
+            <a:schemeClr val="lt1"/>
+          </a:fontRef>
+        </p:style>
+        <p:txBody>
+          <a:bodyPr rtlCol="0" anchor="ctr"/>
+          <a:lstStyle/>
+          <a:p>
+            <a:pPr algn="ctr"/>
+            <a:endParaRPr lang="zh-CN" altLang="en-US" sz="1600" dirty="0">
+              <a:solidFill>
+                <a:schemeClr val="tx1"/>
+              </a:solidFill>
+            </a:endParaRPr>
+          </a:p>
+        </p:txBody>
+      </p:sp>
+      <p:sp>
+        <p:nvSpPr>
+          <p:cNvPr id="38" name="矩形 37">
+            <a:extLst>
+              <a:ext uri="{FF2B5EF4-FFF2-40B4-BE49-F238E27FC236}">
+                <a16:creationId xmlns:a16="http://schemas.microsoft.com/office/drawing/2014/main" id="{EA7FC26E-5528-0AA1-3E7D-F656F55FEDF1}"/>
+              </a:ext>
+            </a:extLst>
+          </p:cNvPr>
+          <p:cNvSpPr/>
+          <p:nvPr/>
+        </p:nvSpPr>
+        <p:spPr>
+          <a:xfrm>
+            <a:off x="4442047" y="474730"/>
+            <a:ext cx="1440000" cy="432000"/>
+          </a:xfrm>
+          <a:prstGeom prst="rect">
+            <a:avLst/>
+          </a:prstGeom>
+          <a:noFill/>
+          <a:ln>
+            <a:solidFill>
+              <a:schemeClr val="tx1"/>
+            </a:solidFill>
+          </a:ln>
+        </p:spPr>
+        <p:style>
+          <a:lnRef idx="2">
+            <a:schemeClr val="accent1">
+              <a:shade val="15000"/>
+            </a:schemeClr>
+          </a:lnRef>
+          <a:fillRef idx="1">
+            <a:schemeClr val="accent1"/>
+          </a:fillRef>
+          <a:effectRef idx="0">
+            <a:schemeClr val="accent1"/>
+          </a:effectRef>
+          <a:fontRef idx="minor">
+            <a:schemeClr val="lt1"/>
+          </a:fontRef>
+        </p:style>
+        <p:txBody>
+          <a:bodyPr rtlCol="0" anchor="ctr"/>
+          <a:lstStyle/>
+          <a:p>
+            <a:pPr algn="ctr"/>
+            <a:r>
+              <a:rPr lang="en-US" altLang="zh-CN" sz="1400" dirty="0">
+                <a:solidFill>
+                  <a:schemeClr val="tx1"/>
+                </a:solidFill>
+              </a:rPr>
+              <a:t>Module 1</a:t>
+            </a:r>
+            <a:endParaRPr lang="zh-CN" altLang="en-US" sz="1400" dirty="0">
+              <a:solidFill>
+                <a:schemeClr val="tx1"/>
+              </a:solidFill>
+            </a:endParaRPr>
+          </a:p>
+        </p:txBody>
+      </p:sp>
+      <p:sp>
+        <p:nvSpPr>
+          <p:cNvPr id="39" name="矩形 38">
+            <a:extLst>
+              <a:ext uri="{FF2B5EF4-FFF2-40B4-BE49-F238E27FC236}">
+                <a16:creationId xmlns:a16="http://schemas.microsoft.com/office/drawing/2014/main" id="{0D9AC903-FFFA-E1B4-63AC-7A345620D17A}"/>
+              </a:ext>
+            </a:extLst>
+          </p:cNvPr>
+          <p:cNvSpPr/>
+          <p:nvPr/>
+        </p:nvSpPr>
+        <p:spPr>
+          <a:xfrm>
+            <a:off x="4442047" y="1626730"/>
+            <a:ext cx="1440000" cy="432000"/>
+          </a:xfrm>
+          <a:prstGeom prst="rect">
+            <a:avLst/>
+          </a:prstGeom>
+          <a:noFill/>
+          <a:ln>
+            <a:solidFill>
+              <a:schemeClr val="tx1"/>
+            </a:solidFill>
+          </a:ln>
+        </p:spPr>
+        <p:style>
+          <a:lnRef idx="2">
+            <a:schemeClr val="accent1">
+              <a:shade val="15000"/>
+            </a:schemeClr>
+          </a:lnRef>
+          <a:fillRef idx="1">
+            <a:schemeClr val="accent1"/>
+          </a:fillRef>
+          <a:effectRef idx="0">
+            <a:schemeClr val="accent1"/>
+          </a:effectRef>
+          <a:fontRef idx="minor">
+            <a:schemeClr val="lt1"/>
+          </a:fontRef>
+        </p:style>
+        <p:txBody>
+          <a:bodyPr rtlCol="0" anchor="ctr"/>
+          <a:lstStyle/>
+          <a:p>
+            <a:pPr algn="ctr"/>
+            <a:r>
+              <a:rPr lang="en-US" altLang="zh-CN" sz="1400" dirty="0">
+                <a:solidFill>
+                  <a:schemeClr val="tx1"/>
+                </a:solidFill>
+              </a:rPr>
+              <a:t>Module 2</a:t>
+            </a:r>
+            <a:endParaRPr lang="zh-CN" altLang="en-US" sz="1400" dirty="0">
+              <a:solidFill>
+                <a:schemeClr val="tx1"/>
+              </a:solidFill>
+            </a:endParaRPr>
+          </a:p>
+        </p:txBody>
+      </p:sp>
+      <p:cxnSp>
+        <p:nvCxnSpPr>
+          <p:cNvPr id="41" name="直接连接符 40">
+            <a:extLst>
+              <a:ext uri="{FF2B5EF4-FFF2-40B4-BE49-F238E27FC236}">
+                <a16:creationId xmlns:a16="http://schemas.microsoft.com/office/drawing/2014/main" id="{AD86C691-1AB1-1689-F266-44D45ADB3E47}"/>
+              </a:ext>
+            </a:extLst>
+          </p:cNvPr>
+          <p:cNvCxnSpPr>
+            <a:cxnSpLocks/>
+          </p:cNvCxnSpPr>
+          <p:nvPr/>
+        </p:nvCxnSpPr>
+        <p:spPr>
+          <a:xfrm>
+            <a:off x="4922048" y="906730"/>
+            <a:ext cx="0" cy="720000"/>
+          </a:xfrm>
+          <a:prstGeom prst="line">
+            <a:avLst/>
+          </a:prstGeom>
+          <a:ln>
+            <a:solidFill>
+              <a:schemeClr val="tx1"/>
+            </a:solidFill>
+            <a:tailEnd type="none"/>
+          </a:ln>
+        </p:spPr>
+        <p:style>
+          <a:lnRef idx="1">
+            <a:schemeClr val="accent1"/>
+          </a:lnRef>
+          <a:fillRef idx="0">
+            <a:schemeClr val="accent1"/>
+          </a:fillRef>
+          <a:effectRef idx="0">
+            <a:schemeClr val="accent1"/>
+          </a:effectRef>
+          <a:fontRef idx="minor">
+            <a:schemeClr val="tx1"/>
+          </a:fontRef>
+        </p:style>
+      </p:cxnSp>
+      <p:cxnSp>
+        <p:nvCxnSpPr>
+          <p:cNvPr id="43" name="直接连接符 42">
+            <a:extLst>
+              <a:ext uri="{FF2B5EF4-FFF2-40B4-BE49-F238E27FC236}">
+                <a16:creationId xmlns:a16="http://schemas.microsoft.com/office/drawing/2014/main" id="{82D3C5BF-8A25-74DF-B243-DE815D097CC4}"/>
+              </a:ext>
+            </a:extLst>
+          </p:cNvPr>
+          <p:cNvCxnSpPr>
+            <a:cxnSpLocks/>
+          </p:cNvCxnSpPr>
+          <p:nvPr/>
+        </p:nvCxnSpPr>
+        <p:spPr>
+          <a:xfrm>
+            <a:off x="1200150" y="1626730"/>
+            <a:ext cx="1800225" cy="0"/>
+          </a:xfrm>
+          <a:prstGeom prst="line">
+            <a:avLst/>
+          </a:prstGeom>
+          <a:ln>
+            <a:solidFill>
+              <a:schemeClr val="tx1"/>
+            </a:solidFill>
+            <a:tailEnd type="none"/>
+          </a:ln>
+        </p:spPr>
+        <p:style>
+          <a:lnRef idx="1">
+            <a:schemeClr val="accent1"/>
+          </a:lnRef>
+          <a:fillRef idx="0">
+            <a:schemeClr val="accent1"/>
+          </a:fillRef>
+          <a:effectRef idx="0">
+            <a:schemeClr val="accent1"/>
+          </a:effectRef>
+          <a:fontRef idx="minor">
+            <a:schemeClr val="tx1"/>
+          </a:fontRef>
+        </p:style>
+      </p:cxnSp>
+      <p:cxnSp>
+        <p:nvCxnSpPr>
+          <p:cNvPr id="44" name="直接连接符 43">
+            <a:extLst>
+              <a:ext uri="{FF2B5EF4-FFF2-40B4-BE49-F238E27FC236}">
+                <a16:creationId xmlns:a16="http://schemas.microsoft.com/office/drawing/2014/main" id="{2BD3FB60-881A-CB4F-3338-537F86A4AD8A}"/>
+              </a:ext>
+            </a:extLst>
+          </p:cNvPr>
+          <p:cNvCxnSpPr>
+            <a:cxnSpLocks/>
+          </p:cNvCxnSpPr>
+          <p:nvPr/>
+        </p:nvCxnSpPr>
+        <p:spPr>
+          <a:xfrm>
+            <a:off x="5402048" y="906730"/>
+            <a:ext cx="0" cy="720000"/>
+          </a:xfrm>
+          <a:prstGeom prst="line">
+            <a:avLst/>
+          </a:prstGeom>
+          <a:ln>
+            <a:solidFill>
+              <a:schemeClr val="tx1"/>
+            </a:solidFill>
+            <a:tailEnd type="none"/>
+          </a:ln>
+        </p:spPr>
+        <p:style>
+          <a:lnRef idx="1">
+            <a:schemeClr val="accent1"/>
+          </a:lnRef>
+          <a:fillRef idx="0">
+            <a:schemeClr val="accent1"/>
+          </a:fillRef>
+          <a:effectRef idx="0">
+            <a:schemeClr val="accent1"/>
+          </a:effectRef>
+          <a:fontRef idx="minor">
+            <a:schemeClr val="tx1"/>
+          </a:fontRef>
+        </p:style>
+      </p:cxnSp>
+      <p:cxnSp>
+        <p:nvCxnSpPr>
+          <p:cNvPr id="45" name="直接连接符 44">
+            <a:extLst>
+              <a:ext uri="{FF2B5EF4-FFF2-40B4-BE49-F238E27FC236}">
+                <a16:creationId xmlns:a16="http://schemas.microsoft.com/office/drawing/2014/main" id="{55F0883A-1805-C003-D044-79A366DED6CB}"/>
+              </a:ext>
+            </a:extLst>
+          </p:cNvPr>
+          <p:cNvCxnSpPr>
+            <a:cxnSpLocks/>
+          </p:cNvCxnSpPr>
+          <p:nvPr/>
+        </p:nvCxnSpPr>
+        <p:spPr>
+          <a:xfrm rot="5400000">
+            <a:off x="4082047" y="2686818"/>
+            <a:ext cx="720000" cy="0"/>
+          </a:xfrm>
+          <a:prstGeom prst="line">
+            <a:avLst/>
+          </a:prstGeom>
+          <a:ln>
+            <a:solidFill>
+              <a:schemeClr val="tx1"/>
+            </a:solidFill>
+            <a:tailEnd type="none"/>
+          </a:ln>
+        </p:spPr>
+        <p:style>
+          <a:lnRef idx="1">
+            <a:schemeClr val="accent1"/>
+          </a:lnRef>
+          <a:fillRef idx="0">
+            <a:schemeClr val="accent1"/>
+          </a:fillRef>
+          <a:effectRef idx="0">
+            <a:schemeClr val="accent1"/>
+          </a:effectRef>
+          <a:fontRef idx="minor">
+            <a:schemeClr val="tx1"/>
+          </a:fontRef>
+        </p:style>
+      </p:cxnSp>
+      <p:cxnSp>
+        <p:nvCxnSpPr>
+          <p:cNvPr id="46" name="直接连接符 45">
+            <a:extLst>
+              <a:ext uri="{FF2B5EF4-FFF2-40B4-BE49-F238E27FC236}">
+                <a16:creationId xmlns:a16="http://schemas.microsoft.com/office/drawing/2014/main" id="{9C21C0DA-B308-C4AD-9CC7-42EB3E1233C5}"/>
+              </a:ext>
+            </a:extLst>
+          </p:cNvPr>
+          <p:cNvCxnSpPr>
+            <a:cxnSpLocks/>
+          </p:cNvCxnSpPr>
+          <p:nvPr/>
+        </p:nvCxnSpPr>
+        <p:spPr>
+          <a:xfrm rot="5400000">
+            <a:off x="5522046" y="2686818"/>
+            <a:ext cx="720000" cy="0"/>
+          </a:xfrm>
+          <a:prstGeom prst="line">
+            <a:avLst/>
+          </a:prstGeom>
+          <a:ln>
+            <a:solidFill>
+              <a:schemeClr val="tx1"/>
+            </a:solidFill>
+            <a:tailEnd type="none"/>
+          </a:ln>
+        </p:spPr>
+        <p:style>
+          <a:lnRef idx="1">
+            <a:schemeClr val="accent1"/>
+          </a:lnRef>
+          <a:fillRef idx="0">
+            <a:schemeClr val="accent1"/>
+          </a:fillRef>
+          <a:effectRef idx="0">
+            <a:schemeClr val="accent1"/>
+          </a:effectRef>
+          <a:fontRef idx="minor">
+            <a:schemeClr val="tx1"/>
+          </a:fontRef>
+        </p:style>
+      </p:cxnSp>
+      <p:cxnSp>
+        <p:nvCxnSpPr>
+          <p:cNvPr id="49" name="直接箭头连接符 48">
+            <a:extLst>
+              <a:ext uri="{FF2B5EF4-FFF2-40B4-BE49-F238E27FC236}">
+                <a16:creationId xmlns:a16="http://schemas.microsoft.com/office/drawing/2014/main" id="{920086A3-C98B-97BE-937E-D08E673958DB}"/>
+              </a:ext>
+            </a:extLst>
+          </p:cNvPr>
+          <p:cNvCxnSpPr>
+            <a:cxnSpLocks/>
+          </p:cNvCxnSpPr>
+          <p:nvPr/>
+        </p:nvCxnSpPr>
+        <p:spPr>
+          <a:xfrm>
+            <a:off x="5642047" y="1050730"/>
+            <a:ext cx="0" cy="432000"/>
+          </a:xfrm>
+          <a:prstGeom prst="straightConnector1">
+            <a:avLst/>
+          </a:prstGeom>
+          <a:ln>
+            <a:solidFill>
+              <a:schemeClr val="tx1"/>
+            </a:solidFill>
+            <a:tailEnd type="triangle"/>
+          </a:ln>
+        </p:spPr>
+        <p:style>
+          <a:lnRef idx="1">
+            <a:schemeClr val="accent1"/>
+          </a:lnRef>
+          <a:fillRef idx="0">
+            <a:schemeClr val="accent1"/>
+          </a:fillRef>
+          <a:effectRef idx="0">
+            <a:schemeClr val="accent1"/>
+          </a:effectRef>
+          <a:fontRef idx="minor">
+            <a:schemeClr val="tx1"/>
+          </a:fontRef>
+        </p:style>
+      </p:cxnSp>
+      <p:sp>
+        <p:nvSpPr>
+          <p:cNvPr id="47" name="椭圆 46">
+            <a:extLst>
+              <a:ext uri="{FF2B5EF4-FFF2-40B4-BE49-F238E27FC236}">
+                <a16:creationId xmlns:a16="http://schemas.microsoft.com/office/drawing/2014/main" id="{EE98B940-BD9E-FA7B-3712-DFF5C7AAB30A}"/>
+              </a:ext>
+            </a:extLst>
+          </p:cNvPr>
+          <p:cNvSpPr/>
+          <p:nvPr/>
+        </p:nvSpPr>
+        <p:spPr>
+          <a:xfrm>
+            <a:off x="5606047" y="1050730"/>
+            <a:ext cx="72000" cy="72000"/>
+          </a:xfrm>
+          <a:prstGeom prst="ellipse">
+            <a:avLst/>
+          </a:prstGeom>
+          <a:solidFill>
+            <a:schemeClr val="tx1"/>
+          </a:solidFill>
+          <a:ln>
+            <a:solidFill>
+              <a:schemeClr val="tx1"/>
+            </a:solidFill>
+          </a:ln>
+        </p:spPr>
+        <p:style>
+          <a:lnRef idx="2">
+            <a:schemeClr val="accent1">
+              <a:shade val="15000"/>
+            </a:schemeClr>
+          </a:lnRef>
+          <a:fillRef idx="1">
+            <a:schemeClr val="accent1"/>
+          </a:fillRef>
+          <a:effectRef idx="0">
+            <a:schemeClr val="accent1"/>
+          </a:effectRef>
+          <a:fontRef idx="minor">
+            <a:schemeClr val="lt1"/>
+          </a:fontRef>
+        </p:style>
+        <p:txBody>
+          <a:bodyPr rtlCol="0" anchor="ctr"/>
+          <a:lstStyle/>
+          <a:p>
+            <a:pPr algn="ctr"/>
+            <a:endParaRPr lang="zh-CN" altLang="en-US" sz="1600" dirty="0">
+              <a:solidFill>
+                <a:schemeClr val="tx1"/>
+              </a:solidFill>
+            </a:endParaRPr>
+          </a:p>
+        </p:txBody>
+      </p:sp>
+      <p:cxnSp>
+        <p:nvCxnSpPr>
+          <p:cNvPr id="53" name="直接箭头连接符 52">
+            <a:extLst>
+              <a:ext uri="{FF2B5EF4-FFF2-40B4-BE49-F238E27FC236}">
+                <a16:creationId xmlns:a16="http://schemas.microsoft.com/office/drawing/2014/main" id="{48FE6FC6-A904-2481-491F-FBCDDB8859A3}"/>
+              </a:ext>
+            </a:extLst>
+          </p:cNvPr>
+          <p:cNvCxnSpPr>
+            <a:cxnSpLocks/>
+          </p:cNvCxnSpPr>
+          <p:nvPr/>
+        </p:nvCxnSpPr>
+        <p:spPr>
+          <a:xfrm flipV="1">
+            <a:off x="4682048" y="1050730"/>
+            <a:ext cx="0" cy="432000"/>
+          </a:xfrm>
+          <a:prstGeom prst="straightConnector1">
+            <a:avLst/>
+          </a:prstGeom>
+          <a:ln>
+            <a:solidFill>
+              <a:schemeClr val="tx1"/>
+            </a:solidFill>
+            <a:tailEnd type="triangle"/>
+          </a:ln>
+        </p:spPr>
+        <p:style>
+          <a:lnRef idx="1">
+            <a:schemeClr val="accent1"/>
+          </a:lnRef>
+          <a:fillRef idx="0">
+            <a:schemeClr val="accent1"/>
+          </a:fillRef>
+          <a:effectRef idx="0">
+            <a:schemeClr val="accent1"/>
+          </a:effectRef>
+          <a:fontRef idx="minor">
+            <a:schemeClr val="tx1"/>
+          </a:fontRef>
+        </p:style>
+      </p:cxnSp>
+      <p:sp>
+        <p:nvSpPr>
+          <p:cNvPr id="54" name="椭圆 53">
+            <a:extLst>
+              <a:ext uri="{FF2B5EF4-FFF2-40B4-BE49-F238E27FC236}">
+                <a16:creationId xmlns:a16="http://schemas.microsoft.com/office/drawing/2014/main" id="{168F684B-4121-69AD-6EA6-0AB25DC31AA3}"/>
+              </a:ext>
+            </a:extLst>
+          </p:cNvPr>
+          <p:cNvSpPr/>
+          <p:nvPr/>
+        </p:nvSpPr>
+        <p:spPr>
+          <a:xfrm flipV="1">
+            <a:off x="4646048" y="1410730"/>
+            <a:ext cx="72000" cy="72000"/>
+          </a:xfrm>
+          <a:prstGeom prst="ellipse">
+            <a:avLst/>
+          </a:prstGeom>
+          <a:solidFill>
+            <a:schemeClr val="tx1"/>
+          </a:solidFill>
+          <a:ln>
+            <a:solidFill>
+              <a:schemeClr val="tx1"/>
+            </a:solidFill>
+          </a:ln>
+        </p:spPr>
+        <p:style>
+          <a:lnRef idx="2">
+            <a:schemeClr val="accent1">
+              <a:shade val="15000"/>
+            </a:schemeClr>
+          </a:lnRef>
+          <a:fillRef idx="1">
+            <a:schemeClr val="accent1"/>
+          </a:fillRef>
+          <a:effectRef idx="0">
+            <a:schemeClr val="accent1"/>
+          </a:effectRef>
+          <a:fontRef idx="minor">
+            <a:schemeClr val="lt1"/>
+          </a:fontRef>
+        </p:style>
+        <p:txBody>
+          <a:bodyPr rtlCol="0" anchor="ctr"/>
+          <a:lstStyle/>
+          <a:p>
+            <a:pPr algn="ctr"/>
+            <a:endParaRPr lang="zh-CN" altLang="en-US" sz="1600" dirty="0">
+              <a:solidFill>
+                <a:schemeClr val="tx1"/>
+              </a:solidFill>
+            </a:endParaRPr>
+          </a:p>
+        </p:txBody>
+      </p:sp>
+      <p:cxnSp>
+        <p:nvCxnSpPr>
+          <p:cNvPr id="56" name="连接符: 肘形 55">
+            <a:extLst>
+              <a:ext uri="{FF2B5EF4-FFF2-40B4-BE49-F238E27FC236}">
+                <a16:creationId xmlns:a16="http://schemas.microsoft.com/office/drawing/2014/main" id="{5293E7A5-A25A-EFB4-DE87-14246EE1F4C8}"/>
+              </a:ext>
+            </a:extLst>
+          </p:cNvPr>
+          <p:cNvCxnSpPr>
+            <a:stCxn id="27" idx="2"/>
+            <a:endCxn id="26" idx="0"/>
+          </p:cNvCxnSpPr>
+          <p:nvPr/>
+        </p:nvCxnSpPr>
+        <p:spPr>
+          <a:xfrm rot="5400000">
+            <a:off x="8242903" y="3515396"/>
+            <a:ext cx="454104" cy="1630839"/>
+          </a:xfrm>
+          <a:prstGeom prst="bentConnector3">
+            <a:avLst/>
+          </a:prstGeom>
+          <a:ln>
+            <a:solidFill>
+              <a:schemeClr val="tx1"/>
+            </a:solidFill>
+            <a:tailEnd type="triangle"/>
+          </a:ln>
+        </p:spPr>
+        <p:style>
+          <a:lnRef idx="1">
+            <a:schemeClr val="accent1"/>
+          </a:lnRef>
+          <a:fillRef idx="0">
+            <a:schemeClr val="accent1"/>
+          </a:fillRef>
+          <a:effectRef idx="0">
+            <a:schemeClr val="accent1"/>
+          </a:effectRef>
+          <a:fontRef idx="minor">
+            <a:schemeClr val="tx1"/>
+          </a:fontRef>
+        </p:style>
+      </p:cxnSp>
+      <p:cxnSp>
+        <p:nvCxnSpPr>
+          <p:cNvPr id="58" name="连接符: 肘形 57">
+            <a:extLst>
+              <a:ext uri="{FF2B5EF4-FFF2-40B4-BE49-F238E27FC236}">
+                <a16:creationId xmlns:a16="http://schemas.microsoft.com/office/drawing/2014/main" id="{1EC5A664-A03F-5446-3CD7-57E91C8ECD94}"/>
+              </a:ext>
+            </a:extLst>
+          </p:cNvPr>
+          <p:cNvCxnSpPr>
+            <a:stCxn id="27" idx="2"/>
+            <a:endCxn id="25" idx="0"/>
+          </p:cNvCxnSpPr>
+          <p:nvPr/>
+        </p:nvCxnSpPr>
+        <p:spPr>
+          <a:xfrm rot="16200000" flipH="1">
+            <a:off x="9873741" y="3515395"/>
+            <a:ext cx="454104" cy="1630839"/>
+          </a:xfrm>
+          <a:prstGeom prst="bentConnector3">
+            <a:avLst/>
+          </a:prstGeom>
+          <a:ln>
+            <a:solidFill>
+              <a:schemeClr val="tx1"/>
+            </a:solidFill>
+            <a:tailEnd type="triangle"/>
+          </a:ln>
+        </p:spPr>
+        <p:style>
+          <a:lnRef idx="1">
+            <a:schemeClr val="accent1"/>
+          </a:lnRef>
+          <a:fillRef idx="0">
+            <a:schemeClr val="accent1"/>
+          </a:fillRef>
+          <a:effectRef idx="0">
+            <a:schemeClr val="accent1"/>
+          </a:effectRef>
+          <a:fontRef idx="minor">
+            <a:schemeClr val="tx1"/>
+          </a:fontRef>
+        </p:style>
+      </p:cxnSp>
+    </p:spTree>
+    <p:extLst>
+      <p:ext uri="{BB962C8B-B14F-4D97-AF65-F5344CB8AC3E}">
+        <p14:creationId xmlns:p14="http://schemas.microsoft.com/office/powerpoint/2010/main" val="3426936757"/>
+      </p:ext>
+    </p:extLst>
+  </p:cSld>
+  <p:clrMapOvr>
+    <a:masterClrMapping/>
+  </p:clrMapOvr>
+</p:sld>
+</file>
+
+<file path=ppt/slides/slide7.xml><?xml version="1.0" encoding="utf-8"?>
+<p:sld xmlns:a="http://schemas.openxmlformats.org/drawingml/2006/main" xmlns:r="http://schemas.openxmlformats.org/officeDocument/2006/relationships" xmlns:p="http://schemas.openxmlformats.org/presentationml/2006/main">
+  <p:cSld>
+    <p:spTree>
+      <p:nvGrpSpPr>
+        <p:cNvPr id="1" name=""/>
+        <p:cNvGrpSpPr/>
+        <p:nvPr/>
+      </p:nvGrpSpPr>
+      <p:grpSpPr>
+        <a:xfrm>
+          <a:off x="0" y="0"/>
+          <a:ext cx="0" cy="0"/>
+          <a:chOff x="0" y="0"/>
+          <a:chExt cx="0" cy="0"/>
+        </a:xfrm>
+      </p:grpSpPr>
+      <p:pic>
+        <p:nvPicPr>
+          <p:cNvPr id="1026" name="Picture 2" descr="Email Server">
+            <a:extLst>
+              <a:ext uri="{FF2B5EF4-FFF2-40B4-BE49-F238E27FC236}">
+                <a16:creationId xmlns:a16="http://schemas.microsoft.com/office/drawing/2014/main" id="{4EDAC430-3CF9-FB8D-BB43-1F8EA978EAD5}"/>
+              </a:ext>
+            </a:extLst>
+          </p:cNvPr>
+          <p:cNvPicPr>
+            <a:picLocks noChangeAspect="1" noChangeArrowheads="1"/>
+          </p:cNvPicPr>
+          <p:nvPr/>
+        </p:nvPicPr>
+        <p:blipFill>
+          <a:blip r:embed="rId2">
+            <a:extLst>
+              <a:ext uri="{28A0092B-C50C-407E-A947-70E740481C1C}">
+                <a14:useLocalDpi xmlns:a14="http://schemas.microsoft.com/office/drawing/2010/main" val="0"/>
+              </a:ext>
+            </a:extLst>
+          </a:blip>
+          <a:srcRect/>
+          <a:stretch>
+            <a:fillRect/>
+          </a:stretch>
+        </p:blipFill>
+        <p:spPr bwMode="auto">
+          <a:xfrm>
+            <a:off x="2667000" y="1852613"/>
+            <a:ext cx="6858000" cy="3152775"/>
+          </a:xfrm>
+          <a:prstGeom prst="rect">
+            <a:avLst/>
+          </a:prstGeom>
+          <a:noFill/>
+          <a:extLst>
+            <a:ext uri="{909E8E84-426E-40DD-AFC4-6F175D3DCCD1}">
+              <a14:hiddenFill xmlns:a14="http://schemas.microsoft.com/office/drawing/2010/main">
+                <a:solidFill>
+                  <a:srgbClr val="FFFFFF"/>
+                </a:solidFill>
+              </a14:hiddenFill>
+            </a:ext>
+          </a:extLst>
+        </p:spPr>
+      </p:pic>
+    </p:spTree>
+    <p:extLst>
+      <p:ext uri="{BB962C8B-B14F-4D97-AF65-F5344CB8AC3E}">
+        <p14:creationId xmlns:p14="http://schemas.microsoft.com/office/powerpoint/2010/main" val="3391606986"/>
       </p:ext>
     </p:extLst>
   </p:cSld>

--- a/se/file/se.pptx
+++ b/se/file/se.pptx
@@ -10,8 +10,9 @@
     <p:sldId id="258" r:id="rId4"/>
     <p:sldId id="259" r:id="rId5"/>
     <p:sldId id="260" r:id="rId6"/>
-    <p:sldId id="261" r:id="rId7"/>
-    <p:sldId id="262" r:id="rId8"/>
+    <p:sldId id="263" r:id="rId7"/>
+    <p:sldId id="261" r:id="rId8"/>
+    <p:sldId id="262" r:id="rId9"/>
   </p:sldIdLst>
   <p:sldSz cx="12192000" cy="6858000"/>
   <p:notesSz cx="6858000" cy="9144000"/>
@@ -265,7 +266,7 @@
           <a:p>
             <a:fld id="{84617D17-380A-4B40-92EC-38E177F94207}" type="datetimeFigureOut">
               <a:rPr lang="zh-CN" altLang="en-US" smtClean="0"/>
-              <a:t>2026/4/9</a:t>
+              <a:t>2026/4/10</a:t>
             </a:fld>
             <a:endParaRPr lang="zh-CN" altLang="en-US"/>
           </a:p>
@@ -463,7 +464,7 @@
           <a:p>
             <a:fld id="{84617D17-380A-4B40-92EC-38E177F94207}" type="datetimeFigureOut">
               <a:rPr lang="zh-CN" altLang="en-US" smtClean="0"/>
-              <a:t>2026/4/9</a:t>
+              <a:t>2026/4/10</a:t>
             </a:fld>
             <a:endParaRPr lang="zh-CN" altLang="en-US"/>
           </a:p>
@@ -671,7 +672,7 @@
           <a:p>
             <a:fld id="{84617D17-380A-4B40-92EC-38E177F94207}" type="datetimeFigureOut">
               <a:rPr lang="zh-CN" altLang="en-US" smtClean="0"/>
-              <a:t>2026/4/9</a:t>
+              <a:t>2026/4/10</a:t>
             </a:fld>
             <a:endParaRPr lang="zh-CN" altLang="en-US"/>
           </a:p>
@@ -869,7 +870,7 @@
           <a:p>
             <a:fld id="{84617D17-380A-4B40-92EC-38E177F94207}" type="datetimeFigureOut">
               <a:rPr lang="zh-CN" altLang="en-US" smtClean="0"/>
-              <a:t>2026/4/9</a:t>
+              <a:t>2026/4/10</a:t>
             </a:fld>
             <a:endParaRPr lang="zh-CN" altLang="en-US"/>
           </a:p>
@@ -1144,7 +1145,7 @@
           <a:p>
             <a:fld id="{84617D17-380A-4B40-92EC-38E177F94207}" type="datetimeFigureOut">
               <a:rPr lang="zh-CN" altLang="en-US" smtClean="0"/>
-              <a:t>2026/4/9</a:t>
+              <a:t>2026/4/10</a:t>
             </a:fld>
             <a:endParaRPr lang="zh-CN" altLang="en-US"/>
           </a:p>
@@ -1409,7 +1410,7 @@
           <a:p>
             <a:fld id="{84617D17-380A-4B40-92EC-38E177F94207}" type="datetimeFigureOut">
               <a:rPr lang="zh-CN" altLang="en-US" smtClean="0"/>
-              <a:t>2026/4/9</a:t>
+              <a:t>2026/4/10</a:t>
             </a:fld>
             <a:endParaRPr lang="zh-CN" altLang="en-US"/>
           </a:p>
@@ -1821,7 +1822,7 @@
           <a:p>
             <a:fld id="{84617D17-380A-4B40-92EC-38E177F94207}" type="datetimeFigureOut">
               <a:rPr lang="zh-CN" altLang="en-US" smtClean="0"/>
-              <a:t>2026/4/9</a:t>
+              <a:t>2026/4/10</a:t>
             </a:fld>
             <a:endParaRPr lang="zh-CN" altLang="en-US"/>
           </a:p>
@@ -1962,7 +1963,7 @@
           <a:p>
             <a:fld id="{84617D17-380A-4B40-92EC-38E177F94207}" type="datetimeFigureOut">
               <a:rPr lang="zh-CN" altLang="en-US" smtClean="0"/>
-              <a:t>2026/4/9</a:t>
+              <a:t>2026/4/10</a:t>
             </a:fld>
             <a:endParaRPr lang="zh-CN" altLang="en-US"/>
           </a:p>
@@ -2075,7 +2076,7 @@
           <a:p>
             <a:fld id="{84617D17-380A-4B40-92EC-38E177F94207}" type="datetimeFigureOut">
               <a:rPr lang="zh-CN" altLang="en-US" smtClean="0"/>
-              <a:t>2026/4/9</a:t>
+              <a:t>2026/4/10</a:t>
             </a:fld>
             <a:endParaRPr lang="zh-CN" altLang="en-US"/>
           </a:p>
@@ -2386,7 +2387,7 @@
           <a:p>
             <a:fld id="{84617D17-380A-4B40-92EC-38E177F94207}" type="datetimeFigureOut">
               <a:rPr lang="zh-CN" altLang="en-US" smtClean="0"/>
-              <a:t>2026/4/9</a:t>
+              <a:t>2026/4/10</a:t>
             </a:fld>
             <a:endParaRPr lang="zh-CN" altLang="en-US"/>
           </a:p>
@@ -2674,7 +2675,7 @@
           <a:p>
             <a:fld id="{84617D17-380A-4B40-92EC-38E177F94207}" type="datetimeFigureOut">
               <a:rPr lang="zh-CN" altLang="en-US" smtClean="0"/>
-              <a:t>2026/4/9</a:t>
+              <a:t>2026/4/10</a:t>
             </a:fld>
             <a:endParaRPr lang="zh-CN" altLang="en-US"/>
           </a:p>
@@ -2915,7 +2916,7 @@
           <a:p>
             <a:fld id="{84617D17-380A-4B40-92EC-38E177F94207}" type="datetimeFigureOut">
               <a:rPr lang="zh-CN" altLang="en-US" smtClean="0"/>
-              <a:t>2026/4/9</a:t>
+              <a:t>2026/4/10</a:t>
             </a:fld>
             <a:endParaRPr lang="zh-CN" altLang="en-US"/>
           </a:p>
@@ -8164,11 +8165,11 @@
           <a:prstGeom prst="rect">
             <a:avLst/>
           </a:prstGeom>
-          <a:noFill/>
-          <a:ln>
-            <a:solidFill>
-              <a:schemeClr val="tx1"/>
-            </a:solidFill>
+          <a:solidFill>
+            <a:schemeClr val="accent2"/>
+          </a:solidFill>
+          <a:ln>
+            <a:noFill/>
           </a:ln>
         </p:spPr>
         <p:style>
@@ -8195,14 +8196,14 @@
             <a:r>
               <a:rPr lang="en-US" altLang="zh-CN" sz="1400" dirty="0">
                 <a:solidFill>
-                  <a:sysClr val="windowText" lastClr="000000"/>
+                  <a:schemeClr val="bg1"/>
                 </a:solidFill>
               </a:rPr>
-              <a:t>Module 1</a:t>
+              <a:t>Login 1</a:t>
             </a:r>
             <a:endParaRPr lang="zh-CN" altLang="en-US" sz="1400" dirty="0">
               <a:solidFill>
-                <a:sysClr val="windowText" lastClr="000000"/>
+                <a:schemeClr val="bg1"/>
               </a:solidFill>
             </a:endParaRPr>
           </a:p>
@@ -8292,11 +8293,11 @@
           <a:prstGeom prst="rect">
             <a:avLst/>
           </a:prstGeom>
-          <a:noFill/>
-          <a:ln>
-            <a:solidFill>
-              <a:schemeClr val="tx1"/>
-            </a:solidFill>
+          <a:solidFill>
+            <a:schemeClr val="accent2"/>
+          </a:solidFill>
+          <a:ln>
+            <a:noFill/>
           </a:ln>
         </p:spPr>
         <p:style>
@@ -8323,14 +8324,14 @@
             <a:r>
               <a:rPr lang="en-US" altLang="zh-CN" sz="1400" dirty="0">
                 <a:solidFill>
-                  <a:sysClr val="windowText" lastClr="000000"/>
+                  <a:schemeClr val="bg1"/>
                 </a:solidFill>
               </a:rPr>
-              <a:t>Module 1.1</a:t>
+              <a:t>Verify 1.1</a:t>
             </a:r>
             <a:endParaRPr lang="zh-CN" altLang="en-US" sz="1400" dirty="0">
               <a:solidFill>
-                <a:sysClr val="windowText" lastClr="000000"/>
+                <a:schemeClr val="bg1"/>
               </a:solidFill>
             </a:endParaRPr>
           </a:p>
@@ -8619,7 +8620,7 @@
             <a:solidFill>
               <a:schemeClr val="tx1"/>
             </a:solidFill>
-            <a:tailEnd type="triangle"/>
+            <a:tailEnd type="none"/>
           </a:ln>
         </p:spPr>
         <p:style>
@@ -8664,7 +8665,7 @@
             <a:solidFill>
               <a:schemeClr val="tx1"/>
             </a:solidFill>
-            <a:tailEnd type="triangle"/>
+            <a:tailEnd type="none"/>
           </a:ln>
         </p:spPr>
         <p:style>
@@ -8709,7 +8710,7 @@
             <a:solidFill>
               <a:schemeClr val="tx1"/>
             </a:solidFill>
-            <a:tailEnd type="triangle"/>
+            <a:tailEnd type="none"/>
           </a:ln>
         </p:spPr>
         <p:style>
@@ -8754,7 +8755,7 @@
             <a:solidFill>
               <a:schemeClr val="tx1"/>
             </a:solidFill>
-            <a:tailEnd type="triangle"/>
+            <a:tailEnd type="none"/>
           </a:ln>
         </p:spPr>
         <p:style>
@@ -8799,7 +8800,7 @@
             <a:solidFill>
               <a:schemeClr val="tx1"/>
             </a:solidFill>
-            <a:tailEnd type="triangle"/>
+            <a:tailEnd type="none"/>
           </a:ln>
         </p:spPr>
         <p:style>
@@ -8844,7 +8845,7 @@
             <a:solidFill>
               <a:schemeClr val="tx1"/>
             </a:solidFill>
-            <a:tailEnd type="triangle"/>
+            <a:tailEnd type="none"/>
           </a:ln>
         </p:spPr>
         <p:style>
@@ -8889,6 +8890,247 @@
             <a:solidFill>
               <a:schemeClr val="tx1"/>
             </a:solidFill>
+            <a:tailEnd type="none"/>
+          </a:ln>
+        </p:spPr>
+        <p:style>
+          <a:lnRef idx="1">
+            <a:schemeClr val="accent1"/>
+          </a:lnRef>
+          <a:fillRef idx="0">
+            <a:schemeClr val="accent1"/>
+          </a:fillRef>
+          <a:effectRef idx="0">
+            <a:schemeClr val="accent1"/>
+          </a:effectRef>
+          <a:fontRef idx="minor">
+            <a:schemeClr val="tx1"/>
+          </a:fontRef>
+        </p:style>
+      </p:cxnSp>
+      <p:sp>
+        <p:nvSpPr>
+          <p:cNvPr id="6" name="矩形: 圆角 5">
+            <a:extLst>
+              <a:ext uri="{FF2B5EF4-FFF2-40B4-BE49-F238E27FC236}">
+                <a16:creationId xmlns:a16="http://schemas.microsoft.com/office/drawing/2014/main" id="{A9D6D5AB-8A99-CDA4-8446-3AA5780C97D7}"/>
+              </a:ext>
+            </a:extLst>
+          </p:cNvPr>
+          <p:cNvSpPr/>
+          <p:nvPr/>
+        </p:nvSpPr>
+        <p:spPr>
+          <a:xfrm>
+            <a:off x="3314699" y="4822451"/>
+            <a:ext cx="1080000" cy="432000"/>
+          </a:xfrm>
+          <a:prstGeom prst="roundRect">
+            <a:avLst>
+              <a:gd name="adj" fmla="val 50000"/>
+            </a:avLst>
+          </a:prstGeom>
+          <a:noFill/>
+          <a:ln>
+            <a:solidFill>
+              <a:schemeClr val="tx1"/>
+            </a:solidFill>
+          </a:ln>
+        </p:spPr>
+        <p:style>
+          <a:lnRef idx="2">
+            <a:schemeClr val="accent1">
+              <a:shade val="15000"/>
+            </a:schemeClr>
+          </a:lnRef>
+          <a:fillRef idx="1">
+            <a:schemeClr val="accent1"/>
+          </a:fillRef>
+          <a:effectRef idx="0">
+            <a:schemeClr val="accent1"/>
+          </a:effectRef>
+          <a:fontRef idx="minor">
+            <a:schemeClr val="lt1"/>
+          </a:fontRef>
+        </p:style>
+        <p:txBody>
+          <a:bodyPr rtlCol="0" anchor="ctr"/>
+          <a:lstStyle/>
+          <a:p>
+            <a:pPr algn="ctr"/>
+            <a:r>
+              <a:rPr lang="en-US" altLang="zh-CN" sz="1400" dirty="0">
+                <a:solidFill>
+                  <a:sysClr val="windowText" lastClr="000000"/>
+                </a:solidFill>
+              </a:rPr>
+              <a:t>Input</a:t>
+            </a:r>
+            <a:endParaRPr lang="zh-CN" altLang="en-US" sz="1400" dirty="0">
+              <a:solidFill>
+                <a:sysClr val="windowText" lastClr="000000"/>
+              </a:solidFill>
+            </a:endParaRPr>
+          </a:p>
+        </p:txBody>
+      </p:sp>
+      <p:sp>
+        <p:nvSpPr>
+          <p:cNvPr id="11" name="矩形: 圆角 10">
+            <a:extLst>
+              <a:ext uri="{FF2B5EF4-FFF2-40B4-BE49-F238E27FC236}">
+                <a16:creationId xmlns:a16="http://schemas.microsoft.com/office/drawing/2014/main" id="{B135D08A-C965-9906-18A5-14F6F35F4176}"/>
+              </a:ext>
+            </a:extLst>
+          </p:cNvPr>
+          <p:cNvSpPr/>
+          <p:nvPr/>
+        </p:nvSpPr>
+        <p:spPr>
+          <a:xfrm>
+            <a:off x="6757146" y="4822451"/>
+            <a:ext cx="1080000" cy="432000"/>
+          </a:xfrm>
+          <a:prstGeom prst="roundRect">
+            <a:avLst>
+              <a:gd name="adj" fmla="val 50000"/>
+            </a:avLst>
+          </a:prstGeom>
+          <a:noFill/>
+          <a:ln>
+            <a:solidFill>
+              <a:schemeClr val="tx1"/>
+            </a:solidFill>
+          </a:ln>
+        </p:spPr>
+        <p:style>
+          <a:lnRef idx="2">
+            <a:schemeClr val="accent1">
+              <a:shade val="15000"/>
+            </a:schemeClr>
+          </a:lnRef>
+          <a:fillRef idx="1">
+            <a:schemeClr val="accent1"/>
+          </a:fillRef>
+          <a:effectRef idx="0">
+            <a:schemeClr val="accent1"/>
+          </a:effectRef>
+          <a:fontRef idx="minor">
+            <a:schemeClr val="lt1"/>
+          </a:fontRef>
+        </p:style>
+        <p:txBody>
+          <a:bodyPr rtlCol="0" anchor="ctr"/>
+          <a:lstStyle/>
+          <a:p>
+            <a:pPr algn="ctr"/>
+            <a:r>
+              <a:rPr lang="en-US" altLang="zh-CN" sz="1400" dirty="0">
+                <a:solidFill>
+                  <a:sysClr val="windowText" lastClr="000000"/>
+                </a:solidFill>
+              </a:rPr>
+              <a:t>Output</a:t>
+            </a:r>
+            <a:endParaRPr lang="zh-CN" altLang="en-US" sz="1400" dirty="0">
+              <a:solidFill>
+                <a:sysClr val="windowText" lastClr="000000"/>
+              </a:solidFill>
+            </a:endParaRPr>
+          </a:p>
+        </p:txBody>
+      </p:sp>
+      <p:sp>
+        <p:nvSpPr>
+          <p:cNvPr id="12" name="矩形 11">
+            <a:extLst>
+              <a:ext uri="{FF2B5EF4-FFF2-40B4-BE49-F238E27FC236}">
+                <a16:creationId xmlns:a16="http://schemas.microsoft.com/office/drawing/2014/main" id="{4CCD7503-8A72-236B-7EFE-F61B73B249B3}"/>
+              </a:ext>
+            </a:extLst>
+          </p:cNvPr>
+          <p:cNvSpPr/>
+          <p:nvPr/>
+        </p:nvSpPr>
+        <p:spPr>
+          <a:xfrm>
+            <a:off x="5035923" y="4822451"/>
+            <a:ext cx="1080000" cy="432000"/>
+          </a:xfrm>
+          <a:prstGeom prst="rect">
+            <a:avLst/>
+          </a:prstGeom>
+          <a:noFill/>
+          <a:ln>
+            <a:solidFill>
+              <a:schemeClr val="tx1"/>
+            </a:solidFill>
+          </a:ln>
+        </p:spPr>
+        <p:style>
+          <a:lnRef idx="2">
+            <a:schemeClr val="accent1">
+              <a:shade val="15000"/>
+            </a:schemeClr>
+          </a:lnRef>
+          <a:fillRef idx="1">
+            <a:schemeClr val="accent1"/>
+          </a:fillRef>
+          <a:effectRef idx="0">
+            <a:schemeClr val="accent1"/>
+          </a:effectRef>
+          <a:fontRef idx="minor">
+            <a:schemeClr val="lt1"/>
+          </a:fontRef>
+        </p:style>
+        <p:txBody>
+          <a:bodyPr rtlCol="0" anchor="ctr"/>
+          <a:lstStyle/>
+          <a:p>
+            <a:pPr algn="ctr"/>
+            <a:r>
+              <a:rPr lang="en-US" altLang="zh-CN" sz="1400" dirty="0">
+                <a:solidFill>
+                  <a:sysClr val="windowText" lastClr="000000"/>
+                </a:solidFill>
+              </a:rPr>
+              <a:t>Process</a:t>
+            </a:r>
+            <a:endParaRPr lang="zh-CN" altLang="en-US" sz="1400" dirty="0">
+              <a:solidFill>
+                <a:sysClr val="windowText" lastClr="000000"/>
+              </a:solidFill>
+            </a:endParaRPr>
+          </a:p>
+        </p:txBody>
+      </p:sp>
+      <p:cxnSp>
+        <p:nvCxnSpPr>
+          <p:cNvPr id="13" name="直接箭头连接符 12">
+            <a:extLst>
+              <a:ext uri="{FF2B5EF4-FFF2-40B4-BE49-F238E27FC236}">
+                <a16:creationId xmlns:a16="http://schemas.microsoft.com/office/drawing/2014/main" id="{C6CDBB4F-6EA5-A1E9-B871-C47DE83E060F}"/>
+              </a:ext>
+            </a:extLst>
+          </p:cNvPr>
+          <p:cNvCxnSpPr>
+            <a:stCxn id="6" idx="3"/>
+            <a:endCxn id="12" idx="1"/>
+          </p:cNvCxnSpPr>
+          <p:nvPr/>
+        </p:nvCxnSpPr>
+        <p:spPr>
+          <a:xfrm>
+            <a:off x="4394699" y="5038451"/>
+            <a:ext cx="641224" cy="0"/>
+          </a:xfrm>
+          <a:prstGeom prst="straightConnector1">
+            <a:avLst/>
+          </a:prstGeom>
+          <a:ln>
+            <a:solidFill>
+              <a:schemeClr val="tx1"/>
+            </a:solidFill>
             <a:tailEnd type="triangle"/>
           </a:ln>
         </p:spPr>
@@ -8907,6 +9149,163 @@
           </a:fontRef>
         </p:style>
       </p:cxnSp>
+      <p:cxnSp>
+        <p:nvCxnSpPr>
+          <p:cNvPr id="15" name="直接箭头连接符 14">
+            <a:extLst>
+              <a:ext uri="{FF2B5EF4-FFF2-40B4-BE49-F238E27FC236}">
+                <a16:creationId xmlns:a16="http://schemas.microsoft.com/office/drawing/2014/main" id="{8DAB7B32-7746-51EB-C81D-0A2F06C978D0}"/>
+              </a:ext>
+            </a:extLst>
+          </p:cNvPr>
+          <p:cNvCxnSpPr>
+            <a:stCxn id="12" idx="3"/>
+            <a:endCxn id="11" idx="1"/>
+          </p:cNvCxnSpPr>
+          <p:nvPr/>
+        </p:nvCxnSpPr>
+        <p:spPr>
+          <a:xfrm>
+            <a:off x="6115923" y="5038451"/>
+            <a:ext cx="641223" cy="0"/>
+          </a:xfrm>
+          <a:prstGeom prst="straightConnector1">
+            <a:avLst/>
+          </a:prstGeom>
+          <a:ln>
+            <a:solidFill>
+              <a:schemeClr val="tx1"/>
+            </a:solidFill>
+            <a:tailEnd type="triangle"/>
+          </a:ln>
+        </p:spPr>
+        <p:style>
+          <a:lnRef idx="1">
+            <a:schemeClr val="accent1"/>
+          </a:lnRef>
+          <a:fillRef idx="0">
+            <a:schemeClr val="accent1"/>
+          </a:fillRef>
+          <a:effectRef idx="0">
+            <a:schemeClr val="accent1"/>
+          </a:effectRef>
+          <a:fontRef idx="minor">
+            <a:schemeClr val="tx1"/>
+          </a:fontRef>
+        </p:style>
+      </p:cxnSp>
+      <p:sp>
+        <p:nvSpPr>
+          <p:cNvPr id="17" name="矩形 16">
+            <a:extLst>
+              <a:ext uri="{FF2B5EF4-FFF2-40B4-BE49-F238E27FC236}">
+                <a16:creationId xmlns:a16="http://schemas.microsoft.com/office/drawing/2014/main" id="{3E4269C3-122F-20C3-873F-242B636FC649}"/>
+              </a:ext>
+            </a:extLst>
+          </p:cNvPr>
+          <p:cNvSpPr/>
+          <p:nvPr/>
+        </p:nvSpPr>
+        <p:spPr>
+          <a:xfrm>
+            <a:off x="5035923" y="4822451"/>
+            <a:ext cx="72000" cy="432000"/>
+          </a:xfrm>
+          <a:prstGeom prst="rect">
+            <a:avLst/>
+          </a:prstGeom>
+          <a:noFill/>
+          <a:ln>
+            <a:solidFill>
+              <a:schemeClr val="tx1"/>
+            </a:solidFill>
+          </a:ln>
+        </p:spPr>
+        <p:style>
+          <a:lnRef idx="2">
+            <a:schemeClr val="accent1">
+              <a:shade val="15000"/>
+            </a:schemeClr>
+          </a:lnRef>
+          <a:fillRef idx="1">
+            <a:schemeClr val="accent1"/>
+          </a:fillRef>
+          <a:effectRef idx="0">
+            <a:schemeClr val="accent1"/>
+          </a:effectRef>
+          <a:fontRef idx="minor">
+            <a:schemeClr val="lt1"/>
+          </a:fontRef>
+        </p:style>
+        <p:txBody>
+          <a:bodyPr rtlCol="0" anchor="ctr"/>
+          <a:lstStyle/>
+          <a:p>
+            <a:pPr algn="ctr"/>
+            <a:endParaRPr lang="zh-CN" altLang="en-US" sz="1400" dirty="0">
+              <a:solidFill>
+                <a:sysClr val="windowText" lastClr="000000"/>
+              </a:solidFill>
+            </a:endParaRPr>
+          </a:p>
+        </p:txBody>
+      </p:sp>
+      <p:sp>
+        <p:nvSpPr>
+          <p:cNvPr id="19" name="矩形 18">
+            <a:extLst>
+              <a:ext uri="{FF2B5EF4-FFF2-40B4-BE49-F238E27FC236}">
+                <a16:creationId xmlns:a16="http://schemas.microsoft.com/office/drawing/2014/main" id="{9C1D9827-4F22-9FCC-A4D1-F0319D2FD452}"/>
+              </a:ext>
+            </a:extLst>
+          </p:cNvPr>
+          <p:cNvSpPr/>
+          <p:nvPr/>
+        </p:nvSpPr>
+        <p:spPr>
+          <a:xfrm>
+            <a:off x="6043923" y="4822451"/>
+            <a:ext cx="72000" cy="432000"/>
+          </a:xfrm>
+          <a:prstGeom prst="rect">
+            <a:avLst/>
+          </a:prstGeom>
+          <a:noFill/>
+          <a:ln>
+            <a:solidFill>
+              <a:schemeClr val="tx1"/>
+            </a:solidFill>
+          </a:ln>
+        </p:spPr>
+        <p:style>
+          <a:lnRef idx="2">
+            <a:schemeClr val="accent1">
+              <a:shade val="15000"/>
+            </a:schemeClr>
+          </a:lnRef>
+          <a:fillRef idx="1">
+            <a:schemeClr val="accent1"/>
+          </a:fillRef>
+          <a:effectRef idx="0">
+            <a:schemeClr val="accent1"/>
+          </a:effectRef>
+          <a:fontRef idx="minor">
+            <a:schemeClr val="lt1"/>
+          </a:fontRef>
+        </p:style>
+        <p:txBody>
+          <a:bodyPr rtlCol="0" anchor="ctr"/>
+          <a:lstStyle/>
+          <a:p>
+            <a:pPr algn="ctr"/>
+            <a:endParaRPr lang="zh-CN" altLang="en-US" sz="1400" dirty="0">
+              <a:solidFill>
+                <a:sysClr val="windowText" lastClr="000000"/>
+              </a:solidFill>
+            </a:endParaRPr>
+          </a:p>
+        </p:txBody>
+      </p:sp>
     </p:spTree>
     <p:extLst>
       <p:ext uri="{BB962C8B-B14F-4D97-AF65-F5344CB8AC3E}">
@@ -8937,6 +9336,1218 @@
           <a:chExt cx="0" cy="0"/>
         </a:xfrm>
       </p:grpSpPr>
+      <p:pic>
+        <p:nvPicPr>
+          <p:cNvPr id="18" name="图形 17" descr="办公室职员">
+            <a:extLst>
+              <a:ext uri="{FF2B5EF4-FFF2-40B4-BE49-F238E27FC236}">
+                <a16:creationId xmlns:a16="http://schemas.microsoft.com/office/drawing/2014/main" id="{61EE3786-B63C-C7D1-15E2-7191C941793B}"/>
+              </a:ext>
+            </a:extLst>
+          </p:cNvPr>
+          <p:cNvPicPr>
+            <a:picLocks noChangeAspect="1"/>
+          </p:cNvPicPr>
+          <p:nvPr/>
+        </p:nvPicPr>
+        <p:blipFill>
+          <a:blip>
+            <a:extLst>
+              <a:ext uri="{96DAC541-7B7A-43D3-8B79-37D633B846F1}">
+                <asvg:svgBlip xmlns:asvg="http://schemas.microsoft.com/office/drawing/2016/SVG/main" r:embed="rId2"/>
+              </a:ext>
+            </a:extLst>
+          </a:blip>
+          <a:stretch>
+            <a:fillRect/>
+          </a:stretch>
+        </p:blipFill>
+        <p:spPr>
+          <a:xfrm>
+            <a:off x="5783203" y="2188107"/>
+            <a:ext cx="360000" cy="360000"/>
+          </a:xfrm>
+          <a:prstGeom prst="rect">
+            <a:avLst/>
+          </a:prstGeom>
+        </p:spPr>
+      </p:pic>
+      <p:pic>
+        <p:nvPicPr>
+          <p:cNvPr id="20" name="图形 19" descr="男人">
+            <a:extLst>
+              <a:ext uri="{FF2B5EF4-FFF2-40B4-BE49-F238E27FC236}">
+                <a16:creationId xmlns:a16="http://schemas.microsoft.com/office/drawing/2014/main" id="{C86E605B-D9BC-54B7-CBB5-0A98AAD25CBC}"/>
+              </a:ext>
+            </a:extLst>
+          </p:cNvPr>
+          <p:cNvPicPr>
+            <a:picLocks noChangeAspect="1"/>
+          </p:cNvPicPr>
+          <p:nvPr/>
+        </p:nvPicPr>
+        <p:blipFill>
+          <a:blip>
+            <a:extLst>
+              <a:ext uri="{96DAC541-7B7A-43D3-8B79-37D633B846F1}">
+                <asvg:svgBlip xmlns:asvg="http://schemas.microsoft.com/office/drawing/2016/SVG/main" r:embed="rId3"/>
+              </a:ext>
+            </a:extLst>
+          </a:blip>
+          <a:stretch>
+            <a:fillRect/>
+          </a:stretch>
+        </p:blipFill>
+        <p:spPr>
+          <a:xfrm>
+            <a:off x="4229307" y="2964924"/>
+            <a:ext cx="360000" cy="360000"/>
+          </a:xfrm>
+          <a:prstGeom prst="rect">
+            <a:avLst/>
+          </a:prstGeom>
+        </p:spPr>
+      </p:pic>
+      <p:pic>
+        <p:nvPicPr>
+          <p:cNvPr id="22" name="图形 21" descr="妇女">
+            <a:extLst>
+              <a:ext uri="{FF2B5EF4-FFF2-40B4-BE49-F238E27FC236}">
+                <a16:creationId xmlns:a16="http://schemas.microsoft.com/office/drawing/2014/main" id="{95ED47E7-3437-C315-65E7-8291ABAF5C8E}"/>
+              </a:ext>
+            </a:extLst>
+          </p:cNvPr>
+          <p:cNvPicPr>
+            <a:picLocks noChangeAspect="1"/>
+          </p:cNvPicPr>
+          <p:nvPr/>
+        </p:nvPicPr>
+        <p:blipFill>
+          <a:blip>
+            <a:extLst>
+              <a:ext uri="{96DAC541-7B7A-43D3-8B79-37D633B846F1}">
+                <asvg:svgBlip xmlns:asvg="http://schemas.microsoft.com/office/drawing/2016/SVG/main" r:embed="rId4"/>
+              </a:ext>
+            </a:extLst>
+          </a:blip>
+          <a:stretch>
+            <a:fillRect/>
+          </a:stretch>
+        </p:blipFill>
+        <p:spPr>
+          <a:xfrm>
+            <a:off x="7337099" y="2964924"/>
+            <a:ext cx="360000" cy="360000"/>
+          </a:xfrm>
+          <a:prstGeom prst="rect">
+            <a:avLst/>
+          </a:prstGeom>
+        </p:spPr>
+      </p:pic>
+      <p:pic>
+        <p:nvPicPr>
+          <p:cNvPr id="24" name="图形 23" descr="两位男士">
+            <a:extLst>
+              <a:ext uri="{FF2B5EF4-FFF2-40B4-BE49-F238E27FC236}">
+                <a16:creationId xmlns:a16="http://schemas.microsoft.com/office/drawing/2014/main" id="{54A71D42-4B83-7E86-799B-69913FB410EA}"/>
+              </a:ext>
+            </a:extLst>
+          </p:cNvPr>
+          <p:cNvPicPr>
+            <a:picLocks noChangeAspect="1"/>
+          </p:cNvPicPr>
+          <p:nvPr/>
+        </p:nvPicPr>
+        <p:blipFill>
+          <a:blip>
+            <a:extLst>
+              <a:ext uri="{96DAC541-7B7A-43D3-8B79-37D633B846F1}">
+                <asvg:svgBlip xmlns:asvg="http://schemas.microsoft.com/office/drawing/2016/SVG/main" r:embed="rId5"/>
+              </a:ext>
+            </a:extLst>
+          </a:blip>
+          <a:stretch>
+            <a:fillRect/>
+          </a:stretch>
+        </p:blipFill>
+        <p:spPr>
+          <a:xfrm>
+            <a:off x="4049307" y="3627636"/>
+            <a:ext cx="360000" cy="360000"/>
+          </a:xfrm>
+          <a:prstGeom prst="rect">
+            <a:avLst/>
+          </a:prstGeom>
+        </p:spPr>
+      </p:pic>
+      <p:pic>
+        <p:nvPicPr>
+          <p:cNvPr id="26" name="图形 25" descr="男人和女人">
+            <a:extLst>
+              <a:ext uri="{FF2B5EF4-FFF2-40B4-BE49-F238E27FC236}">
+                <a16:creationId xmlns:a16="http://schemas.microsoft.com/office/drawing/2014/main" id="{144CB3BC-19AD-1F90-5227-649ADCDED73D}"/>
+              </a:ext>
+            </a:extLst>
+          </p:cNvPr>
+          <p:cNvPicPr>
+            <a:picLocks noChangeAspect="1"/>
+          </p:cNvPicPr>
+          <p:nvPr/>
+        </p:nvPicPr>
+        <p:blipFill>
+          <a:blip>
+            <a:extLst>
+              <a:ext uri="{96DAC541-7B7A-43D3-8B79-37D633B846F1}">
+                <asvg:svgBlip xmlns:asvg="http://schemas.microsoft.com/office/drawing/2016/SVG/main" r:embed="rId6"/>
+              </a:ext>
+            </a:extLst>
+          </a:blip>
+          <a:stretch>
+            <a:fillRect/>
+          </a:stretch>
+        </p:blipFill>
+        <p:spPr>
+          <a:xfrm>
+            <a:off x="5597106" y="3627636"/>
+            <a:ext cx="360000" cy="360000"/>
+          </a:xfrm>
+          <a:prstGeom prst="rect">
+            <a:avLst/>
+          </a:prstGeom>
+        </p:spPr>
+      </p:pic>
+      <p:pic>
+        <p:nvPicPr>
+          <p:cNvPr id="28" name="图形 27" descr="两个女人">
+            <a:extLst>
+              <a:ext uri="{FF2B5EF4-FFF2-40B4-BE49-F238E27FC236}">
+                <a16:creationId xmlns:a16="http://schemas.microsoft.com/office/drawing/2014/main" id="{FE40A322-FDAB-46C0-3FD4-13769150D61C}"/>
+              </a:ext>
+            </a:extLst>
+          </p:cNvPr>
+          <p:cNvPicPr>
+            <a:picLocks noChangeAspect="1"/>
+          </p:cNvPicPr>
+          <p:nvPr/>
+        </p:nvPicPr>
+        <p:blipFill>
+          <a:blip>
+            <a:extLst>
+              <a:ext uri="{96DAC541-7B7A-43D3-8B79-37D633B846F1}">
+                <asvg:svgBlip xmlns:asvg="http://schemas.microsoft.com/office/drawing/2016/SVG/main" r:embed="rId7"/>
+              </a:ext>
+            </a:extLst>
+          </a:blip>
+          <a:stretch>
+            <a:fillRect/>
+          </a:stretch>
+        </p:blipFill>
+        <p:spPr>
+          <a:xfrm>
+            <a:off x="7533869" y="3627636"/>
+            <a:ext cx="360000" cy="360000"/>
+          </a:xfrm>
+          <a:prstGeom prst="rect">
+            <a:avLst/>
+          </a:prstGeom>
+        </p:spPr>
+      </p:pic>
+      <p:pic>
+        <p:nvPicPr>
+          <p:cNvPr id="31" name="图形 30" descr="男人">
+            <a:extLst>
+              <a:ext uri="{FF2B5EF4-FFF2-40B4-BE49-F238E27FC236}">
+                <a16:creationId xmlns:a16="http://schemas.microsoft.com/office/drawing/2014/main" id="{03769248-FAEC-CDEB-E632-3DF0E1A15EA1}"/>
+              </a:ext>
+            </a:extLst>
+          </p:cNvPr>
+          <p:cNvPicPr>
+            <a:picLocks noChangeAspect="1"/>
+          </p:cNvPicPr>
+          <p:nvPr/>
+        </p:nvPicPr>
+        <p:blipFill>
+          <a:blip>
+            <a:extLst>
+              <a:ext uri="{96DAC541-7B7A-43D3-8B79-37D633B846F1}">
+                <asvg:svgBlip xmlns:asvg="http://schemas.microsoft.com/office/drawing/2016/SVG/main" r:embed="rId3"/>
+              </a:ext>
+            </a:extLst>
+          </a:blip>
+          <a:stretch>
+            <a:fillRect/>
+          </a:stretch>
+        </p:blipFill>
+        <p:spPr>
+          <a:xfrm>
+            <a:off x="6116836" y="2964924"/>
+            <a:ext cx="360000" cy="360000"/>
+          </a:xfrm>
+          <a:prstGeom prst="rect">
+            <a:avLst/>
+          </a:prstGeom>
+        </p:spPr>
+      </p:pic>
+      <p:pic>
+        <p:nvPicPr>
+          <p:cNvPr id="32" name="图形 31" descr="男人和女人">
+            <a:extLst>
+              <a:ext uri="{FF2B5EF4-FFF2-40B4-BE49-F238E27FC236}">
+                <a16:creationId xmlns:a16="http://schemas.microsoft.com/office/drawing/2014/main" id="{A3B1C69A-1F0D-30E3-AB9E-4C8F7F6B0013}"/>
+              </a:ext>
+            </a:extLst>
+          </p:cNvPr>
+          <p:cNvPicPr>
+            <a:picLocks noChangeAspect="1"/>
+          </p:cNvPicPr>
+          <p:nvPr/>
+        </p:nvPicPr>
+        <p:blipFill>
+          <a:blip>
+            <a:extLst>
+              <a:ext uri="{96DAC541-7B7A-43D3-8B79-37D633B846F1}">
+                <asvg:svgBlip xmlns:asvg="http://schemas.microsoft.com/office/drawing/2016/SVG/main" r:embed="rId6"/>
+              </a:ext>
+            </a:extLst>
+          </a:blip>
+          <a:stretch>
+            <a:fillRect/>
+          </a:stretch>
+        </p:blipFill>
+        <p:spPr>
+          <a:xfrm>
+            <a:off x="7140330" y="3627636"/>
+            <a:ext cx="360000" cy="360000"/>
+          </a:xfrm>
+          <a:prstGeom prst="rect">
+            <a:avLst/>
+          </a:prstGeom>
+        </p:spPr>
+      </p:pic>
+      <p:pic>
+        <p:nvPicPr>
+          <p:cNvPr id="33" name="图形 32" descr="男人和女人">
+            <a:extLst>
+              <a:ext uri="{FF2B5EF4-FFF2-40B4-BE49-F238E27FC236}">
+                <a16:creationId xmlns:a16="http://schemas.microsoft.com/office/drawing/2014/main" id="{C782A6B0-CCE9-BC7D-62BF-DBFDF218E42B}"/>
+              </a:ext>
+            </a:extLst>
+          </p:cNvPr>
+          <p:cNvPicPr>
+            <a:picLocks noChangeAspect="1"/>
+          </p:cNvPicPr>
+          <p:nvPr/>
+        </p:nvPicPr>
+        <p:blipFill>
+          <a:blip>
+            <a:extLst>
+              <a:ext uri="{96DAC541-7B7A-43D3-8B79-37D633B846F1}">
+                <asvg:svgBlip xmlns:asvg="http://schemas.microsoft.com/office/drawing/2016/SVG/main" r:embed="rId6"/>
+              </a:ext>
+            </a:extLst>
+          </a:blip>
+          <a:stretch>
+            <a:fillRect/>
+          </a:stretch>
+        </p:blipFill>
+        <p:spPr>
+          <a:xfrm>
+            <a:off x="5942146" y="3627636"/>
+            <a:ext cx="360000" cy="360000"/>
+          </a:xfrm>
+          <a:prstGeom prst="rect">
+            <a:avLst/>
+          </a:prstGeom>
+        </p:spPr>
+      </p:pic>
+      <p:pic>
+        <p:nvPicPr>
+          <p:cNvPr id="34" name="图形 33" descr="男人和女人">
+            <a:extLst>
+              <a:ext uri="{FF2B5EF4-FFF2-40B4-BE49-F238E27FC236}">
+                <a16:creationId xmlns:a16="http://schemas.microsoft.com/office/drawing/2014/main" id="{0EF33656-AC00-F5AA-A048-FB4E5998CB12}"/>
+              </a:ext>
+            </a:extLst>
+          </p:cNvPr>
+          <p:cNvPicPr>
+            <a:picLocks noChangeAspect="1"/>
+          </p:cNvPicPr>
+          <p:nvPr/>
+        </p:nvPicPr>
+        <p:blipFill>
+          <a:blip>
+            <a:extLst>
+              <a:ext uri="{96DAC541-7B7A-43D3-8B79-37D633B846F1}">
+                <asvg:svgBlip xmlns:asvg="http://schemas.microsoft.com/office/drawing/2016/SVG/main" r:embed="rId6"/>
+              </a:ext>
+            </a:extLst>
+          </a:blip>
+          <a:stretch>
+            <a:fillRect/>
+          </a:stretch>
+        </p:blipFill>
+        <p:spPr>
+          <a:xfrm>
+            <a:off x="6287186" y="3627636"/>
+            <a:ext cx="360000" cy="360000"/>
+          </a:xfrm>
+          <a:prstGeom prst="rect">
+            <a:avLst/>
+          </a:prstGeom>
+        </p:spPr>
+      </p:pic>
+      <p:pic>
+        <p:nvPicPr>
+          <p:cNvPr id="35" name="图形 34" descr="两位男士">
+            <a:extLst>
+              <a:ext uri="{FF2B5EF4-FFF2-40B4-BE49-F238E27FC236}">
+                <a16:creationId xmlns:a16="http://schemas.microsoft.com/office/drawing/2014/main" id="{C01B9DC9-D06C-B5D1-5546-A6324812A18E}"/>
+              </a:ext>
+            </a:extLst>
+          </p:cNvPr>
+          <p:cNvPicPr>
+            <a:picLocks noChangeAspect="1"/>
+          </p:cNvPicPr>
+          <p:nvPr/>
+        </p:nvPicPr>
+        <p:blipFill>
+          <a:blip>
+            <a:extLst>
+              <a:ext uri="{96DAC541-7B7A-43D3-8B79-37D633B846F1}">
+                <asvg:svgBlip xmlns:asvg="http://schemas.microsoft.com/office/drawing/2016/SVG/main" r:embed="rId5"/>
+              </a:ext>
+            </a:extLst>
+          </a:blip>
+          <a:stretch>
+            <a:fillRect/>
+          </a:stretch>
+        </p:blipFill>
+        <p:spPr>
+          <a:xfrm>
+            <a:off x="4409307" y="3627636"/>
+            <a:ext cx="360000" cy="360000"/>
+          </a:xfrm>
+          <a:prstGeom prst="rect">
+            <a:avLst/>
+          </a:prstGeom>
+        </p:spPr>
+      </p:pic>
+      <p:cxnSp>
+        <p:nvCxnSpPr>
+          <p:cNvPr id="37" name="连接符: 肘形 36">
+            <a:extLst>
+              <a:ext uri="{FF2B5EF4-FFF2-40B4-BE49-F238E27FC236}">
+                <a16:creationId xmlns:a16="http://schemas.microsoft.com/office/drawing/2014/main" id="{051B2315-8E7B-98F9-836F-90F65985240F}"/>
+              </a:ext>
+            </a:extLst>
+          </p:cNvPr>
+          <p:cNvCxnSpPr>
+            <a:stCxn id="18" idx="2"/>
+            <a:endCxn id="20" idx="0"/>
+          </p:cNvCxnSpPr>
+          <p:nvPr/>
+        </p:nvCxnSpPr>
+        <p:spPr>
+          <a:xfrm rot="5400000">
+            <a:off x="4977847" y="1979567"/>
+            <a:ext cx="416817" cy="1553896"/>
+          </a:xfrm>
+          <a:prstGeom prst="bentConnector3">
+            <a:avLst/>
+          </a:prstGeom>
+          <a:ln>
+            <a:solidFill>
+              <a:schemeClr val="tx1"/>
+            </a:solidFill>
+            <a:tailEnd type="none"/>
+          </a:ln>
+        </p:spPr>
+        <p:style>
+          <a:lnRef idx="1">
+            <a:schemeClr val="accent1"/>
+          </a:lnRef>
+          <a:fillRef idx="0">
+            <a:schemeClr val="accent1"/>
+          </a:fillRef>
+          <a:effectRef idx="0">
+            <a:schemeClr val="accent1"/>
+          </a:effectRef>
+          <a:fontRef idx="minor">
+            <a:schemeClr val="tx1"/>
+          </a:fontRef>
+        </p:style>
+      </p:cxnSp>
+      <p:cxnSp>
+        <p:nvCxnSpPr>
+          <p:cNvPr id="39" name="连接符: 肘形 38">
+            <a:extLst>
+              <a:ext uri="{FF2B5EF4-FFF2-40B4-BE49-F238E27FC236}">
+                <a16:creationId xmlns:a16="http://schemas.microsoft.com/office/drawing/2014/main" id="{774A9BE5-4293-43D6-2E06-214E64E6A2AC}"/>
+              </a:ext>
+            </a:extLst>
+          </p:cNvPr>
+          <p:cNvCxnSpPr>
+            <a:cxnSpLocks/>
+            <a:stCxn id="31" idx="0"/>
+            <a:endCxn id="18" idx="2"/>
+          </p:cNvCxnSpPr>
+          <p:nvPr/>
+        </p:nvCxnSpPr>
+        <p:spPr>
+          <a:xfrm rot="16200000" flipV="1">
+            <a:off x="5921612" y="2589699"/>
+            <a:ext cx="416817" cy="333633"/>
+          </a:xfrm>
+          <a:prstGeom prst="bentConnector3">
+            <a:avLst>
+              <a:gd name="adj1" fmla="val 50000"/>
+            </a:avLst>
+          </a:prstGeom>
+          <a:ln>
+            <a:solidFill>
+              <a:schemeClr val="tx1"/>
+            </a:solidFill>
+            <a:tailEnd type="none"/>
+          </a:ln>
+        </p:spPr>
+        <p:style>
+          <a:lnRef idx="1">
+            <a:schemeClr val="accent1"/>
+          </a:lnRef>
+          <a:fillRef idx="0">
+            <a:schemeClr val="accent1"/>
+          </a:fillRef>
+          <a:effectRef idx="0">
+            <a:schemeClr val="accent1"/>
+          </a:effectRef>
+          <a:fontRef idx="minor">
+            <a:schemeClr val="tx1"/>
+          </a:fontRef>
+        </p:style>
+      </p:cxnSp>
+      <p:cxnSp>
+        <p:nvCxnSpPr>
+          <p:cNvPr id="43" name="连接符: 肘形 42">
+            <a:extLst>
+              <a:ext uri="{FF2B5EF4-FFF2-40B4-BE49-F238E27FC236}">
+                <a16:creationId xmlns:a16="http://schemas.microsoft.com/office/drawing/2014/main" id="{2188F721-3289-CD1C-49DD-9690C5B2A583}"/>
+              </a:ext>
+            </a:extLst>
+          </p:cNvPr>
+          <p:cNvCxnSpPr>
+            <a:stCxn id="18" idx="2"/>
+            <a:endCxn id="22" idx="0"/>
+          </p:cNvCxnSpPr>
+          <p:nvPr/>
+        </p:nvCxnSpPr>
+        <p:spPr>
+          <a:xfrm rot="16200000" flipH="1">
+            <a:off x="6531743" y="1979567"/>
+            <a:ext cx="416817" cy="1553896"/>
+          </a:xfrm>
+          <a:prstGeom prst="bentConnector3">
+            <a:avLst/>
+          </a:prstGeom>
+          <a:ln>
+            <a:solidFill>
+              <a:schemeClr val="tx1"/>
+            </a:solidFill>
+            <a:tailEnd type="none"/>
+          </a:ln>
+        </p:spPr>
+        <p:style>
+          <a:lnRef idx="1">
+            <a:schemeClr val="accent1"/>
+          </a:lnRef>
+          <a:fillRef idx="0">
+            <a:schemeClr val="accent1"/>
+          </a:fillRef>
+          <a:effectRef idx="0">
+            <a:schemeClr val="accent1"/>
+          </a:effectRef>
+          <a:fontRef idx="minor">
+            <a:schemeClr val="tx1"/>
+          </a:fontRef>
+        </p:style>
+      </p:cxnSp>
+      <p:cxnSp>
+        <p:nvCxnSpPr>
+          <p:cNvPr id="45" name="连接符: 肘形 44">
+            <a:extLst>
+              <a:ext uri="{FF2B5EF4-FFF2-40B4-BE49-F238E27FC236}">
+                <a16:creationId xmlns:a16="http://schemas.microsoft.com/office/drawing/2014/main" id="{734AF986-C8AD-EA39-BAC1-75AB249B2F10}"/>
+              </a:ext>
+            </a:extLst>
+          </p:cNvPr>
+          <p:cNvCxnSpPr>
+            <a:stCxn id="20" idx="2"/>
+            <a:endCxn id="24" idx="0"/>
+          </p:cNvCxnSpPr>
+          <p:nvPr/>
+        </p:nvCxnSpPr>
+        <p:spPr>
+          <a:xfrm rot="5400000">
+            <a:off x="4167951" y="3386280"/>
+            <a:ext cx="302712" cy="180000"/>
+          </a:xfrm>
+          <a:prstGeom prst="bentConnector3">
+            <a:avLst/>
+          </a:prstGeom>
+          <a:ln>
+            <a:solidFill>
+              <a:schemeClr val="tx1"/>
+            </a:solidFill>
+            <a:tailEnd type="none"/>
+          </a:ln>
+        </p:spPr>
+        <p:style>
+          <a:lnRef idx="1">
+            <a:schemeClr val="accent1"/>
+          </a:lnRef>
+          <a:fillRef idx="0">
+            <a:schemeClr val="accent1"/>
+          </a:fillRef>
+          <a:effectRef idx="0">
+            <a:schemeClr val="accent1"/>
+          </a:effectRef>
+          <a:fontRef idx="minor">
+            <a:schemeClr val="tx1"/>
+          </a:fontRef>
+        </p:style>
+      </p:cxnSp>
+      <p:cxnSp>
+        <p:nvCxnSpPr>
+          <p:cNvPr id="47" name="连接符: 肘形 46">
+            <a:extLst>
+              <a:ext uri="{FF2B5EF4-FFF2-40B4-BE49-F238E27FC236}">
+                <a16:creationId xmlns:a16="http://schemas.microsoft.com/office/drawing/2014/main" id="{193F899F-2933-219E-A219-3C79DBB6E663}"/>
+              </a:ext>
+            </a:extLst>
+          </p:cNvPr>
+          <p:cNvCxnSpPr>
+            <a:stCxn id="35" idx="0"/>
+            <a:endCxn id="20" idx="2"/>
+          </p:cNvCxnSpPr>
+          <p:nvPr/>
+        </p:nvCxnSpPr>
+        <p:spPr>
+          <a:xfrm rot="16200000" flipV="1">
+            <a:off x="4347951" y="3386280"/>
+            <a:ext cx="302712" cy="180000"/>
+          </a:xfrm>
+          <a:prstGeom prst="bentConnector3">
+            <a:avLst/>
+          </a:prstGeom>
+          <a:ln>
+            <a:solidFill>
+              <a:schemeClr val="tx1"/>
+            </a:solidFill>
+            <a:tailEnd type="none"/>
+          </a:ln>
+        </p:spPr>
+        <p:style>
+          <a:lnRef idx="1">
+            <a:schemeClr val="accent1"/>
+          </a:lnRef>
+          <a:fillRef idx="0">
+            <a:schemeClr val="accent1"/>
+          </a:fillRef>
+          <a:effectRef idx="0">
+            <a:schemeClr val="accent1"/>
+          </a:effectRef>
+          <a:fontRef idx="minor">
+            <a:schemeClr val="tx1"/>
+          </a:fontRef>
+        </p:style>
+      </p:cxnSp>
+      <p:cxnSp>
+        <p:nvCxnSpPr>
+          <p:cNvPr id="49" name="连接符: 肘形 48">
+            <a:extLst>
+              <a:ext uri="{FF2B5EF4-FFF2-40B4-BE49-F238E27FC236}">
+                <a16:creationId xmlns:a16="http://schemas.microsoft.com/office/drawing/2014/main" id="{A006C9A5-7850-E6A7-1E12-DECA2B6E5792}"/>
+              </a:ext>
+            </a:extLst>
+          </p:cNvPr>
+          <p:cNvCxnSpPr>
+            <a:cxnSpLocks/>
+            <a:stCxn id="31" idx="2"/>
+            <a:endCxn id="26" idx="0"/>
+          </p:cNvCxnSpPr>
+          <p:nvPr/>
+        </p:nvCxnSpPr>
+        <p:spPr>
+          <a:xfrm rot="5400000">
+            <a:off x="5885615" y="3216415"/>
+            <a:ext cx="302712" cy="519730"/>
+          </a:xfrm>
+          <a:prstGeom prst="bentConnector3">
+            <a:avLst>
+              <a:gd name="adj1" fmla="val 50000"/>
+            </a:avLst>
+          </a:prstGeom>
+          <a:ln>
+            <a:solidFill>
+              <a:schemeClr val="tx1"/>
+            </a:solidFill>
+            <a:tailEnd type="none"/>
+          </a:ln>
+        </p:spPr>
+        <p:style>
+          <a:lnRef idx="1">
+            <a:schemeClr val="accent1"/>
+          </a:lnRef>
+          <a:fillRef idx="0">
+            <a:schemeClr val="accent1"/>
+          </a:fillRef>
+          <a:effectRef idx="0">
+            <a:schemeClr val="accent1"/>
+          </a:effectRef>
+          <a:fontRef idx="minor">
+            <a:schemeClr val="tx1"/>
+          </a:fontRef>
+        </p:style>
+      </p:cxnSp>
+      <p:cxnSp>
+        <p:nvCxnSpPr>
+          <p:cNvPr id="51" name="连接符: 肘形 50">
+            <a:extLst>
+              <a:ext uri="{FF2B5EF4-FFF2-40B4-BE49-F238E27FC236}">
+                <a16:creationId xmlns:a16="http://schemas.microsoft.com/office/drawing/2014/main" id="{FA0A64DA-C240-CD55-39C6-2CD12FEE084D}"/>
+              </a:ext>
+            </a:extLst>
+          </p:cNvPr>
+          <p:cNvCxnSpPr>
+            <a:cxnSpLocks/>
+            <a:stCxn id="57" idx="0"/>
+            <a:endCxn id="31" idx="2"/>
+          </p:cNvCxnSpPr>
+          <p:nvPr/>
+        </p:nvCxnSpPr>
+        <p:spPr>
+          <a:xfrm rot="16200000" flipV="1">
+            <a:off x="6405345" y="3216415"/>
+            <a:ext cx="302712" cy="519729"/>
+          </a:xfrm>
+          <a:prstGeom prst="bentConnector3">
+            <a:avLst>
+              <a:gd name="adj1" fmla="val 50000"/>
+            </a:avLst>
+          </a:prstGeom>
+          <a:ln>
+            <a:solidFill>
+              <a:schemeClr val="tx1"/>
+            </a:solidFill>
+            <a:tailEnd type="none"/>
+          </a:ln>
+        </p:spPr>
+        <p:style>
+          <a:lnRef idx="1">
+            <a:schemeClr val="accent1"/>
+          </a:lnRef>
+          <a:fillRef idx="0">
+            <a:schemeClr val="accent1"/>
+          </a:fillRef>
+          <a:effectRef idx="0">
+            <a:schemeClr val="accent1"/>
+          </a:effectRef>
+          <a:fontRef idx="minor">
+            <a:schemeClr val="tx1"/>
+          </a:fontRef>
+        </p:style>
+      </p:cxnSp>
+      <p:cxnSp>
+        <p:nvCxnSpPr>
+          <p:cNvPr id="54" name="连接符: 肘形 53">
+            <a:extLst>
+              <a:ext uri="{FF2B5EF4-FFF2-40B4-BE49-F238E27FC236}">
+                <a16:creationId xmlns:a16="http://schemas.microsoft.com/office/drawing/2014/main" id="{7FDF33CE-DBD1-BCDB-9B9A-2CD74825659C}"/>
+              </a:ext>
+            </a:extLst>
+          </p:cNvPr>
+          <p:cNvCxnSpPr>
+            <a:stCxn id="32" idx="0"/>
+            <a:endCxn id="22" idx="2"/>
+          </p:cNvCxnSpPr>
+          <p:nvPr/>
+        </p:nvCxnSpPr>
+        <p:spPr>
+          <a:xfrm rot="5400000" flipH="1" flipV="1">
+            <a:off x="7267358" y="3377896"/>
+            <a:ext cx="302712" cy="196769"/>
+          </a:xfrm>
+          <a:prstGeom prst="bentConnector3">
+            <a:avLst/>
+          </a:prstGeom>
+          <a:ln>
+            <a:solidFill>
+              <a:schemeClr val="tx1"/>
+            </a:solidFill>
+            <a:tailEnd type="none"/>
+          </a:ln>
+        </p:spPr>
+        <p:style>
+          <a:lnRef idx="1">
+            <a:schemeClr val="accent1"/>
+          </a:lnRef>
+          <a:fillRef idx="0">
+            <a:schemeClr val="accent1"/>
+          </a:fillRef>
+          <a:effectRef idx="0">
+            <a:schemeClr val="accent1"/>
+          </a:effectRef>
+          <a:fontRef idx="minor">
+            <a:schemeClr val="tx1"/>
+          </a:fontRef>
+        </p:style>
+      </p:cxnSp>
+      <p:cxnSp>
+        <p:nvCxnSpPr>
+          <p:cNvPr id="56" name="连接符: 肘形 55">
+            <a:extLst>
+              <a:ext uri="{FF2B5EF4-FFF2-40B4-BE49-F238E27FC236}">
+                <a16:creationId xmlns:a16="http://schemas.microsoft.com/office/drawing/2014/main" id="{0C0E8C0D-ECE1-5CD9-48D4-4CBD639232AD}"/>
+              </a:ext>
+            </a:extLst>
+          </p:cNvPr>
+          <p:cNvCxnSpPr>
+            <a:stCxn id="22" idx="2"/>
+            <a:endCxn id="28" idx="0"/>
+          </p:cNvCxnSpPr>
+          <p:nvPr/>
+        </p:nvCxnSpPr>
+        <p:spPr>
+          <a:xfrm rot="16200000" flipH="1">
+            <a:off x="7464128" y="3377895"/>
+            <a:ext cx="302712" cy="196770"/>
+          </a:xfrm>
+          <a:prstGeom prst="bentConnector3">
+            <a:avLst/>
+          </a:prstGeom>
+          <a:ln>
+            <a:solidFill>
+              <a:schemeClr val="tx1"/>
+            </a:solidFill>
+            <a:tailEnd type="none"/>
+          </a:ln>
+        </p:spPr>
+        <p:style>
+          <a:lnRef idx="1">
+            <a:schemeClr val="accent1"/>
+          </a:lnRef>
+          <a:fillRef idx="0">
+            <a:schemeClr val="accent1"/>
+          </a:fillRef>
+          <a:effectRef idx="0">
+            <a:schemeClr val="accent1"/>
+          </a:effectRef>
+          <a:fontRef idx="minor">
+            <a:schemeClr val="tx1"/>
+          </a:fontRef>
+        </p:style>
+      </p:cxnSp>
+      <p:pic>
+        <p:nvPicPr>
+          <p:cNvPr id="57" name="图形 56" descr="男人和女人">
+            <a:extLst>
+              <a:ext uri="{FF2B5EF4-FFF2-40B4-BE49-F238E27FC236}">
+                <a16:creationId xmlns:a16="http://schemas.microsoft.com/office/drawing/2014/main" id="{FFA82F0A-A48A-C32F-B5A8-D34D96FC33CD}"/>
+              </a:ext>
+            </a:extLst>
+          </p:cNvPr>
+          <p:cNvPicPr>
+            <a:picLocks noChangeAspect="1"/>
+          </p:cNvPicPr>
+          <p:nvPr/>
+        </p:nvPicPr>
+        <p:blipFill>
+          <a:blip>
+            <a:extLst>
+              <a:ext uri="{96DAC541-7B7A-43D3-8B79-37D633B846F1}">
+                <asvg:svgBlip xmlns:asvg="http://schemas.microsoft.com/office/drawing/2016/SVG/main" r:embed="rId6"/>
+              </a:ext>
+            </a:extLst>
+          </a:blip>
+          <a:stretch>
+            <a:fillRect/>
+          </a:stretch>
+        </p:blipFill>
+        <p:spPr>
+          <a:xfrm>
+            <a:off x="6636565" y="3627636"/>
+            <a:ext cx="360000" cy="360000"/>
+          </a:xfrm>
+          <a:prstGeom prst="rect">
+            <a:avLst/>
+          </a:prstGeom>
+        </p:spPr>
+      </p:pic>
+      <p:cxnSp>
+        <p:nvCxnSpPr>
+          <p:cNvPr id="61" name="连接符: 肘形 60">
+            <a:extLst>
+              <a:ext uri="{FF2B5EF4-FFF2-40B4-BE49-F238E27FC236}">
+                <a16:creationId xmlns:a16="http://schemas.microsoft.com/office/drawing/2014/main" id="{9B8AA0A9-D9C9-E1A3-C5B9-0AD2843490E8}"/>
+              </a:ext>
+            </a:extLst>
+          </p:cNvPr>
+          <p:cNvCxnSpPr>
+            <a:stCxn id="31" idx="2"/>
+            <a:endCxn id="33" idx="0"/>
+          </p:cNvCxnSpPr>
+          <p:nvPr/>
+        </p:nvCxnSpPr>
+        <p:spPr>
+          <a:xfrm rot="5400000">
+            <a:off x="6058135" y="3388935"/>
+            <a:ext cx="302712" cy="174690"/>
+          </a:xfrm>
+          <a:prstGeom prst="bentConnector3">
+            <a:avLst/>
+          </a:prstGeom>
+          <a:ln>
+            <a:solidFill>
+              <a:schemeClr val="tx1"/>
+            </a:solidFill>
+            <a:tailEnd type="none"/>
+          </a:ln>
+        </p:spPr>
+        <p:style>
+          <a:lnRef idx="1">
+            <a:schemeClr val="accent1"/>
+          </a:lnRef>
+          <a:fillRef idx="0">
+            <a:schemeClr val="accent1"/>
+          </a:fillRef>
+          <a:effectRef idx="0">
+            <a:schemeClr val="accent1"/>
+          </a:effectRef>
+          <a:fontRef idx="minor">
+            <a:schemeClr val="tx1"/>
+          </a:fontRef>
+        </p:style>
+      </p:cxnSp>
+      <p:cxnSp>
+        <p:nvCxnSpPr>
+          <p:cNvPr id="63" name="连接符: 肘形 62">
+            <a:extLst>
+              <a:ext uri="{FF2B5EF4-FFF2-40B4-BE49-F238E27FC236}">
+                <a16:creationId xmlns:a16="http://schemas.microsoft.com/office/drawing/2014/main" id="{0F35B89B-3E2D-5C40-A93C-DF931D5C6120}"/>
+              </a:ext>
+            </a:extLst>
+          </p:cNvPr>
+          <p:cNvCxnSpPr>
+            <a:endCxn id="34" idx="0"/>
+          </p:cNvCxnSpPr>
+          <p:nvPr/>
+        </p:nvCxnSpPr>
+        <p:spPr>
+          <a:xfrm rot="16200000" flipH="1">
+            <a:off x="6230655" y="3391104"/>
+            <a:ext cx="302713" cy="170350"/>
+          </a:xfrm>
+          <a:prstGeom prst="bentConnector3">
+            <a:avLst/>
+          </a:prstGeom>
+          <a:ln>
+            <a:solidFill>
+              <a:schemeClr val="tx1"/>
+            </a:solidFill>
+            <a:tailEnd type="none"/>
+          </a:ln>
+        </p:spPr>
+        <p:style>
+          <a:lnRef idx="1">
+            <a:schemeClr val="accent1"/>
+          </a:lnRef>
+          <a:fillRef idx="0">
+            <a:schemeClr val="accent1"/>
+          </a:fillRef>
+          <a:effectRef idx="0">
+            <a:schemeClr val="accent1"/>
+          </a:effectRef>
+          <a:fontRef idx="minor">
+            <a:schemeClr val="tx1"/>
+          </a:fontRef>
+        </p:style>
+      </p:cxnSp>
+      <p:pic>
+        <p:nvPicPr>
+          <p:cNvPr id="64" name="图形 63" descr="男人">
+            <a:extLst>
+              <a:ext uri="{FF2B5EF4-FFF2-40B4-BE49-F238E27FC236}">
+                <a16:creationId xmlns:a16="http://schemas.microsoft.com/office/drawing/2014/main" id="{9A527C4C-3F1A-2955-E125-8B4D1BDA2D75}"/>
+              </a:ext>
+            </a:extLst>
+          </p:cNvPr>
+          <p:cNvPicPr>
+            <a:picLocks noChangeAspect="1"/>
+          </p:cNvPicPr>
+          <p:nvPr/>
+        </p:nvPicPr>
+        <p:blipFill>
+          <a:blip>
+            <a:extLst>
+              <a:ext uri="{96DAC541-7B7A-43D3-8B79-37D633B846F1}">
+                <asvg:svgBlip xmlns:asvg="http://schemas.microsoft.com/office/drawing/2016/SVG/main" r:embed="rId3"/>
+              </a:ext>
+            </a:extLst>
+          </a:blip>
+          <a:stretch>
+            <a:fillRect/>
+          </a:stretch>
+        </p:blipFill>
+        <p:spPr>
+          <a:xfrm>
+            <a:off x="4976840" y="2964924"/>
+            <a:ext cx="360000" cy="360000"/>
+          </a:xfrm>
+          <a:prstGeom prst="rect">
+            <a:avLst/>
+          </a:prstGeom>
+        </p:spPr>
+      </p:pic>
+      <p:cxnSp>
+        <p:nvCxnSpPr>
+          <p:cNvPr id="66" name="连接符: 肘形 65">
+            <a:extLst>
+              <a:ext uri="{FF2B5EF4-FFF2-40B4-BE49-F238E27FC236}">
+                <a16:creationId xmlns:a16="http://schemas.microsoft.com/office/drawing/2014/main" id="{6D6E6734-2890-4189-271C-B009BD8AF7BC}"/>
+              </a:ext>
+            </a:extLst>
+          </p:cNvPr>
+          <p:cNvCxnSpPr>
+            <a:cxnSpLocks/>
+            <a:stCxn id="18" idx="2"/>
+            <a:endCxn id="64" idx="0"/>
+          </p:cNvCxnSpPr>
+          <p:nvPr/>
+        </p:nvCxnSpPr>
+        <p:spPr>
+          <a:xfrm rot="5400000">
+            <a:off x="5351614" y="2353334"/>
+            <a:ext cx="416817" cy="806363"/>
+          </a:xfrm>
+          <a:prstGeom prst="bentConnector3">
+            <a:avLst>
+              <a:gd name="adj1" fmla="val 50000"/>
+            </a:avLst>
+          </a:prstGeom>
+          <a:ln>
+            <a:solidFill>
+              <a:schemeClr val="tx1"/>
+            </a:solidFill>
+            <a:tailEnd type="none"/>
+          </a:ln>
+        </p:spPr>
+        <p:style>
+          <a:lnRef idx="1">
+            <a:schemeClr val="accent1"/>
+          </a:lnRef>
+          <a:fillRef idx="0">
+            <a:schemeClr val="accent1"/>
+          </a:fillRef>
+          <a:effectRef idx="0">
+            <a:schemeClr val="accent1"/>
+          </a:effectRef>
+          <a:fontRef idx="minor">
+            <a:schemeClr val="tx1"/>
+          </a:fontRef>
+        </p:style>
+      </p:cxnSp>
+      <p:pic>
+        <p:nvPicPr>
+          <p:cNvPr id="68" name="图形 67" descr="妇女">
+            <a:extLst>
+              <a:ext uri="{FF2B5EF4-FFF2-40B4-BE49-F238E27FC236}">
+                <a16:creationId xmlns:a16="http://schemas.microsoft.com/office/drawing/2014/main" id="{D6346FE1-9F4A-F891-B798-7213310E1880}"/>
+              </a:ext>
+            </a:extLst>
+          </p:cNvPr>
+          <p:cNvPicPr>
+            <a:picLocks noChangeAspect="1"/>
+          </p:cNvPicPr>
+          <p:nvPr/>
+        </p:nvPicPr>
+        <p:blipFill>
+          <a:blip>
+            <a:extLst>
+              <a:ext uri="{96DAC541-7B7A-43D3-8B79-37D633B846F1}">
+                <asvg:svgBlip xmlns:asvg="http://schemas.microsoft.com/office/drawing/2016/SVG/main" r:embed="rId8"/>
+              </a:ext>
+            </a:extLst>
+          </a:blip>
+          <a:stretch>
+            <a:fillRect/>
+          </a:stretch>
+        </p:blipFill>
+        <p:spPr>
+          <a:xfrm>
+            <a:off x="5419010" y="4297162"/>
+            <a:ext cx="360000" cy="360000"/>
+          </a:xfrm>
+          <a:prstGeom prst="rect">
+            <a:avLst/>
+          </a:prstGeom>
+        </p:spPr>
+      </p:pic>
+      <p:pic>
+        <p:nvPicPr>
+          <p:cNvPr id="69" name="图形 68" descr="妇女">
+            <a:extLst>
+              <a:ext uri="{FF2B5EF4-FFF2-40B4-BE49-F238E27FC236}">
+                <a16:creationId xmlns:a16="http://schemas.microsoft.com/office/drawing/2014/main" id="{798190B6-53D8-AFD7-796A-9C4AA92096A8}"/>
+              </a:ext>
+            </a:extLst>
+          </p:cNvPr>
+          <p:cNvPicPr>
+            <a:picLocks noChangeAspect="1"/>
+          </p:cNvPicPr>
+          <p:nvPr/>
+        </p:nvPicPr>
+        <p:blipFill>
+          <a:blip>
+            <a:extLst>
+              <a:ext uri="{96DAC541-7B7A-43D3-8B79-37D633B846F1}">
+                <asvg:svgBlip xmlns:asvg="http://schemas.microsoft.com/office/drawing/2016/SVG/main" r:embed="rId8"/>
+              </a:ext>
+            </a:extLst>
+          </a:blip>
+          <a:stretch>
+            <a:fillRect/>
+          </a:stretch>
+        </p:blipFill>
+        <p:spPr>
+          <a:xfrm>
+            <a:off x="5805384" y="4297162"/>
+            <a:ext cx="360000" cy="360000"/>
+          </a:xfrm>
+          <a:prstGeom prst="rect">
+            <a:avLst/>
+          </a:prstGeom>
+        </p:spPr>
+      </p:pic>
+      <p:cxnSp>
+        <p:nvCxnSpPr>
+          <p:cNvPr id="71" name="连接符: 肘形 70">
+            <a:extLst>
+              <a:ext uri="{FF2B5EF4-FFF2-40B4-BE49-F238E27FC236}">
+                <a16:creationId xmlns:a16="http://schemas.microsoft.com/office/drawing/2014/main" id="{6553620F-41B3-CB9A-6D32-CC72C9D80262}"/>
+              </a:ext>
+            </a:extLst>
+          </p:cNvPr>
+          <p:cNvCxnSpPr>
+            <a:cxnSpLocks/>
+            <a:stCxn id="26" idx="2"/>
+            <a:endCxn id="68" idx="0"/>
+          </p:cNvCxnSpPr>
+          <p:nvPr/>
+        </p:nvCxnSpPr>
+        <p:spPr>
+          <a:xfrm rot="5400000">
+            <a:off x="5533295" y="4053351"/>
+            <a:ext cx="309526" cy="178096"/>
+          </a:xfrm>
+          <a:prstGeom prst="bentConnector3">
+            <a:avLst/>
+          </a:prstGeom>
+          <a:ln>
+            <a:solidFill>
+              <a:schemeClr val="tx1"/>
+            </a:solidFill>
+            <a:tailEnd type="none"/>
+          </a:ln>
+        </p:spPr>
+        <p:style>
+          <a:lnRef idx="1">
+            <a:schemeClr val="accent1"/>
+          </a:lnRef>
+          <a:fillRef idx="0">
+            <a:schemeClr val="accent1"/>
+          </a:fillRef>
+          <a:effectRef idx="0">
+            <a:schemeClr val="accent1"/>
+          </a:effectRef>
+          <a:fontRef idx="minor">
+            <a:schemeClr val="tx1"/>
+          </a:fontRef>
+        </p:style>
+      </p:cxnSp>
+      <p:cxnSp>
+        <p:nvCxnSpPr>
+          <p:cNvPr id="73" name="连接符: 肘形 72">
+            <a:extLst>
+              <a:ext uri="{FF2B5EF4-FFF2-40B4-BE49-F238E27FC236}">
+                <a16:creationId xmlns:a16="http://schemas.microsoft.com/office/drawing/2014/main" id="{0697A766-8B54-F55C-685E-688F597AACC7}"/>
+              </a:ext>
+            </a:extLst>
+          </p:cNvPr>
+          <p:cNvCxnSpPr>
+            <a:stCxn id="69" idx="0"/>
+            <a:endCxn id="26" idx="2"/>
+          </p:cNvCxnSpPr>
+          <p:nvPr/>
+        </p:nvCxnSpPr>
+        <p:spPr>
+          <a:xfrm rot="16200000" flipV="1">
+            <a:off x="5726482" y="4038260"/>
+            <a:ext cx="309526" cy="208278"/>
+          </a:xfrm>
+          <a:prstGeom prst="bentConnector3">
+            <a:avLst/>
+          </a:prstGeom>
+          <a:ln>
+            <a:solidFill>
+              <a:schemeClr val="tx1"/>
+            </a:solidFill>
+            <a:tailEnd type="none"/>
+          </a:ln>
+        </p:spPr>
+        <p:style>
+          <a:lnRef idx="1">
+            <a:schemeClr val="accent1"/>
+          </a:lnRef>
+          <a:fillRef idx="0">
+            <a:schemeClr val="accent1"/>
+          </a:fillRef>
+          <a:effectRef idx="0">
+            <a:schemeClr val="accent1"/>
+          </a:effectRef>
+          <a:fontRef idx="minor">
+            <a:schemeClr val="tx1"/>
+          </a:fontRef>
+        </p:style>
+      </p:cxnSp>
+    </p:spTree>
+    <p:extLst>
+      <p:ext uri="{BB962C8B-B14F-4D97-AF65-F5344CB8AC3E}">
+        <p14:creationId xmlns:p14="http://schemas.microsoft.com/office/powerpoint/2010/main" val="3804316481"/>
+      </p:ext>
+    </p:extLst>
+  </p:cSld>
+  <p:clrMapOvr>
+    <a:masterClrMapping/>
+  </p:clrMapOvr>
+</p:sld>
+</file>
+
+<file path=ppt/slides/slide7.xml><?xml version="1.0" encoding="utf-8"?>
+<p:sld xmlns:a="http://schemas.openxmlformats.org/drawingml/2006/main" xmlns:r="http://schemas.openxmlformats.org/officeDocument/2006/relationships" xmlns:p="http://schemas.openxmlformats.org/presentationml/2006/main">
+  <p:cSld>
+    <p:spTree>
+      <p:nvGrpSpPr>
+        <p:cNvPr id="1" name=""/>
+        <p:cNvGrpSpPr/>
+        <p:nvPr/>
+      </p:nvGrpSpPr>
+      <p:grpSpPr>
+        <a:xfrm>
+          <a:off x="0" y="0"/>
+          <a:ext cx="0" cy="0"/>
+          <a:chOff x="0" y="0"/>
+          <a:chExt cx="0" cy="0"/>
+        </a:xfrm>
+      </p:grpSpPr>
       <p:sp>
         <p:nvSpPr>
           <p:cNvPr id="16" name="矩形 15">
@@ -10289,7 +11900,7 @@
 </p:sld>
 </file>
 
-<file path=ppt/slides/slide7.xml><?xml version="1.0" encoding="utf-8"?>
+<file path=ppt/slides/slide8.xml><?xml version="1.0" encoding="utf-8"?>
 <p:sld xmlns:a="http://schemas.openxmlformats.org/drawingml/2006/main" xmlns:r="http://schemas.openxmlformats.org/officeDocument/2006/relationships" xmlns:p="http://schemas.openxmlformats.org/presentationml/2006/main">
   <p:cSld>
     <p:spTree>

--- a/se/file/se.pptx
+++ b/se/file/se.pptx
@@ -26901,7 +26901,7 @@
                   <a:schemeClr val="tx1"/>
                 </a:solidFill>
               </a:rPr>
-              <a:t>Module</a:t>
+              <a:t>Function</a:t>
             </a:r>
             <a:endParaRPr lang="zh-CN" altLang="en-US" sz="1400" dirty="0">
               <a:solidFill>
@@ -26965,7 +26965,7 @@
                   <a:schemeClr val="tx1"/>
                 </a:solidFill>
               </a:rPr>
-              <a:t>Module</a:t>
+              <a:t>Function</a:t>
             </a:r>
             <a:endParaRPr lang="zh-CN" altLang="en-US" sz="1400" dirty="0">
               <a:solidFill>
@@ -27029,7 +27029,7 @@
                   <a:schemeClr val="tx1"/>
                 </a:solidFill>
               </a:rPr>
-              <a:t>Module</a:t>
+              <a:t>Function</a:t>
             </a:r>
             <a:endParaRPr lang="zh-CN" altLang="en-US" sz="1400" dirty="0">
               <a:solidFill>
@@ -27093,7 +27093,7 @@
                   <a:schemeClr val="tx1"/>
                 </a:solidFill>
               </a:rPr>
-              <a:t>Module</a:t>
+              <a:t>Function</a:t>
             </a:r>
             <a:endParaRPr lang="zh-CN" altLang="en-US" sz="1400" dirty="0">
               <a:solidFill>
@@ -27157,7 +27157,7 @@
                   <a:schemeClr val="tx1"/>
                 </a:solidFill>
               </a:rPr>
-              <a:t>Module</a:t>
+              <a:t>Function</a:t>
             </a:r>
             <a:endParaRPr lang="zh-CN" altLang="en-US" sz="1400" dirty="0">
               <a:solidFill>
@@ -27221,7 +27221,7 @@
                   <a:schemeClr val="tx1"/>
                 </a:solidFill>
               </a:rPr>
-              <a:t>Module</a:t>
+              <a:t>Function</a:t>
             </a:r>
             <a:endParaRPr lang="zh-CN" altLang="en-US" sz="1400" dirty="0">
               <a:solidFill>
@@ -27285,7 +27285,7 @@
                   <a:schemeClr val="tx1"/>
                 </a:solidFill>
               </a:rPr>
-              <a:t>Module</a:t>
+              <a:t>Function</a:t>
             </a:r>
             <a:endParaRPr lang="zh-CN" altLang="en-US" sz="1400" dirty="0">
               <a:solidFill>
@@ -27349,7 +27349,7 @@
                   <a:schemeClr val="tx1"/>
                 </a:solidFill>
               </a:rPr>
-              <a:t>Module</a:t>
+              <a:t>Function</a:t>
             </a:r>
             <a:endParaRPr lang="zh-CN" altLang="en-US" sz="1400" dirty="0">
               <a:solidFill>
@@ -27683,7 +27683,7 @@
                   <a:schemeClr val="tx1"/>
                 </a:solidFill>
               </a:rPr>
-              <a:t>Module</a:t>
+              <a:t>Function</a:t>
             </a:r>
             <a:endParaRPr lang="zh-CN" altLang="en-US" sz="1400" dirty="0">
               <a:solidFill>
@@ -27747,7 +27747,7 @@
                   <a:schemeClr val="tx1"/>
                 </a:solidFill>
               </a:rPr>
-              <a:t>Module</a:t>
+              <a:t>Function</a:t>
             </a:r>
             <a:endParaRPr lang="zh-CN" altLang="en-US" sz="1400" dirty="0">
               <a:solidFill>
@@ -28077,7 +28077,7 @@
                   <a:schemeClr val="tx1"/>
                 </a:solidFill>
               </a:rPr>
-              <a:t>Module</a:t>
+              <a:t>Function</a:t>
             </a:r>
             <a:endParaRPr lang="zh-CN" altLang="en-US" sz="1400" dirty="0">
               <a:solidFill>
@@ -28437,7 +28437,7 @@
                   <a:schemeClr val="tx1"/>
                 </a:solidFill>
               </a:rPr>
-              <a:t>Module</a:t>
+              <a:t>Function</a:t>
             </a:r>
             <a:endParaRPr lang="zh-CN" altLang="en-US" sz="1400" dirty="0">
               <a:solidFill>
@@ -28501,7 +28501,7 @@
                   <a:schemeClr val="tx1"/>
                 </a:solidFill>
               </a:rPr>
-              <a:t>Module</a:t>
+              <a:t>Function</a:t>
             </a:r>
             <a:endParaRPr lang="zh-CN" altLang="en-US" sz="1400" dirty="0">
               <a:solidFill>
@@ -28565,7 +28565,7 @@
                   <a:schemeClr val="tx1"/>
                 </a:solidFill>
               </a:rPr>
-              <a:t>Module</a:t>
+              <a:t>Function</a:t>
             </a:r>
             <a:endParaRPr lang="zh-CN" altLang="en-US" sz="1400" dirty="0">
               <a:solidFill>
@@ -28993,7 +28993,7 @@
                   <a:schemeClr val="tx1"/>
                 </a:solidFill>
               </a:rPr>
-              <a:t>Module</a:t>
+              <a:t>Function</a:t>
             </a:r>
             <a:endParaRPr lang="zh-CN" altLang="en-US" sz="1400" dirty="0">
               <a:solidFill>
@@ -29057,7 +29057,7 @@
                   <a:schemeClr val="tx1"/>
                 </a:solidFill>
               </a:rPr>
-              <a:t>Module</a:t>
+              <a:t>Function</a:t>
             </a:r>
             <a:endParaRPr lang="zh-CN" altLang="en-US" sz="1400" dirty="0">
               <a:solidFill>
@@ -29121,7 +29121,7 @@
                   <a:schemeClr val="tx1"/>
                 </a:solidFill>
               </a:rPr>
-              <a:t>Module</a:t>
+              <a:t>Function</a:t>
             </a:r>
             <a:endParaRPr lang="zh-CN" altLang="en-US" sz="1400" dirty="0">
               <a:solidFill>
@@ -29549,7 +29549,7 @@
                   <a:schemeClr val="tx1"/>
                 </a:solidFill>
               </a:rPr>
-              <a:t>Module</a:t>
+              <a:t>Function</a:t>
             </a:r>
             <a:endParaRPr lang="zh-CN" altLang="en-US" sz="1400" dirty="0">
               <a:solidFill>
@@ -29613,7 +29613,7 @@
                   <a:schemeClr val="tx1"/>
                 </a:solidFill>
               </a:rPr>
-              <a:t>Module</a:t>
+              <a:t>Function</a:t>
             </a:r>
             <a:endParaRPr lang="zh-CN" altLang="en-US" sz="1400" dirty="0">
               <a:solidFill>
@@ -29677,7 +29677,7 @@
                   <a:schemeClr val="tx1"/>
                 </a:solidFill>
               </a:rPr>
-              <a:t>Module</a:t>
+              <a:t>Function</a:t>
             </a:r>
             <a:endParaRPr lang="zh-CN" altLang="en-US" sz="1400" dirty="0">
               <a:solidFill>
@@ -30105,7 +30105,7 @@
                   <a:schemeClr val="tx1"/>
                 </a:solidFill>
               </a:rPr>
-              <a:t>Module</a:t>
+              <a:t>Function</a:t>
             </a:r>
             <a:endParaRPr lang="zh-CN" altLang="en-US" sz="1400" dirty="0">
               <a:solidFill>
@@ -30169,7 +30169,7 @@
                   <a:schemeClr val="tx1"/>
                 </a:solidFill>
               </a:rPr>
-              <a:t>Module</a:t>
+              <a:t>Function</a:t>
             </a:r>
             <a:endParaRPr lang="zh-CN" altLang="en-US" sz="1400" dirty="0">
               <a:solidFill>
@@ -30233,7 +30233,7 @@
                   <a:schemeClr val="tx1"/>
                 </a:solidFill>
               </a:rPr>
-              <a:t>Module</a:t>
+              <a:t>Function</a:t>
             </a:r>
             <a:endParaRPr lang="zh-CN" altLang="en-US" sz="1400" dirty="0">
               <a:solidFill>

--- a/se/file/se.pptx
+++ b/se/file/se.pptx
@@ -276,7 +276,7 @@
           <a:p>
             <a:fld id="{84617D17-380A-4B40-92EC-38E177F94207}" type="datetimeFigureOut">
               <a:rPr lang="zh-CN" altLang="en-US" smtClean="0"/>
-              <a:t>2026/4/12</a:t>
+              <a:t>2026/4/13</a:t>
             </a:fld>
             <a:endParaRPr lang="zh-CN" altLang="en-US"/>
           </a:p>
@@ -474,7 +474,7 @@
           <a:p>
             <a:fld id="{84617D17-380A-4B40-92EC-38E177F94207}" type="datetimeFigureOut">
               <a:rPr lang="zh-CN" altLang="en-US" smtClean="0"/>
-              <a:t>2026/4/12</a:t>
+              <a:t>2026/4/13</a:t>
             </a:fld>
             <a:endParaRPr lang="zh-CN" altLang="en-US"/>
           </a:p>
@@ -682,7 +682,7 @@
           <a:p>
             <a:fld id="{84617D17-380A-4B40-92EC-38E177F94207}" type="datetimeFigureOut">
               <a:rPr lang="zh-CN" altLang="en-US" smtClean="0"/>
-              <a:t>2026/4/12</a:t>
+              <a:t>2026/4/13</a:t>
             </a:fld>
             <a:endParaRPr lang="zh-CN" altLang="en-US"/>
           </a:p>
@@ -880,7 +880,7 @@
           <a:p>
             <a:fld id="{84617D17-380A-4B40-92EC-38E177F94207}" type="datetimeFigureOut">
               <a:rPr lang="zh-CN" altLang="en-US" smtClean="0"/>
-              <a:t>2026/4/12</a:t>
+              <a:t>2026/4/13</a:t>
             </a:fld>
             <a:endParaRPr lang="zh-CN" altLang="en-US"/>
           </a:p>
@@ -1155,7 +1155,7 @@
           <a:p>
             <a:fld id="{84617D17-380A-4B40-92EC-38E177F94207}" type="datetimeFigureOut">
               <a:rPr lang="zh-CN" altLang="en-US" smtClean="0"/>
-              <a:t>2026/4/12</a:t>
+              <a:t>2026/4/13</a:t>
             </a:fld>
             <a:endParaRPr lang="zh-CN" altLang="en-US"/>
           </a:p>
@@ -1420,7 +1420,7 @@
           <a:p>
             <a:fld id="{84617D17-380A-4B40-92EC-38E177F94207}" type="datetimeFigureOut">
               <a:rPr lang="zh-CN" altLang="en-US" smtClean="0"/>
-              <a:t>2026/4/12</a:t>
+              <a:t>2026/4/13</a:t>
             </a:fld>
             <a:endParaRPr lang="zh-CN" altLang="en-US"/>
           </a:p>
@@ -1832,7 +1832,7 @@
           <a:p>
             <a:fld id="{84617D17-380A-4B40-92EC-38E177F94207}" type="datetimeFigureOut">
               <a:rPr lang="zh-CN" altLang="en-US" smtClean="0"/>
-              <a:t>2026/4/12</a:t>
+              <a:t>2026/4/13</a:t>
             </a:fld>
             <a:endParaRPr lang="zh-CN" altLang="en-US"/>
           </a:p>
@@ -1973,7 +1973,7 @@
           <a:p>
             <a:fld id="{84617D17-380A-4B40-92EC-38E177F94207}" type="datetimeFigureOut">
               <a:rPr lang="zh-CN" altLang="en-US" smtClean="0"/>
-              <a:t>2026/4/12</a:t>
+              <a:t>2026/4/13</a:t>
             </a:fld>
             <a:endParaRPr lang="zh-CN" altLang="en-US"/>
           </a:p>
@@ -2086,7 +2086,7 @@
           <a:p>
             <a:fld id="{84617D17-380A-4B40-92EC-38E177F94207}" type="datetimeFigureOut">
               <a:rPr lang="zh-CN" altLang="en-US" smtClean="0"/>
-              <a:t>2026/4/12</a:t>
+              <a:t>2026/4/13</a:t>
             </a:fld>
             <a:endParaRPr lang="zh-CN" altLang="en-US"/>
           </a:p>
@@ -2397,7 +2397,7 @@
           <a:p>
             <a:fld id="{84617D17-380A-4B40-92EC-38E177F94207}" type="datetimeFigureOut">
               <a:rPr lang="zh-CN" altLang="en-US" smtClean="0"/>
-              <a:t>2026/4/12</a:t>
+              <a:t>2026/4/13</a:t>
             </a:fld>
             <a:endParaRPr lang="zh-CN" altLang="en-US"/>
           </a:p>
@@ -2685,7 +2685,7 @@
           <a:p>
             <a:fld id="{84617D17-380A-4B40-92EC-38E177F94207}" type="datetimeFigureOut">
               <a:rPr lang="zh-CN" altLang="en-US" smtClean="0"/>
-              <a:t>2026/4/12</a:t>
+              <a:t>2026/4/13</a:t>
             </a:fld>
             <a:endParaRPr lang="zh-CN" altLang="en-US"/>
           </a:p>
@@ -2926,7 +2926,7 @@
           <a:p>
             <a:fld id="{84617D17-380A-4B40-92EC-38E177F94207}" type="datetimeFigureOut">
               <a:rPr lang="zh-CN" altLang="en-US" smtClean="0"/>
-              <a:t>2026/4/12</a:t>
+              <a:t>2026/4/13</a:t>
             </a:fld>
             <a:endParaRPr lang="zh-CN" altLang="en-US"/>
           </a:p>
@@ -26849,10 +26849,10 @@
       </p:grpSpPr>
       <p:sp>
         <p:nvSpPr>
-          <p:cNvPr id="4" name="矩形 3">
-            <a:extLst>
-              <a:ext uri="{FF2B5EF4-FFF2-40B4-BE49-F238E27FC236}">
-                <a16:creationId xmlns:a16="http://schemas.microsoft.com/office/drawing/2014/main" id="{468FCF27-3B3F-3F14-B298-65E9B36D4017}"/>
+          <p:cNvPr id="5" name="矩形 4">
+            <a:extLst>
+              <a:ext uri="{FF2B5EF4-FFF2-40B4-BE49-F238E27FC236}">
+                <a16:creationId xmlns:a16="http://schemas.microsoft.com/office/drawing/2014/main" id="{A872A251-5BBD-FA4D-B02E-BC4D36FB4391}"/>
               </a:ext>
             </a:extLst>
           </p:cNvPr>
@@ -26861,7 +26861,7 @@
         </p:nvSpPr>
         <p:spPr>
           <a:xfrm>
-            <a:off x="1574494" y="1360940"/>
+            <a:off x="3122521" y="1360940"/>
             <a:ext cx="1080000" cy="432000"/>
           </a:xfrm>
           <a:prstGeom prst="rect">
@@ -26913,10 +26913,10 @@
       </p:sp>
       <p:sp>
         <p:nvSpPr>
-          <p:cNvPr id="5" name="矩形 4">
-            <a:extLst>
-              <a:ext uri="{FF2B5EF4-FFF2-40B4-BE49-F238E27FC236}">
-                <a16:creationId xmlns:a16="http://schemas.microsoft.com/office/drawing/2014/main" id="{A872A251-5BBD-FA4D-B02E-BC4D36FB4391}"/>
+          <p:cNvPr id="6" name="矩形 5">
+            <a:extLst>
+              <a:ext uri="{FF2B5EF4-FFF2-40B4-BE49-F238E27FC236}">
+                <a16:creationId xmlns:a16="http://schemas.microsoft.com/office/drawing/2014/main" id="{0A8043E0-114C-2A47-A7DA-90C643F74129}"/>
               </a:ext>
             </a:extLst>
           </p:cNvPr>
@@ -26925,7 +26925,7 @@
         </p:nvSpPr>
         <p:spPr>
           <a:xfrm>
-            <a:off x="3122521" y="1360940"/>
+            <a:off x="4670548" y="1360940"/>
             <a:ext cx="1080000" cy="432000"/>
           </a:xfrm>
           <a:prstGeom prst="rect">
@@ -26977,10 +26977,10 @@
       </p:sp>
       <p:sp>
         <p:nvSpPr>
-          <p:cNvPr id="6" name="矩形 5">
-            <a:extLst>
-              <a:ext uri="{FF2B5EF4-FFF2-40B4-BE49-F238E27FC236}">
-                <a16:creationId xmlns:a16="http://schemas.microsoft.com/office/drawing/2014/main" id="{0A8043E0-114C-2A47-A7DA-90C643F74129}"/>
+          <p:cNvPr id="7" name="矩形 6">
+            <a:extLst>
+              <a:ext uri="{FF2B5EF4-FFF2-40B4-BE49-F238E27FC236}">
+                <a16:creationId xmlns:a16="http://schemas.microsoft.com/office/drawing/2014/main" id="{F6D9B0D4-7FD6-EB1F-8427-F2BE440F0403}"/>
               </a:ext>
             </a:extLst>
           </p:cNvPr>
@@ -26989,7 +26989,7 @@
         </p:nvSpPr>
         <p:spPr>
           <a:xfrm>
-            <a:off x="4670548" y="1360940"/>
+            <a:off x="6218576" y="1360940"/>
             <a:ext cx="1080000" cy="432000"/>
           </a:xfrm>
           <a:prstGeom prst="rect">
@@ -27041,10 +27041,10 @@
       </p:sp>
       <p:sp>
         <p:nvSpPr>
-          <p:cNvPr id="7" name="矩形 6">
-            <a:extLst>
-              <a:ext uri="{FF2B5EF4-FFF2-40B4-BE49-F238E27FC236}">
-                <a16:creationId xmlns:a16="http://schemas.microsoft.com/office/drawing/2014/main" id="{F6D9B0D4-7FD6-EB1F-8427-F2BE440F0403}"/>
+          <p:cNvPr id="9" name="矩形 8">
+            <a:extLst>
+              <a:ext uri="{FF2B5EF4-FFF2-40B4-BE49-F238E27FC236}">
+                <a16:creationId xmlns:a16="http://schemas.microsoft.com/office/drawing/2014/main" id="{4D76143E-4D29-EAF1-D3E9-ECD5F686878F}"/>
               </a:ext>
             </a:extLst>
           </p:cNvPr>
@@ -27053,7 +27053,7 @@
         </p:nvSpPr>
         <p:spPr>
           <a:xfrm>
-            <a:off x="6218576" y="1360940"/>
+            <a:off x="3122521" y="2997000"/>
             <a:ext cx="1080000" cy="432000"/>
           </a:xfrm>
           <a:prstGeom prst="rect">
@@ -27105,10 +27105,10 @@
       </p:sp>
       <p:sp>
         <p:nvSpPr>
-          <p:cNvPr id="8" name="矩形 7">
-            <a:extLst>
-              <a:ext uri="{FF2B5EF4-FFF2-40B4-BE49-F238E27FC236}">
-                <a16:creationId xmlns:a16="http://schemas.microsoft.com/office/drawing/2014/main" id="{4D9D9859-0102-36F5-F398-2292DAE74CAF}"/>
+          <p:cNvPr id="10" name="矩形 9">
+            <a:extLst>
+              <a:ext uri="{FF2B5EF4-FFF2-40B4-BE49-F238E27FC236}">
+                <a16:creationId xmlns:a16="http://schemas.microsoft.com/office/drawing/2014/main" id="{99E2F563-9DEE-1381-3288-17AD3973B962}"/>
               </a:ext>
             </a:extLst>
           </p:cNvPr>
@@ -27117,7 +27117,7 @@
         </p:nvSpPr>
         <p:spPr>
           <a:xfrm>
-            <a:off x="1574494" y="2997000"/>
+            <a:off x="4670548" y="2997000"/>
             <a:ext cx="1080000" cy="432000"/>
           </a:xfrm>
           <a:prstGeom prst="rect">
@@ -27169,10 +27169,10 @@
       </p:sp>
       <p:sp>
         <p:nvSpPr>
-          <p:cNvPr id="9" name="矩形 8">
-            <a:extLst>
-              <a:ext uri="{FF2B5EF4-FFF2-40B4-BE49-F238E27FC236}">
-                <a16:creationId xmlns:a16="http://schemas.microsoft.com/office/drawing/2014/main" id="{4D76143E-4D29-EAF1-D3E9-ECD5F686878F}"/>
+          <p:cNvPr id="11" name="矩形 10">
+            <a:extLst>
+              <a:ext uri="{FF2B5EF4-FFF2-40B4-BE49-F238E27FC236}">
+                <a16:creationId xmlns:a16="http://schemas.microsoft.com/office/drawing/2014/main" id="{657F1ABF-6442-A275-1937-6BF1F15004EF}"/>
               </a:ext>
             </a:extLst>
           </p:cNvPr>
@@ -27181,7 +27181,7 @@
         </p:nvSpPr>
         <p:spPr>
           <a:xfrm>
-            <a:off x="3122521" y="2997000"/>
+            <a:off x="6218576" y="2997000"/>
             <a:ext cx="1080000" cy="432000"/>
           </a:xfrm>
           <a:prstGeom prst="rect">
@@ -27231,179 +27231,6 @@
           </a:p>
         </p:txBody>
       </p:sp>
-      <p:sp>
-        <p:nvSpPr>
-          <p:cNvPr id="10" name="矩形 9">
-            <a:extLst>
-              <a:ext uri="{FF2B5EF4-FFF2-40B4-BE49-F238E27FC236}">
-                <a16:creationId xmlns:a16="http://schemas.microsoft.com/office/drawing/2014/main" id="{99E2F563-9DEE-1381-3288-17AD3973B962}"/>
-              </a:ext>
-            </a:extLst>
-          </p:cNvPr>
-          <p:cNvSpPr/>
-          <p:nvPr/>
-        </p:nvSpPr>
-        <p:spPr>
-          <a:xfrm>
-            <a:off x="4670548" y="2997000"/>
-            <a:ext cx="1080000" cy="432000"/>
-          </a:xfrm>
-          <a:prstGeom prst="rect">
-            <a:avLst/>
-          </a:prstGeom>
-          <a:noFill/>
-          <a:ln>
-            <a:solidFill>
-              <a:schemeClr val="tx1"/>
-            </a:solidFill>
-          </a:ln>
-        </p:spPr>
-        <p:style>
-          <a:lnRef idx="2">
-            <a:schemeClr val="accent1">
-              <a:shade val="15000"/>
-            </a:schemeClr>
-          </a:lnRef>
-          <a:fillRef idx="1">
-            <a:schemeClr val="accent1"/>
-          </a:fillRef>
-          <a:effectRef idx="0">
-            <a:schemeClr val="accent1"/>
-          </a:effectRef>
-          <a:fontRef idx="minor">
-            <a:schemeClr val="lt1"/>
-          </a:fontRef>
-        </p:style>
-        <p:txBody>
-          <a:bodyPr rtlCol="0" anchor="ctr"/>
-          <a:lstStyle/>
-          <a:p>
-            <a:pPr algn="ctr"/>
-            <a:r>
-              <a:rPr lang="en-US" altLang="zh-CN" sz="1400" dirty="0">
-                <a:solidFill>
-                  <a:schemeClr val="tx1"/>
-                </a:solidFill>
-              </a:rPr>
-              <a:t>Function</a:t>
-            </a:r>
-            <a:endParaRPr lang="zh-CN" altLang="en-US" sz="1400" dirty="0">
-              <a:solidFill>
-                <a:schemeClr val="tx1"/>
-              </a:solidFill>
-            </a:endParaRPr>
-          </a:p>
-        </p:txBody>
-      </p:sp>
-      <p:sp>
-        <p:nvSpPr>
-          <p:cNvPr id="11" name="矩形 10">
-            <a:extLst>
-              <a:ext uri="{FF2B5EF4-FFF2-40B4-BE49-F238E27FC236}">
-                <a16:creationId xmlns:a16="http://schemas.microsoft.com/office/drawing/2014/main" id="{657F1ABF-6442-A275-1937-6BF1F15004EF}"/>
-              </a:ext>
-            </a:extLst>
-          </p:cNvPr>
-          <p:cNvSpPr/>
-          <p:nvPr/>
-        </p:nvSpPr>
-        <p:spPr>
-          <a:xfrm>
-            <a:off x="6218576" y="2997000"/>
-            <a:ext cx="1080000" cy="432000"/>
-          </a:xfrm>
-          <a:prstGeom prst="rect">
-            <a:avLst/>
-          </a:prstGeom>
-          <a:noFill/>
-          <a:ln>
-            <a:solidFill>
-              <a:schemeClr val="tx1"/>
-            </a:solidFill>
-          </a:ln>
-        </p:spPr>
-        <p:style>
-          <a:lnRef idx="2">
-            <a:schemeClr val="accent1">
-              <a:shade val="15000"/>
-            </a:schemeClr>
-          </a:lnRef>
-          <a:fillRef idx="1">
-            <a:schemeClr val="accent1"/>
-          </a:fillRef>
-          <a:effectRef idx="0">
-            <a:schemeClr val="accent1"/>
-          </a:effectRef>
-          <a:fontRef idx="minor">
-            <a:schemeClr val="lt1"/>
-          </a:fontRef>
-        </p:style>
-        <p:txBody>
-          <a:bodyPr rtlCol="0" anchor="ctr"/>
-          <a:lstStyle/>
-          <a:p>
-            <a:pPr algn="ctr"/>
-            <a:r>
-              <a:rPr lang="en-US" altLang="zh-CN" sz="1400" dirty="0">
-                <a:solidFill>
-                  <a:schemeClr val="tx1"/>
-                </a:solidFill>
-              </a:rPr>
-              <a:t>Function</a:t>
-            </a:r>
-            <a:endParaRPr lang="zh-CN" altLang="en-US" sz="1400" dirty="0">
-              <a:solidFill>
-                <a:schemeClr val="tx1"/>
-              </a:solidFill>
-            </a:endParaRPr>
-          </a:p>
-        </p:txBody>
-      </p:sp>
-      <p:cxnSp>
-        <p:nvCxnSpPr>
-          <p:cNvPr id="13" name="直接箭头连接符 12">
-            <a:extLst>
-              <a:ext uri="{FF2B5EF4-FFF2-40B4-BE49-F238E27FC236}">
-                <a16:creationId xmlns:a16="http://schemas.microsoft.com/office/drawing/2014/main" id="{51EA44DC-D6D4-F67C-C67D-9EDB503BCA63}"/>
-              </a:ext>
-            </a:extLst>
-          </p:cNvPr>
-          <p:cNvCxnSpPr>
-            <a:stCxn id="4" idx="3"/>
-            <a:endCxn id="5" idx="1"/>
-          </p:cNvCxnSpPr>
-          <p:nvPr/>
-        </p:nvCxnSpPr>
-        <p:spPr>
-          <a:xfrm>
-            <a:off x="2654494" y="1576940"/>
-            <a:ext cx="468027" cy="0"/>
-          </a:xfrm>
-          <a:prstGeom prst="straightConnector1">
-            <a:avLst/>
-          </a:prstGeom>
-          <a:ln>
-            <a:solidFill>
-              <a:schemeClr val="tx1"/>
-            </a:solidFill>
-            <a:tailEnd type="triangle"/>
-          </a:ln>
-        </p:spPr>
-        <p:style>
-          <a:lnRef idx="1">
-            <a:schemeClr val="accent1"/>
-          </a:lnRef>
-          <a:fillRef idx="0">
-            <a:schemeClr val="accent1"/>
-          </a:fillRef>
-          <a:effectRef idx="0">
-            <a:schemeClr val="accent1"/>
-          </a:effectRef>
-          <a:fontRef idx="minor">
-            <a:schemeClr val="tx1"/>
-          </a:fontRef>
-        </p:style>
-      </p:cxnSp>
       <p:cxnSp>
         <p:nvCxnSpPr>
           <p:cNvPr id="15" name="直接箭头连接符 14">
@@ -27477,51 +27304,6 @@
               <a:schemeClr val="tx1"/>
             </a:solidFill>
             <a:tailEnd type="triangle"/>
-          </a:ln>
-        </p:spPr>
-        <p:style>
-          <a:lnRef idx="1">
-            <a:schemeClr val="accent1"/>
-          </a:lnRef>
-          <a:fillRef idx="0">
-            <a:schemeClr val="accent1"/>
-          </a:fillRef>
-          <a:effectRef idx="0">
-            <a:schemeClr val="accent1"/>
-          </a:effectRef>
-          <a:fontRef idx="minor">
-            <a:schemeClr val="tx1"/>
-          </a:fontRef>
-        </p:style>
-      </p:cxnSp>
-      <p:cxnSp>
-        <p:nvCxnSpPr>
-          <p:cNvPr id="19" name="直接连接符 18">
-            <a:extLst>
-              <a:ext uri="{FF2B5EF4-FFF2-40B4-BE49-F238E27FC236}">
-                <a16:creationId xmlns:a16="http://schemas.microsoft.com/office/drawing/2014/main" id="{FB00398F-B4D3-4A67-D9A7-34DBCF235777}"/>
-              </a:ext>
-            </a:extLst>
-          </p:cNvPr>
-          <p:cNvCxnSpPr>
-            <a:stCxn id="8" idx="3"/>
-            <a:endCxn id="9" idx="1"/>
-          </p:cNvCxnSpPr>
-          <p:nvPr/>
-        </p:nvCxnSpPr>
-        <p:spPr>
-          <a:xfrm>
-            <a:off x="2654494" y="3213000"/>
-            <a:ext cx="468027" cy="0"/>
-          </a:xfrm>
-          <a:prstGeom prst="line">
-            <a:avLst/>
-          </a:prstGeom>
-          <a:ln>
-            <a:solidFill>
-              <a:schemeClr val="tx1"/>
-            </a:solidFill>
-            <a:tailEnd type="none"/>
           </a:ln>
         </p:spPr>
         <p:style>
